--- a/outputs/manual-20260527-current-review/presentations/ruti-current-results-scientific-review/output/rUTI_Current_Results_Scientific_Review_2026-05-27.pptx
+++ b/outputs/manual-20260527-current-review/presentations/ruti-current-results-scientific-review/output/rUTI_Current_Results_Scientific_Review_2026-05-27.pptx
@@ -2,34 +2,34 @@
 <file path=ppt/presentation.xml><?xml version="1.0" encoding="utf-8"?>
 <p:presentation xmlns:p="http://schemas.openxmlformats.org/presentationml/2006/main">
   <p:sldMasterIdLst>
-    <p:sldMasterId xmlns:r="http://schemas.openxmlformats.org/officeDocument/2006/relationships" id="2147483648" r:id="R37658ef1bf5f4b07"/>
+    <p:sldMasterId xmlns:r="http://schemas.openxmlformats.org/officeDocument/2006/relationships" id="2147483648" r:id="R520efd25fb1d4696"/>
   </p:sldMasterIdLst>
   <p:notesMasterIdLst>
-    <p:notesMasterId xmlns:r="http://schemas.openxmlformats.org/officeDocument/2006/relationships" r:id="R7074496b7b324c91"/>
+    <p:notesMasterId xmlns:r="http://schemas.openxmlformats.org/officeDocument/2006/relationships" r:id="Ra6226a0b1b924ec2"/>
   </p:notesMasterIdLst>
   <p:sldIdLst>
-    <p:sldId xmlns:r="http://schemas.openxmlformats.org/officeDocument/2006/relationships" id="256" r:id="Rc0d216cc58704f5b"/>
-    <p:sldId xmlns:r="http://schemas.openxmlformats.org/officeDocument/2006/relationships" id="257" r:id="R2bbd09f911e64268"/>
-    <p:sldId xmlns:r="http://schemas.openxmlformats.org/officeDocument/2006/relationships" id="258" r:id="R3cd38db554bd46d1"/>
-    <p:sldId xmlns:r="http://schemas.openxmlformats.org/officeDocument/2006/relationships" id="259" r:id="R62c812d88b1e4c64"/>
-    <p:sldId xmlns:r="http://schemas.openxmlformats.org/officeDocument/2006/relationships" id="260" r:id="Rcf4823c42f48464e"/>
-    <p:sldId xmlns:r="http://schemas.openxmlformats.org/officeDocument/2006/relationships" id="261" r:id="R59ec50204fbc499c"/>
-    <p:sldId xmlns:r="http://schemas.openxmlformats.org/officeDocument/2006/relationships" id="262" r:id="Ra304883b7ccf4f59"/>
-    <p:sldId xmlns:r="http://schemas.openxmlformats.org/officeDocument/2006/relationships" id="263" r:id="R5b5634ba702c4ead"/>
-    <p:sldId xmlns:r="http://schemas.openxmlformats.org/officeDocument/2006/relationships" id="264" r:id="Re29565713eb54e71"/>
-    <p:sldId xmlns:r="http://schemas.openxmlformats.org/officeDocument/2006/relationships" id="265" r:id="R675c86c639444ef6"/>
-    <p:sldId xmlns:r="http://schemas.openxmlformats.org/officeDocument/2006/relationships" id="266" r:id="Ra1c4f1ea8b42478a"/>
-    <p:sldId xmlns:r="http://schemas.openxmlformats.org/officeDocument/2006/relationships" id="267" r:id="R3bd240d41f4b425c"/>
-    <p:sldId xmlns:r="http://schemas.openxmlformats.org/officeDocument/2006/relationships" id="268" r:id="R9de22bd6b915481c"/>
-    <p:sldId xmlns:r="http://schemas.openxmlformats.org/officeDocument/2006/relationships" id="269" r:id="R10a8d1c2a79f4cd3"/>
-    <p:sldId xmlns:r="http://schemas.openxmlformats.org/officeDocument/2006/relationships" id="270" r:id="R6323200d4a554110"/>
-    <p:sldId xmlns:r="http://schemas.openxmlformats.org/officeDocument/2006/relationships" id="271" r:id="R9316e7e56ea44395"/>
-    <p:sldId xmlns:r="http://schemas.openxmlformats.org/officeDocument/2006/relationships" id="272" r:id="R74b783b554ce4f6a"/>
-    <p:sldId xmlns:r="http://schemas.openxmlformats.org/officeDocument/2006/relationships" id="273" r:id="R164a75cc36d34b34"/>
-    <p:sldId xmlns:r="http://schemas.openxmlformats.org/officeDocument/2006/relationships" id="274" r:id="R1ae280cd71b444cf"/>
-    <p:sldId xmlns:r="http://schemas.openxmlformats.org/officeDocument/2006/relationships" id="275" r:id="R1e7afd4ae5be48a2"/>
-    <p:sldId xmlns:r="http://schemas.openxmlformats.org/officeDocument/2006/relationships" id="276" r:id="R745e2bdbdc6e4097"/>
-    <p:sldId xmlns:r="http://schemas.openxmlformats.org/officeDocument/2006/relationships" id="277" r:id="Ra64d16c8c9034c4d"/>
+    <p:sldId xmlns:r="http://schemas.openxmlformats.org/officeDocument/2006/relationships" id="256" r:id="R3baac646699e4a86"/>
+    <p:sldId xmlns:r="http://schemas.openxmlformats.org/officeDocument/2006/relationships" id="257" r:id="Rcf383495eab44d56"/>
+    <p:sldId xmlns:r="http://schemas.openxmlformats.org/officeDocument/2006/relationships" id="258" r:id="R8b26fd7d8ba94c84"/>
+    <p:sldId xmlns:r="http://schemas.openxmlformats.org/officeDocument/2006/relationships" id="259" r:id="Re6df549b57314bb4"/>
+    <p:sldId xmlns:r="http://schemas.openxmlformats.org/officeDocument/2006/relationships" id="260" r:id="Rfc6ae8b9cf6a40eb"/>
+    <p:sldId xmlns:r="http://schemas.openxmlformats.org/officeDocument/2006/relationships" id="261" r:id="R1f021522a8bd446d"/>
+    <p:sldId xmlns:r="http://schemas.openxmlformats.org/officeDocument/2006/relationships" id="262" r:id="R46c6e037b34f4535"/>
+    <p:sldId xmlns:r="http://schemas.openxmlformats.org/officeDocument/2006/relationships" id="263" r:id="R4c3a5fc4d5834d3e"/>
+    <p:sldId xmlns:r="http://schemas.openxmlformats.org/officeDocument/2006/relationships" id="264" r:id="R98e1a34b72a1406d"/>
+    <p:sldId xmlns:r="http://schemas.openxmlformats.org/officeDocument/2006/relationships" id="265" r:id="R2a21af2ccb3a43fd"/>
+    <p:sldId xmlns:r="http://schemas.openxmlformats.org/officeDocument/2006/relationships" id="266" r:id="Rb1cf20088cc8405d"/>
+    <p:sldId xmlns:r="http://schemas.openxmlformats.org/officeDocument/2006/relationships" id="267" r:id="R166242e0286146cd"/>
+    <p:sldId xmlns:r="http://schemas.openxmlformats.org/officeDocument/2006/relationships" id="268" r:id="R1500a1f771d24e6a"/>
+    <p:sldId xmlns:r="http://schemas.openxmlformats.org/officeDocument/2006/relationships" id="269" r:id="Ra724b46fa9df4556"/>
+    <p:sldId xmlns:r="http://schemas.openxmlformats.org/officeDocument/2006/relationships" id="270" r:id="Rdcf2f84221ae4851"/>
+    <p:sldId xmlns:r="http://schemas.openxmlformats.org/officeDocument/2006/relationships" id="271" r:id="Rd9575570817c4841"/>
+    <p:sldId xmlns:r="http://schemas.openxmlformats.org/officeDocument/2006/relationships" id="272" r:id="Rf8ea4f877671489a"/>
+    <p:sldId xmlns:r="http://schemas.openxmlformats.org/officeDocument/2006/relationships" id="273" r:id="R47a2a7319a5e4aa2"/>
+    <p:sldId xmlns:r="http://schemas.openxmlformats.org/officeDocument/2006/relationships" id="274" r:id="R74baa772db8c488a"/>
+    <p:sldId xmlns:r="http://schemas.openxmlformats.org/officeDocument/2006/relationships" id="275" r:id="R513d7dc6c964413f"/>
+    <p:sldId xmlns:r="http://schemas.openxmlformats.org/officeDocument/2006/relationships" id="276" r:id="Rc629b50a40d548fe"/>
+    <p:sldId xmlns:r="http://schemas.openxmlformats.org/officeDocument/2006/relationships" id="277" r:id="Rb6a8a93a08d94050"/>
   </p:sldIdLst>
   <p:sldSz cx="9144000" cy="6858000"/>
   <p:notesSz cx="6858000" cy="9144000"/>
@@ -273,7 +273,7 @@
 </p:notesMaster>
 </file>
 
-<file path=ppt/notesMasters/theme/theme2.xml><?xml version="1.0" encoding="utf-8"?>
+<file path=ppt/notesMasters/theme/theme3.xml><?xml version="1.0" encoding="utf-8"?>
 <a:theme xmlns:a="http://schemas.openxmlformats.org/drawingml/2006/main" name="Office">
   <a:themeElements>
     <a:clrScheme name="Office">
@@ -543,7 +543,26 @@
         <p:txBody>
           <a:bodyPr xmlns:a="http://schemas.openxmlformats.org/drawingml/2006/main"/>
           <a:lstStyle xmlns:a="http://schemas.openxmlformats.org/drawingml/2006/main"/>
-          <a:p xmlns:a="http://schemas.openxmlformats.org/drawingml/2006/main"/>
+          <a:p xmlns:a="http://schemas.openxmlformats.org/drawingml/2006/main">
+            <a:r>
+              <a:t>Release source: /Users/Aamir/Desktop/rUTIs/results/pipeline/longcycler_release_claim_registry.json</a:t>
+            </a:r>
+          </a:p>
+          <a:p xmlns:a="http://schemas.openxmlformats.org/drawingml/2006/main">
+            <a:r>
+              <a:t>Scope: selected QC-passing Longcycler assemblies only.</a:t>
+            </a:r>
+          </a:p>
+          <a:p xmlns:a="http://schemas.openxmlformats.org/drawingml/2006/main">
+            <a:r>
+              <a:t>Clinical phenotype: versioned operational UTI phenotype.</a:t>
+            </a:r>
+          </a:p>
+          <a:p xmlns:a="http://schemas.openxmlformats.org/drawingml/2006/main">
+            <a:r>
+              <a:t>Analytical anchors: 532 episodes; 893 direct pairs; 371 adjacent pairs; RQ01-RQ10.</a:t>
+            </a:r>
+          </a:p>
         </p:txBody>
       </p:sp>
       <p:sp>
@@ -609,7 +628,26 @@
         <p:txBody>
           <a:bodyPr xmlns:a="http://schemas.openxmlformats.org/drawingml/2006/main"/>
           <a:lstStyle xmlns:a="http://schemas.openxmlformats.org/drawingml/2006/main"/>
-          <a:p xmlns:a="http://schemas.openxmlformats.org/drawingml/2006/main"/>
+          <a:p xmlns:a="http://schemas.openxmlformats.org/drawingml/2006/main">
+            <a:r>
+              <a:t>Release source: /Users/Aamir/Desktop/rUTIs/results/pipeline/longcycler_release_claim_registry.json</a:t>
+            </a:r>
+          </a:p>
+          <a:p xmlns:a="http://schemas.openxmlformats.org/drawingml/2006/main">
+            <a:r>
+              <a:t>Scope: selected QC-passing Longcycler assemblies only.</a:t>
+            </a:r>
+          </a:p>
+          <a:p xmlns:a="http://schemas.openxmlformats.org/drawingml/2006/main">
+            <a:r>
+              <a:t>Clinical phenotype: versioned operational UTI phenotype.</a:t>
+            </a:r>
+          </a:p>
+          <a:p xmlns:a="http://schemas.openxmlformats.org/drawingml/2006/main">
+            <a:r>
+              <a:t>Analytical anchors: 532 episodes; 893 direct pairs; 371 adjacent pairs; RQ01-RQ10.</a:t>
+            </a:r>
+          </a:p>
         </p:txBody>
       </p:sp>
       <p:sp>
@@ -675,7 +713,26 @@
         <p:txBody>
           <a:bodyPr xmlns:a="http://schemas.openxmlformats.org/drawingml/2006/main"/>
           <a:lstStyle xmlns:a="http://schemas.openxmlformats.org/drawingml/2006/main"/>
-          <a:p xmlns:a="http://schemas.openxmlformats.org/drawingml/2006/main"/>
+          <a:p xmlns:a="http://schemas.openxmlformats.org/drawingml/2006/main">
+            <a:r>
+              <a:t>Release source: /Users/Aamir/Desktop/rUTIs/results/pipeline/longcycler_release_claim_registry.json</a:t>
+            </a:r>
+          </a:p>
+          <a:p xmlns:a="http://schemas.openxmlformats.org/drawingml/2006/main">
+            <a:r>
+              <a:t>Scope: selected QC-passing Longcycler assemblies only.</a:t>
+            </a:r>
+          </a:p>
+          <a:p xmlns:a="http://schemas.openxmlformats.org/drawingml/2006/main">
+            <a:r>
+              <a:t>Clinical phenotype: versioned operational UTI phenotype.</a:t>
+            </a:r>
+          </a:p>
+          <a:p xmlns:a="http://schemas.openxmlformats.org/drawingml/2006/main">
+            <a:r>
+              <a:t>Analytical anchors: 532 episodes; 893 direct pairs; 371 adjacent pairs; RQ01-RQ10.</a:t>
+            </a:r>
+          </a:p>
         </p:txBody>
       </p:sp>
       <p:sp>
@@ -741,7 +798,26 @@
         <p:txBody>
           <a:bodyPr xmlns:a="http://schemas.openxmlformats.org/drawingml/2006/main"/>
           <a:lstStyle xmlns:a="http://schemas.openxmlformats.org/drawingml/2006/main"/>
-          <a:p xmlns:a="http://schemas.openxmlformats.org/drawingml/2006/main"/>
+          <a:p xmlns:a="http://schemas.openxmlformats.org/drawingml/2006/main">
+            <a:r>
+              <a:t>Release source: /Users/Aamir/Desktop/rUTIs/results/pipeline/longcycler_release_claim_registry.json</a:t>
+            </a:r>
+          </a:p>
+          <a:p xmlns:a="http://schemas.openxmlformats.org/drawingml/2006/main">
+            <a:r>
+              <a:t>Scope: selected QC-passing Longcycler assemblies only.</a:t>
+            </a:r>
+          </a:p>
+          <a:p xmlns:a="http://schemas.openxmlformats.org/drawingml/2006/main">
+            <a:r>
+              <a:t>Clinical phenotype: versioned operational UTI phenotype.</a:t>
+            </a:r>
+          </a:p>
+          <a:p xmlns:a="http://schemas.openxmlformats.org/drawingml/2006/main">
+            <a:r>
+              <a:t>Analytical anchors: 532 episodes; 893 direct pairs; 371 adjacent pairs; RQ01-RQ10.</a:t>
+            </a:r>
+          </a:p>
         </p:txBody>
       </p:sp>
       <p:sp>
@@ -807,7 +883,26 @@
         <p:txBody>
           <a:bodyPr xmlns:a="http://schemas.openxmlformats.org/drawingml/2006/main"/>
           <a:lstStyle xmlns:a="http://schemas.openxmlformats.org/drawingml/2006/main"/>
-          <a:p xmlns:a="http://schemas.openxmlformats.org/drawingml/2006/main"/>
+          <a:p xmlns:a="http://schemas.openxmlformats.org/drawingml/2006/main">
+            <a:r>
+              <a:t>Release source: /Users/Aamir/Desktop/rUTIs/results/pipeline/longcycler_release_claim_registry.json</a:t>
+            </a:r>
+          </a:p>
+          <a:p xmlns:a="http://schemas.openxmlformats.org/drawingml/2006/main">
+            <a:r>
+              <a:t>Scope: selected QC-passing Longcycler assemblies only.</a:t>
+            </a:r>
+          </a:p>
+          <a:p xmlns:a="http://schemas.openxmlformats.org/drawingml/2006/main">
+            <a:r>
+              <a:t>Clinical phenotype: versioned operational UTI phenotype.</a:t>
+            </a:r>
+          </a:p>
+          <a:p xmlns:a="http://schemas.openxmlformats.org/drawingml/2006/main">
+            <a:r>
+              <a:t>Analytical anchors: 532 episodes; 893 direct pairs; 371 adjacent pairs; RQ01-RQ10.</a:t>
+            </a:r>
+          </a:p>
         </p:txBody>
       </p:sp>
       <p:sp>
@@ -873,7 +968,26 @@
         <p:txBody>
           <a:bodyPr xmlns:a="http://schemas.openxmlformats.org/drawingml/2006/main"/>
           <a:lstStyle xmlns:a="http://schemas.openxmlformats.org/drawingml/2006/main"/>
-          <a:p xmlns:a="http://schemas.openxmlformats.org/drawingml/2006/main"/>
+          <a:p xmlns:a="http://schemas.openxmlformats.org/drawingml/2006/main">
+            <a:r>
+              <a:t>Release source: /Users/Aamir/Desktop/rUTIs/results/pipeline/longcycler_release_claim_registry.json</a:t>
+            </a:r>
+          </a:p>
+          <a:p xmlns:a="http://schemas.openxmlformats.org/drawingml/2006/main">
+            <a:r>
+              <a:t>Scope: selected QC-passing Longcycler assemblies only.</a:t>
+            </a:r>
+          </a:p>
+          <a:p xmlns:a="http://schemas.openxmlformats.org/drawingml/2006/main">
+            <a:r>
+              <a:t>Clinical phenotype: versioned operational UTI phenotype.</a:t>
+            </a:r>
+          </a:p>
+          <a:p xmlns:a="http://schemas.openxmlformats.org/drawingml/2006/main">
+            <a:r>
+              <a:t>Analytical anchors: 532 episodes; 893 direct pairs; 371 adjacent pairs; RQ01-RQ10.</a:t>
+            </a:r>
+          </a:p>
         </p:txBody>
       </p:sp>
       <p:sp>
@@ -939,7 +1053,26 @@
         <p:txBody>
           <a:bodyPr xmlns:a="http://schemas.openxmlformats.org/drawingml/2006/main"/>
           <a:lstStyle xmlns:a="http://schemas.openxmlformats.org/drawingml/2006/main"/>
-          <a:p xmlns:a="http://schemas.openxmlformats.org/drawingml/2006/main"/>
+          <a:p xmlns:a="http://schemas.openxmlformats.org/drawingml/2006/main">
+            <a:r>
+              <a:t>Release source: /Users/Aamir/Desktop/rUTIs/results/pipeline/longcycler_release_claim_registry.json</a:t>
+            </a:r>
+          </a:p>
+          <a:p xmlns:a="http://schemas.openxmlformats.org/drawingml/2006/main">
+            <a:r>
+              <a:t>Scope: selected QC-passing Longcycler assemblies only.</a:t>
+            </a:r>
+          </a:p>
+          <a:p xmlns:a="http://schemas.openxmlformats.org/drawingml/2006/main">
+            <a:r>
+              <a:t>Clinical phenotype: versioned operational UTI phenotype.</a:t>
+            </a:r>
+          </a:p>
+          <a:p xmlns:a="http://schemas.openxmlformats.org/drawingml/2006/main">
+            <a:r>
+              <a:t>Analytical anchors: 532 episodes; 893 direct pairs; 371 adjacent pairs; RQ01-RQ10.</a:t>
+            </a:r>
+          </a:p>
         </p:txBody>
       </p:sp>
       <p:sp>
@@ -1005,7 +1138,26 @@
         <p:txBody>
           <a:bodyPr xmlns:a="http://schemas.openxmlformats.org/drawingml/2006/main"/>
           <a:lstStyle xmlns:a="http://schemas.openxmlformats.org/drawingml/2006/main"/>
-          <a:p xmlns:a="http://schemas.openxmlformats.org/drawingml/2006/main"/>
+          <a:p xmlns:a="http://schemas.openxmlformats.org/drawingml/2006/main">
+            <a:r>
+              <a:t>Release source: /Users/Aamir/Desktop/rUTIs/results/pipeline/longcycler_release_claim_registry.json</a:t>
+            </a:r>
+          </a:p>
+          <a:p xmlns:a="http://schemas.openxmlformats.org/drawingml/2006/main">
+            <a:r>
+              <a:t>Scope: selected QC-passing Longcycler assemblies only.</a:t>
+            </a:r>
+          </a:p>
+          <a:p xmlns:a="http://schemas.openxmlformats.org/drawingml/2006/main">
+            <a:r>
+              <a:t>Clinical phenotype: versioned operational UTI phenotype.</a:t>
+            </a:r>
+          </a:p>
+          <a:p xmlns:a="http://schemas.openxmlformats.org/drawingml/2006/main">
+            <a:r>
+              <a:t>Analytical anchors: 532 episodes; 893 direct pairs; 371 adjacent pairs; RQ01-RQ10.</a:t>
+            </a:r>
+          </a:p>
         </p:txBody>
       </p:sp>
       <p:sp>
@@ -1071,7 +1223,26 @@
         <p:txBody>
           <a:bodyPr xmlns:a="http://schemas.openxmlformats.org/drawingml/2006/main"/>
           <a:lstStyle xmlns:a="http://schemas.openxmlformats.org/drawingml/2006/main"/>
-          <a:p xmlns:a="http://schemas.openxmlformats.org/drawingml/2006/main"/>
+          <a:p xmlns:a="http://schemas.openxmlformats.org/drawingml/2006/main">
+            <a:r>
+              <a:t>Release source: /Users/Aamir/Desktop/rUTIs/results/pipeline/longcycler_release_claim_registry.json</a:t>
+            </a:r>
+          </a:p>
+          <a:p xmlns:a="http://schemas.openxmlformats.org/drawingml/2006/main">
+            <a:r>
+              <a:t>Scope: selected QC-passing Longcycler assemblies only.</a:t>
+            </a:r>
+          </a:p>
+          <a:p xmlns:a="http://schemas.openxmlformats.org/drawingml/2006/main">
+            <a:r>
+              <a:t>Clinical phenotype: versioned operational UTI phenotype.</a:t>
+            </a:r>
+          </a:p>
+          <a:p xmlns:a="http://schemas.openxmlformats.org/drawingml/2006/main">
+            <a:r>
+              <a:t>Analytical anchors: 532 episodes; 893 direct pairs; 371 adjacent pairs; RQ01-RQ10.</a:t>
+            </a:r>
+          </a:p>
         </p:txBody>
       </p:sp>
       <p:sp>
@@ -1137,7 +1308,26 @@
         <p:txBody>
           <a:bodyPr xmlns:a="http://schemas.openxmlformats.org/drawingml/2006/main"/>
           <a:lstStyle xmlns:a="http://schemas.openxmlformats.org/drawingml/2006/main"/>
-          <a:p xmlns:a="http://schemas.openxmlformats.org/drawingml/2006/main"/>
+          <a:p xmlns:a="http://schemas.openxmlformats.org/drawingml/2006/main">
+            <a:r>
+              <a:t>Release source: /Users/Aamir/Desktop/rUTIs/results/pipeline/longcycler_release_claim_registry.json</a:t>
+            </a:r>
+          </a:p>
+          <a:p xmlns:a="http://schemas.openxmlformats.org/drawingml/2006/main">
+            <a:r>
+              <a:t>Scope: selected QC-passing Longcycler assemblies only.</a:t>
+            </a:r>
+          </a:p>
+          <a:p xmlns:a="http://schemas.openxmlformats.org/drawingml/2006/main">
+            <a:r>
+              <a:t>Clinical phenotype: versioned operational UTI phenotype.</a:t>
+            </a:r>
+          </a:p>
+          <a:p xmlns:a="http://schemas.openxmlformats.org/drawingml/2006/main">
+            <a:r>
+              <a:t>Analytical anchors: 532 episodes; 893 direct pairs; 371 adjacent pairs; RQ01-RQ10.</a:t>
+            </a:r>
+          </a:p>
         </p:txBody>
       </p:sp>
       <p:sp>
@@ -1203,7 +1393,26 @@
         <p:txBody>
           <a:bodyPr xmlns:a="http://schemas.openxmlformats.org/drawingml/2006/main"/>
           <a:lstStyle xmlns:a="http://schemas.openxmlformats.org/drawingml/2006/main"/>
-          <a:p xmlns:a="http://schemas.openxmlformats.org/drawingml/2006/main"/>
+          <a:p xmlns:a="http://schemas.openxmlformats.org/drawingml/2006/main">
+            <a:r>
+              <a:t>Release source: /Users/Aamir/Desktop/rUTIs/results/pipeline/longcycler_release_claim_registry.json</a:t>
+            </a:r>
+          </a:p>
+          <a:p xmlns:a="http://schemas.openxmlformats.org/drawingml/2006/main">
+            <a:r>
+              <a:t>Scope: selected QC-passing Longcycler assemblies only.</a:t>
+            </a:r>
+          </a:p>
+          <a:p xmlns:a="http://schemas.openxmlformats.org/drawingml/2006/main">
+            <a:r>
+              <a:t>Clinical phenotype: versioned operational UTI phenotype.</a:t>
+            </a:r>
+          </a:p>
+          <a:p xmlns:a="http://schemas.openxmlformats.org/drawingml/2006/main">
+            <a:r>
+              <a:t>Analytical anchors: 532 episodes; 893 direct pairs; 371 adjacent pairs; RQ01-RQ10.</a:t>
+            </a:r>
+          </a:p>
         </p:txBody>
       </p:sp>
       <p:sp>
@@ -1269,7 +1478,26 @@
         <p:txBody>
           <a:bodyPr xmlns:a="http://schemas.openxmlformats.org/drawingml/2006/main"/>
           <a:lstStyle xmlns:a="http://schemas.openxmlformats.org/drawingml/2006/main"/>
-          <a:p xmlns:a="http://schemas.openxmlformats.org/drawingml/2006/main"/>
+          <a:p xmlns:a="http://schemas.openxmlformats.org/drawingml/2006/main">
+            <a:r>
+              <a:t>Release source: /Users/Aamir/Desktop/rUTIs/results/pipeline/longcycler_release_claim_registry.json</a:t>
+            </a:r>
+          </a:p>
+          <a:p xmlns:a="http://schemas.openxmlformats.org/drawingml/2006/main">
+            <a:r>
+              <a:t>Scope: selected QC-passing Longcycler assemblies only.</a:t>
+            </a:r>
+          </a:p>
+          <a:p xmlns:a="http://schemas.openxmlformats.org/drawingml/2006/main">
+            <a:r>
+              <a:t>Clinical phenotype: versioned operational UTI phenotype.</a:t>
+            </a:r>
+          </a:p>
+          <a:p xmlns:a="http://schemas.openxmlformats.org/drawingml/2006/main">
+            <a:r>
+              <a:t>Analytical anchors: 532 episodes; 893 direct pairs; 371 adjacent pairs; RQ01-RQ10.</a:t>
+            </a:r>
+          </a:p>
         </p:txBody>
       </p:sp>
       <p:sp>
@@ -1335,7 +1563,26 @@
         <p:txBody>
           <a:bodyPr xmlns:a="http://schemas.openxmlformats.org/drawingml/2006/main"/>
           <a:lstStyle xmlns:a="http://schemas.openxmlformats.org/drawingml/2006/main"/>
-          <a:p xmlns:a="http://schemas.openxmlformats.org/drawingml/2006/main"/>
+          <a:p xmlns:a="http://schemas.openxmlformats.org/drawingml/2006/main">
+            <a:r>
+              <a:t>Release source: /Users/Aamir/Desktop/rUTIs/results/pipeline/longcycler_release_claim_registry.json</a:t>
+            </a:r>
+          </a:p>
+          <a:p xmlns:a="http://schemas.openxmlformats.org/drawingml/2006/main">
+            <a:r>
+              <a:t>Scope: selected QC-passing Longcycler assemblies only.</a:t>
+            </a:r>
+          </a:p>
+          <a:p xmlns:a="http://schemas.openxmlformats.org/drawingml/2006/main">
+            <a:r>
+              <a:t>Clinical phenotype: versioned operational UTI phenotype.</a:t>
+            </a:r>
+          </a:p>
+          <a:p xmlns:a="http://schemas.openxmlformats.org/drawingml/2006/main">
+            <a:r>
+              <a:t>Analytical anchors: 532 episodes; 893 direct pairs; 371 adjacent pairs; RQ01-RQ10.</a:t>
+            </a:r>
+          </a:p>
         </p:txBody>
       </p:sp>
       <p:sp>
@@ -1401,7 +1648,26 @@
         <p:txBody>
           <a:bodyPr xmlns:a="http://schemas.openxmlformats.org/drawingml/2006/main"/>
           <a:lstStyle xmlns:a="http://schemas.openxmlformats.org/drawingml/2006/main"/>
-          <a:p xmlns:a="http://schemas.openxmlformats.org/drawingml/2006/main"/>
+          <a:p xmlns:a="http://schemas.openxmlformats.org/drawingml/2006/main">
+            <a:r>
+              <a:t>Release source: /Users/Aamir/Desktop/rUTIs/results/pipeline/longcycler_release_claim_registry.json</a:t>
+            </a:r>
+          </a:p>
+          <a:p xmlns:a="http://schemas.openxmlformats.org/drawingml/2006/main">
+            <a:r>
+              <a:t>Scope: selected QC-passing Longcycler assemblies only.</a:t>
+            </a:r>
+          </a:p>
+          <a:p xmlns:a="http://schemas.openxmlformats.org/drawingml/2006/main">
+            <a:r>
+              <a:t>Clinical phenotype: versioned operational UTI phenotype.</a:t>
+            </a:r>
+          </a:p>
+          <a:p xmlns:a="http://schemas.openxmlformats.org/drawingml/2006/main">
+            <a:r>
+              <a:t>Analytical anchors: 532 episodes; 893 direct pairs; 371 adjacent pairs; RQ01-RQ10.</a:t>
+            </a:r>
+          </a:p>
         </p:txBody>
       </p:sp>
       <p:sp>
@@ -1467,7 +1733,26 @@
         <p:txBody>
           <a:bodyPr xmlns:a="http://schemas.openxmlformats.org/drawingml/2006/main"/>
           <a:lstStyle xmlns:a="http://schemas.openxmlformats.org/drawingml/2006/main"/>
-          <a:p xmlns:a="http://schemas.openxmlformats.org/drawingml/2006/main"/>
+          <a:p xmlns:a="http://schemas.openxmlformats.org/drawingml/2006/main">
+            <a:r>
+              <a:t>Release source: /Users/Aamir/Desktop/rUTIs/results/pipeline/longcycler_release_claim_registry.json</a:t>
+            </a:r>
+          </a:p>
+          <a:p xmlns:a="http://schemas.openxmlformats.org/drawingml/2006/main">
+            <a:r>
+              <a:t>Scope: selected QC-passing Longcycler assemblies only.</a:t>
+            </a:r>
+          </a:p>
+          <a:p xmlns:a="http://schemas.openxmlformats.org/drawingml/2006/main">
+            <a:r>
+              <a:t>Clinical phenotype: versioned operational UTI phenotype.</a:t>
+            </a:r>
+          </a:p>
+          <a:p xmlns:a="http://schemas.openxmlformats.org/drawingml/2006/main">
+            <a:r>
+              <a:t>Analytical anchors: 532 episodes; 893 direct pairs; 371 adjacent pairs; RQ01-RQ10.</a:t>
+            </a:r>
+          </a:p>
         </p:txBody>
       </p:sp>
       <p:sp>
@@ -1533,7 +1818,26 @@
         <p:txBody>
           <a:bodyPr xmlns:a="http://schemas.openxmlformats.org/drawingml/2006/main"/>
           <a:lstStyle xmlns:a="http://schemas.openxmlformats.org/drawingml/2006/main"/>
-          <a:p xmlns:a="http://schemas.openxmlformats.org/drawingml/2006/main"/>
+          <a:p xmlns:a="http://schemas.openxmlformats.org/drawingml/2006/main">
+            <a:r>
+              <a:t>Release source: /Users/Aamir/Desktop/rUTIs/results/pipeline/longcycler_release_claim_registry.json</a:t>
+            </a:r>
+          </a:p>
+          <a:p xmlns:a="http://schemas.openxmlformats.org/drawingml/2006/main">
+            <a:r>
+              <a:t>Scope: selected QC-passing Longcycler assemblies only.</a:t>
+            </a:r>
+          </a:p>
+          <a:p xmlns:a="http://schemas.openxmlformats.org/drawingml/2006/main">
+            <a:r>
+              <a:t>Clinical phenotype: versioned operational UTI phenotype.</a:t>
+            </a:r>
+          </a:p>
+          <a:p xmlns:a="http://schemas.openxmlformats.org/drawingml/2006/main">
+            <a:r>
+              <a:t>Analytical anchors: 532 episodes; 893 direct pairs; 371 adjacent pairs; RQ01-RQ10.</a:t>
+            </a:r>
+          </a:p>
         </p:txBody>
       </p:sp>
       <p:sp>
@@ -1599,7 +1903,26 @@
         <p:txBody>
           <a:bodyPr xmlns:a="http://schemas.openxmlformats.org/drawingml/2006/main"/>
           <a:lstStyle xmlns:a="http://schemas.openxmlformats.org/drawingml/2006/main"/>
-          <a:p xmlns:a="http://schemas.openxmlformats.org/drawingml/2006/main"/>
+          <a:p xmlns:a="http://schemas.openxmlformats.org/drawingml/2006/main">
+            <a:r>
+              <a:t>Release source: /Users/Aamir/Desktop/rUTIs/results/pipeline/longcycler_release_claim_registry.json</a:t>
+            </a:r>
+          </a:p>
+          <a:p xmlns:a="http://schemas.openxmlformats.org/drawingml/2006/main">
+            <a:r>
+              <a:t>Scope: selected QC-passing Longcycler assemblies only.</a:t>
+            </a:r>
+          </a:p>
+          <a:p xmlns:a="http://schemas.openxmlformats.org/drawingml/2006/main">
+            <a:r>
+              <a:t>Clinical phenotype: versioned operational UTI phenotype.</a:t>
+            </a:r>
+          </a:p>
+          <a:p xmlns:a="http://schemas.openxmlformats.org/drawingml/2006/main">
+            <a:r>
+              <a:t>Analytical anchors: 532 episodes; 893 direct pairs; 371 adjacent pairs; RQ01-RQ10.</a:t>
+            </a:r>
+          </a:p>
         </p:txBody>
       </p:sp>
       <p:sp>
@@ -1665,7 +1988,26 @@
         <p:txBody>
           <a:bodyPr xmlns:a="http://schemas.openxmlformats.org/drawingml/2006/main"/>
           <a:lstStyle xmlns:a="http://schemas.openxmlformats.org/drawingml/2006/main"/>
-          <a:p xmlns:a="http://schemas.openxmlformats.org/drawingml/2006/main"/>
+          <a:p xmlns:a="http://schemas.openxmlformats.org/drawingml/2006/main">
+            <a:r>
+              <a:t>Release source: /Users/Aamir/Desktop/rUTIs/results/pipeline/longcycler_release_claim_registry.json</a:t>
+            </a:r>
+          </a:p>
+          <a:p xmlns:a="http://schemas.openxmlformats.org/drawingml/2006/main">
+            <a:r>
+              <a:t>Scope: selected QC-passing Longcycler assemblies only.</a:t>
+            </a:r>
+          </a:p>
+          <a:p xmlns:a="http://schemas.openxmlformats.org/drawingml/2006/main">
+            <a:r>
+              <a:t>Clinical phenotype: versioned operational UTI phenotype.</a:t>
+            </a:r>
+          </a:p>
+          <a:p xmlns:a="http://schemas.openxmlformats.org/drawingml/2006/main">
+            <a:r>
+              <a:t>Analytical anchors: 532 episodes; 893 direct pairs; 371 adjacent pairs; RQ01-RQ10.</a:t>
+            </a:r>
+          </a:p>
         </p:txBody>
       </p:sp>
       <p:sp>
@@ -1731,7 +2073,26 @@
         <p:txBody>
           <a:bodyPr xmlns:a="http://schemas.openxmlformats.org/drawingml/2006/main"/>
           <a:lstStyle xmlns:a="http://schemas.openxmlformats.org/drawingml/2006/main"/>
-          <a:p xmlns:a="http://schemas.openxmlformats.org/drawingml/2006/main"/>
+          <a:p xmlns:a="http://schemas.openxmlformats.org/drawingml/2006/main">
+            <a:r>
+              <a:t>Release source: /Users/Aamir/Desktop/rUTIs/results/pipeline/longcycler_release_claim_registry.json</a:t>
+            </a:r>
+          </a:p>
+          <a:p xmlns:a="http://schemas.openxmlformats.org/drawingml/2006/main">
+            <a:r>
+              <a:t>Scope: selected QC-passing Longcycler assemblies only.</a:t>
+            </a:r>
+          </a:p>
+          <a:p xmlns:a="http://schemas.openxmlformats.org/drawingml/2006/main">
+            <a:r>
+              <a:t>Clinical phenotype: versioned operational UTI phenotype.</a:t>
+            </a:r>
+          </a:p>
+          <a:p xmlns:a="http://schemas.openxmlformats.org/drawingml/2006/main">
+            <a:r>
+              <a:t>Analytical anchors: 532 episodes; 893 direct pairs; 371 adjacent pairs; RQ01-RQ10.</a:t>
+            </a:r>
+          </a:p>
         </p:txBody>
       </p:sp>
       <p:sp>
@@ -1797,7 +2158,26 @@
         <p:txBody>
           <a:bodyPr xmlns:a="http://schemas.openxmlformats.org/drawingml/2006/main"/>
           <a:lstStyle xmlns:a="http://schemas.openxmlformats.org/drawingml/2006/main"/>
-          <a:p xmlns:a="http://schemas.openxmlformats.org/drawingml/2006/main"/>
+          <a:p xmlns:a="http://schemas.openxmlformats.org/drawingml/2006/main">
+            <a:r>
+              <a:t>Release source: /Users/Aamir/Desktop/rUTIs/results/pipeline/longcycler_release_claim_registry.json</a:t>
+            </a:r>
+          </a:p>
+          <a:p xmlns:a="http://schemas.openxmlformats.org/drawingml/2006/main">
+            <a:r>
+              <a:t>Scope: selected QC-passing Longcycler assemblies only.</a:t>
+            </a:r>
+          </a:p>
+          <a:p xmlns:a="http://schemas.openxmlformats.org/drawingml/2006/main">
+            <a:r>
+              <a:t>Clinical phenotype: versioned operational UTI phenotype.</a:t>
+            </a:r>
+          </a:p>
+          <a:p xmlns:a="http://schemas.openxmlformats.org/drawingml/2006/main">
+            <a:r>
+              <a:t>Analytical anchors: 532 episodes; 893 direct pairs; 371 adjacent pairs; RQ01-RQ10.</a:t>
+            </a:r>
+          </a:p>
         </p:txBody>
       </p:sp>
       <p:sp>
@@ -1863,7 +2243,26 @@
         <p:txBody>
           <a:bodyPr xmlns:a="http://schemas.openxmlformats.org/drawingml/2006/main"/>
           <a:lstStyle xmlns:a="http://schemas.openxmlformats.org/drawingml/2006/main"/>
-          <a:p xmlns:a="http://schemas.openxmlformats.org/drawingml/2006/main"/>
+          <a:p xmlns:a="http://schemas.openxmlformats.org/drawingml/2006/main">
+            <a:r>
+              <a:t>Release source: /Users/Aamir/Desktop/rUTIs/results/pipeline/longcycler_release_claim_registry.json</a:t>
+            </a:r>
+          </a:p>
+          <a:p xmlns:a="http://schemas.openxmlformats.org/drawingml/2006/main">
+            <a:r>
+              <a:t>Scope: selected QC-passing Longcycler assemblies only.</a:t>
+            </a:r>
+          </a:p>
+          <a:p xmlns:a="http://schemas.openxmlformats.org/drawingml/2006/main">
+            <a:r>
+              <a:t>Clinical phenotype: versioned operational UTI phenotype.</a:t>
+            </a:r>
+          </a:p>
+          <a:p xmlns:a="http://schemas.openxmlformats.org/drawingml/2006/main">
+            <a:r>
+              <a:t>Analytical anchors: 532 episodes; 893 direct pairs; 371 adjacent pairs; RQ01-RQ10.</a:t>
+            </a:r>
+          </a:p>
         </p:txBody>
       </p:sp>
       <p:sp>
@@ -1929,7 +2328,26 @@
         <p:txBody>
           <a:bodyPr xmlns:a="http://schemas.openxmlformats.org/drawingml/2006/main"/>
           <a:lstStyle xmlns:a="http://schemas.openxmlformats.org/drawingml/2006/main"/>
-          <a:p xmlns:a="http://schemas.openxmlformats.org/drawingml/2006/main"/>
+          <a:p xmlns:a="http://schemas.openxmlformats.org/drawingml/2006/main">
+            <a:r>
+              <a:t>Release source: /Users/Aamir/Desktop/rUTIs/results/pipeline/longcycler_release_claim_registry.json</a:t>
+            </a:r>
+          </a:p>
+          <a:p xmlns:a="http://schemas.openxmlformats.org/drawingml/2006/main">
+            <a:r>
+              <a:t>Scope: selected QC-passing Longcycler assemblies only.</a:t>
+            </a:r>
+          </a:p>
+          <a:p xmlns:a="http://schemas.openxmlformats.org/drawingml/2006/main">
+            <a:r>
+              <a:t>Clinical phenotype: versioned operational UTI phenotype.</a:t>
+            </a:r>
+          </a:p>
+          <a:p xmlns:a="http://schemas.openxmlformats.org/drawingml/2006/main">
+            <a:r>
+              <a:t>Analytical anchors: 532 episodes; 893 direct pairs; 371 adjacent pairs; RQ01-RQ10.</a:t>
+            </a:r>
+          </a:p>
         </p:txBody>
       </p:sp>
       <p:sp>
@@ -1957,7 +2375,1941 @@
 </p:notes>
 </file>
 
+<file path=ppt/slideLayouts/slideLayout1.xml><?xml version="1.0" encoding="utf-8"?>
+<p:sldLayout xmlns:p="http://schemas.openxmlformats.org/presentationml/2006/main" type="title">
+  <p:cSld name="Title Slide">
+    <p:spTree>
+      <p:nvGrpSpPr>
+        <p:cNvPr id="1" name=""/>
+        <p:cNvGrpSpPr/>
+        <p:nvPr/>
+      </p:nvGrpSpPr>
+      <p:grpSpPr>
+        <a:xfrm xmlns:a="http://schemas.openxmlformats.org/drawingml/2006/main"/>
+      </p:grpSpPr>
+      <p:sp>
+        <p:nvSpPr>
+          <p:cNvPr id="2" name="Title 1">
+            <a:extLst xmlns:a="http://schemas.openxmlformats.org/drawingml/2006/main">
+              <a:ext uri="{FF2B5EF4-FFF2-40B4-BE49-F238E27FC236}">
+                <a16:creationId xmlns:a16="http://schemas.microsoft.com/office/drawing/2014/main" id="{672FBE4E-4632-450D-8EFF-077568A25D35}"/>
+              </a:ext>
+            </a:extLst>
+          </p:cNvPr>
+          <p:cNvSpPr>
+            <a:spLocks xmlns:a="http://schemas.openxmlformats.org/drawingml/2006/main" noGrp="1"/>
+          </p:cNvSpPr>
+          <p:nvPr>
+            <p:ph type="ctrTitle" idx="0"/>
+          </p:nvPr>
+        </p:nvSpPr>
+        <p:spPr>
+          <a:xfrm xmlns:a="http://schemas.openxmlformats.org/drawingml/2006/main">
+            <a:off x="685800" y="2130425"/>
+            <a:ext cx="7772400" cy="1470025"/>
+          </a:xfrm>
+        </p:spPr>
+        <p:txBody>
+          <a:bodyPr xmlns:a="http://schemas.openxmlformats.org/drawingml/2006/main"/>
+          <a:lstStyle xmlns:a="http://schemas.openxmlformats.org/drawingml/2006/main"/>
+          <a:p xmlns:a="http://schemas.openxmlformats.org/drawingml/2006/main"/>
+        </p:txBody>
+      </p:sp>
+      <p:sp>
+        <p:nvSpPr>
+          <p:cNvPr id="3" name="Subtitle 2">
+            <a:extLst xmlns:a="http://schemas.openxmlformats.org/drawingml/2006/main">
+              <a:ext uri="{FF2B5EF4-FFF2-40B4-BE49-F238E27FC236}">
+                <a16:creationId xmlns:a16="http://schemas.microsoft.com/office/drawing/2014/main" id="{FF6E20E1-6307-405F-B51A-2E701D28FFB2}"/>
+              </a:ext>
+            </a:extLst>
+          </p:cNvPr>
+          <p:cNvSpPr>
+            <a:spLocks xmlns:a="http://schemas.openxmlformats.org/drawingml/2006/main" noGrp="1"/>
+          </p:cNvSpPr>
+          <p:nvPr>
+            <p:ph type="subTitle" idx="1"/>
+          </p:nvPr>
+        </p:nvSpPr>
+        <p:spPr>
+          <a:xfrm xmlns:a="http://schemas.openxmlformats.org/drawingml/2006/main">
+            <a:off x="1371600" y="3886200"/>
+            <a:ext cx="6400800" cy="1752600"/>
+          </a:xfrm>
+        </p:spPr>
+        <p:txBody>
+          <a:bodyPr xmlns:a="http://schemas.openxmlformats.org/drawingml/2006/main"/>
+          <a:lstStyle xmlns:a="http://schemas.openxmlformats.org/drawingml/2006/main">
+            <a:lvl1pPr marL="0" indent="0" algn="ctr">
+              <a:buNone/>
+              <a:defRPr>
+                <a:solidFill>
+                  <a:schemeClr val="tx1">
+                    <a:tint val="75000"/>
+                  </a:schemeClr>
+                </a:solidFill>
+              </a:defRPr>
+            </a:lvl1pPr>
+            <a:lvl2pPr marL="457200" indent="0" algn="ctr">
+              <a:buNone/>
+              <a:defRPr>
+                <a:solidFill>
+                  <a:schemeClr val="tx1">
+                    <a:tint val="75000"/>
+                  </a:schemeClr>
+                </a:solidFill>
+              </a:defRPr>
+            </a:lvl2pPr>
+            <a:lvl3pPr marL="914400" indent="0" algn="ctr">
+              <a:buNone/>
+              <a:defRPr>
+                <a:solidFill>
+                  <a:schemeClr val="tx1">
+                    <a:tint val="75000"/>
+                  </a:schemeClr>
+                </a:solidFill>
+              </a:defRPr>
+            </a:lvl3pPr>
+            <a:lvl4pPr marL="1371600" indent="0" algn="ctr">
+              <a:buNone/>
+              <a:defRPr>
+                <a:solidFill>
+                  <a:schemeClr val="tx1">
+                    <a:tint val="75000"/>
+                  </a:schemeClr>
+                </a:solidFill>
+              </a:defRPr>
+            </a:lvl4pPr>
+            <a:lvl5pPr marL="1828800" indent="0" algn="ctr">
+              <a:buNone/>
+              <a:defRPr>
+                <a:solidFill>
+                  <a:schemeClr val="tx1">
+                    <a:tint val="75000"/>
+                  </a:schemeClr>
+                </a:solidFill>
+              </a:defRPr>
+            </a:lvl5pPr>
+            <a:lvl6pPr marL="2286000" indent="0" algn="ctr">
+              <a:buNone/>
+              <a:defRPr>
+                <a:solidFill>
+                  <a:schemeClr val="tx1">
+                    <a:tint val="75000"/>
+                  </a:schemeClr>
+                </a:solidFill>
+              </a:defRPr>
+            </a:lvl6pPr>
+            <a:lvl7pPr marL="2743200" indent="0" algn="ctr">
+              <a:buNone/>
+              <a:defRPr>
+                <a:solidFill>
+                  <a:schemeClr val="tx1">
+                    <a:tint val="75000"/>
+                  </a:schemeClr>
+                </a:solidFill>
+              </a:defRPr>
+            </a:lvl7pPr>
+            <a:lvl8pPr marL="3200400" indent="0" algn="ctr">
+              <a:buNone/>
+              <a:defRPr>
+                <a:solidFill>
+                  <a:schemeClr val="tx1">
+                    <a:tint val="75000"/>
+                  </a:schemeClr>
+                </a:solidFill>
+              </a:defRPr>
+            </a:lvl8pPr>
+            <a:lvl9pPr marL="3657600" indent="0" algn="ctr">
+              <a:buNone/>
+              <a:defRPr>
+                <a:solidFill>
+                  <a:schemeClr val="tx1">
+                    <a:tint val="75000"/>
+                  </a:schemeClr>
+                </a:solidFill>
+              </a:defRPr>
+            </a:lvl9pPr>
+          </a:lstStyle>
+          <a:p xmlns:a="http://schemas.openxmlformats.org/drawingml/2006/main"/>
+        </p:txBody>
+      </p:sp>
+      <p:sp>
+        <p:nvSpPr>
+          <p:cNvPr id="4" name="Date Placeholder 3">
+            <a:extLst xmlns:a="http://schemas.openxmlformats.org/drawingml/2006/main">
+              <a:ext uri="{FF2B5EF4-FFF2-40B4-BE49-F238E27FC236}">
+                <a16:creationId xmlns:a16="http://schemas.microsoft.com/office/drawing/2014/main" id="{AB7034E0-4B34-4E14-8F07-F73748865B82}"/>
+              </a:ext>
+            </a:extLst>
+          </p:cNvPr>
+          <p:cNvSpPr>
+            <a:spLocks xmlns:a="http://schemas.openxmlformats.org/drawingml/2006/main" noGrp="1"/>
+          </p:cNvSpPr>
+          <p:nvPr>
+            <p:ph type="dt" idx="10"/>
+          </p:nvPr>
+        </p:nvSpPr>
+        <p:spPr/>
+        <p:txBody>
+          <a:bodyPr xmlns:a="http://schemas.openxmlformats.org/drawingml/2006/main"/>
+          <a:lstStyle xmlns:a="http://schemas.openxmlformats.org/drawingml/2006/main"/>
+          <a:p xmlns:a="http://schemas.openxmlformats.org/drawingml/2006/main"/>
+        </p:txBody>
+      </p:sp>
+      <p:sp>
+        <p:nvSpPr>
+          <p:cNvPr id="5" name="Footer Placeholder 4">
+            <a:extLst xmlns:a="http://schemas.openxmlformats.org/drawingml/2006/main">
+              <a:ext uri="{FF2B5EF4-FFF2-40B4-BE49-F238E27FC236}">
+                <a16:creationId xmlns:a16="http://schemas.microsoft.com/office/drawing/2014/main" id="{88EFDD7E-F2A1-42A0-B03E-D4B6EEF54318}"/>
+              </a:ext>
+            </a:extLst>
+          </p:cNvPr>
+          <p:cNvSpPr>
+            <a:spLocks xmlns:a="http://schemas.openxmlformats.org/drawingml/2006/main" noGrp="1"/>
+          </p:cNvSpPr>
+          <p:nvPr>
+            <p:ph type="ftr" idx="11"/>
+          </p:nvPr>
+        </p:nvSpPr>
+        <p:spPr/>
+        <p:txBody>
+          <a:bodyPr xmlns:a="http://schemas.openxmlformats.org/drawingml/2006/main"/>
+          <a:lstStyle xmlns:a="http://schemas.openxmlformats.org/drawingml/2006/main"/>
+          <a:p xmlns:a="http://schemas.openxmlformats.org/drawingml/2006/main"/>
+        </p:txBody>
+      </p:sp>
+      <p:sp>
+        <p:nvSpPr>
+          <p:cNvPr id="6" name="Slide Number Placeholder 5">
+            <a:extLst xmlns:a="http://schemas.openxmlformats.org/drawingml/2006/main">
+              <a:ext uri="{FF2B5EF4-FFF2-40B4-BE49-F238E27FC236}">
+                <a16:creationId xmlns:a16="http://schemas.microsoft.com/office/drawing/2014/main" id="{5D4F7104-DE34-4551-AC50-6833C90427A0}"/>
+              </a:ext>
+            </a:extLst>
+          </p:cNvPr>
+          <p:cNvSpPr>
+            <a:spLocks xmlns:a="http://schemas.openxmlformats.org/drawingml/2006/main" noGrp="1"/>
+          </p:cNvSpPr>
+          <p:nvPr>
+            <p:ph type="sldNum" idx="12"/>
+          </p:nvPr>
+        </p:nvSpPr>
+        <p:spPr/>
+        <p:txBody>
+          <a:bodyPr xmlns:a="http://schemas.openxmlformats.org/drawingml/2006/main"/>
+          <a:lstStyle xmlns:a="http://schemas.openxmlformats.org/drawingml/2006/main"/>
+          <a:p xmlns:a="http://schemas.openxmlformats.org/drawingml/2006/main"/>
+        </p:txBody>
+      </p:sp>
+    </p:spTree>
+  </p:cSld>
+</p:sldLayout>
+</file>
+
 <file path=ppt/slideLayouts/slideLayout10.xml><?xml version="1.0" encoding="utf-8"?>
+<p:sldLayout xmlns:p="http://schemas.openxmlformats.org/presentationml/2006/main" type="vertTx">
+  <p:cSld name="Title and Vertical Text">
+    <p:spTree>
+      <p:nvGrpSpPr>
+        <p:cNvPr id="1" name=""/>
+        <p:cNvGrpSpPr/>
+        <p:nvPr/>
+      </p:nvGrpSpPr>
+      <p:grpSpPr>
+        <a:xfrm xmlns:a="http://schemas.openxmlformats.org/drawingml/2006/main"/>
+      </p:grpSpPr>
+      <p:sp>
+        <p:nvSpPr>
+          <p:cNvPr id="2" name="Title 1">
+            <a:extLst xmlns:a="http://schemas.openxmlformats.org/drawingml/2006/main">
+              <a:ext uri="{FF2B5EF4-FFF2-40B4-BE49-F238E27FC236}">
+                <a16:creationId xmlns:a16="http://schemas.microsoft.com/office/drawing/2014/main" id="{8610E5D0-3F86-456B-8311-51DF23CA0099}"/>
+              </a:ext>
+            </a:extLst>
+          </p:cNvPr>
+          <p:cNvSpPr>
+            <a:spLocks xmlns:a="http://schemas.openxmlformats.org/drawingml/2006/main" noGrp="1"/>
+          </p:cNvSpPr>
+          <p:nvPr>
+            <p:ph type="title" idx="0"/>
+          </p:nvPr>
+        </p:nvSpPr>
+        <p:spPr/>
+        <p:txBody>
+          <a:bodyPr xmlns:a="http://schemas.openxmlformats.org/drawingml/2006/main"/>
+          <a:lstStyle xmlns:a="http://schemas.openxmlformats.org/drawingml/2006/main"/>
+          <a:p xmlns:a="http://schemas.openxmlformats.org/drawingml/2006/main"/>
+        </p:txBody>
+      </p:sp>
+      <p:sp>
+        <p:nvSpPr>
+          <p:cNvPr id="3" name="Vertical Text Placeholder 2">
+            <a:extLst xmlns:a="http://schemas.openxmlformats.org/drawingml/2006/main">
+              <a:ext uri="{FF2B5EF4-FFF2-40B4-BE49-F238E27FC236}">
+                <a16:creationId xmlns:a16="http://schemas.microsoft.com/office/drawing/2014/main" id="{DE118C4B-B266-49C5-92CE-BA0A2B12DBDA}"/>
+              </a:ext>
+            </a:extLst>
+          </p:cNvPr>
+          <p:cNvSpPr>
+            <a:spLocks xmlns:a="http://schemas.openxmlformats.org/drawingml/2006/main" noGrp="1"/>
+          </p:cNvSpPr>
+          <p:nvPr>
+            <p:ph type="body" idx="1"/>
+          </p:nvPr>
+        </p:nvSpPr>
+        <p:spPr/>
+        <p:txBody>
+          <a:bodyPr xmlns:a="http://schemas.openxmlformats.org/drawingml/2006/main" vert="eaVert"/>
+          <a:lstStyle xmlns:a="http://schemas.openxmlformats.org/drawingml/2006/main"/>
+          <a:p xmlns:a="http://schemas.openxmlformats.org/drawingml/2006/main"/>
+        </p:txBody>
+      </p:sp>
+      <p:sp>
+        <p:nvSpPr>
+          <p:cNvPr id="4" name="Date Placeholder 3">
+            <a:extLst xmlns:a="http://schemas.openxmlformats.org/drawingml/2006/main">
+              <a:ext uri="{FF2B5EF4-FFF2-40B4-BE49-F238E27FC236}">
+                <a16:creationId xmlns:a16="http://schemas.microsoft.com/office/drawing/2014/main" id="{7F2F644B-5D26-49C1-B1EF-5BFC10E3EE1C}"/>
+              </a:ext>
+            </a:extLst>
+          </p:cNvPr>
+          <p:cNvSpPr>
+            <a:spLocks xmlns:a="http://schemas.openxmlformats.org/drawingml/2006/main" noGrp="1"/>
+          </p:cNvSpPr>
+          <p:nvPr>
+            <p:ph type="dt" idx="10"/>
+          </p:nvPr>
+        </p:nvSpPr>
+        <p:spPr/>
+        <p:txBody>
+          <a:bodyPr xmlns:a="http://schemas.openxmlformats.org/drawingml/2006/main"/>
+          <a:lstStyle xmlns:a="http://schemas.openxmlformats.org/drawingml/2006/main"/>
+          <a:p xmlns:a="http://schemas.openxmlformats.org/drawingml/2006/main"/>
+        </p:txBody>
+      </p:sp>
+      <p:sp>
+        <p:nvSpPr>
+          <p:cNvPr id="5" name="Footer Placeholder 4">
+            <a:extLst xmlns:a="http://schemas.openxmlformats.org/drawingml/2006/main">
+              <a:ext uri="{FF2B5EF4-FFF2-40B4-BE49-F238E27FC236}">
+                <a16:creationId xmlns:a16="http://schemas.microsoft.com/office/drawing/2014/main" id="{D80B6C13-05E1-4A53-8E38-AC76E23B5641}"/>
+              </a:ext>
+            </a:extLst>
+          </p:cNvPr>
+          <p:cNvSpPr>
+            <a:spLocks xmlns:a="http://schemas.openxmlformats.org/drawingml/2006/main" noGrp="1"/>
+          </p:cNvSpPr>
+          <p:nvPr>
+            <p:ph type="ftr" idx="11"/>
+          </p:nvPr>
+        </p:nvSpPr>
+        <p:spPr/>
+        <p:txBody>
+          <a:bodyPr xmlns:a="http://schemas.openxmlformats.org/drawingml/2006/main"/>
+          <a:lstStyle xmlns:a="http://schemas.openxmlformats.org/drawingml/2006/main"/>
+          <a:p xmlns:a="http://schemas.openxmlformats.org/drawingml/2006/main"/>
+        </p:txBody>
+      </p:sp>
+      <p:sp>
+        <p:nvSpPr>
+          <p:cNvPr id="6" name="Slide Number Placeholder 5">
+            <a:extLst xmlns:a="http://schemas.openxmlformats.org/drawingml/2006/main">
+              <a:ext uri="{FF2B5EF4-FFF2-40B4-BE49-F238E27FC236}">
+                <a16:creationId xmlns:a16="http://schemas.microsoft.com/office/drawing/2014/main" id="{1FBFACAA-0A94-44D6-B1A7-C17FD58BE406}"/>
+              </a:ext>
+            </a:extLst>
+          </p:cNvPr>
+          <p:cNvSpPr>
+            <a:spLocks xmlns:a="http://schemas.openxmlformats.org/drawingml/2006/main" noGrp="1"/>
+          </p:cNvSpPr>
+          <p:nvPr>
+            <p:ph type="sldNum" idx="12"/>
+          </p:nvPr>
+        </p:nvSpPr>
+        <p:spPr/>
+        <p:txBody>
+          <a:bodyPr xmlns:a="http://schemas.openxmlformats.org/drawingml/2006/main"/>
+          <a:lstStyle xmlns:a="http://schemas.openxmlformats.org/drawingml/2006/main"/>
+          <a:p xmlns:a="http://schemas.openxmlformats.org/drawingml/2006/main"/>
+        </p:txBody>
+      </p:sp>
+    </p:spTree>
+  </p:cSld>
+</p:sldLayout>
+</file>
+
+<file path=ppt/slideLayouts/slideLayout11.xml><?xml version="1.0" encoding="utf-8"?>
+<p:sldLayout xmlns:p="http://schemas.openxmlformats.org/presentationml/2006/main" type="vertTitleAndTx">
+  <p:cSld name="Vertical Title and Text">
+    <p:spTree>
+      <p:nvGrpSpPr>
+        <p:cNvPr id="1" name=""/>
+        <p:cNvGrpSpPr/>
+        <p:nvPr/>
+      </p:nvGrpSpPr>
+      <p:grpSpPr>
+        <a:xfrm xmlns:a="http://schemas.openxmlformats.org/drawingml/2006/main"/>
+      </p:grpSpPr>
+      <p:sp>
+        <p:nvSpPr>
+          <p:cNvPr id="2" name="Vertical Title 1">
+            <a:extLst xmlns:a="http://schemas.openxmlformats.org/drawingml/2006/main">
+              <a:ext uri="{FF2B5EF4-FFF2-40B4-BE49-F238E27FC236}">
+                <a16:creationId xmlns:a16="http://schemas.microsoft.com/office/drawing/2014/main" id="{8F2BCED5-3A5D-47F0-9DF4-6A63AC0FA9AD}"/>
+              </a:ext>
+            </a:extLst>
+          </p:cNvPr>
+          <p:cNvSpPr>
+            <a:spLocks xmlns:a="http://schemas.openxmlformats.org/drawingml/2006/main" noGrp="1"/>
+          </p:cNvSpPr>
+          <p:nvPr>
+            <p:ph type="title" idx="0"/>
+          </p:nvPr>
+        </p:nvSpPr>
+        <p:spPr>
+          <a:xfrm xmlns:a="http://schemas.openxmlformats.org/drawingml/2006/main">
+            <a:off x="6629400" y="274638"/>
+            <a:ext cx="2057400" cy="5851525"/>
+          </a:xfrm>
+        </p:spPr>
+        <p:txBody>
+          <a:bodyPr xmlns:a="http://schemas.openxmlformats.org/drawingml/2006/main" vert="eaVert"/>
+          <a:lstStyle xmlns:a="http://schemas.openxmlformats.org/drawingml/2006/main"/>
+          <a:p xmlns:a="http://schemas.openxmlformats.org/drawingml/2006/main"/>
+        </p:txBody>
+      </p:sp>
+      <p:sp>
+        <p:nvSpPr>
+          <p:cNvPr id="3" name="Vertical Text Placeholder 2">
+            <a:extLst xmlns:a="http://schemas.openxmlformats.org/drawingml/2006/main">
+              <a:ext uri="{FF2B5EF4-FFF2-40B4-BE49-F238E27FC236}">
+                <a16:creationId xmlns:a16="http://schemas.microsoft.com/office/drawing/2014/main" id="{C07DC90D-B8AC-4453-9186-2BDA81724E16}"/>
+              </a:ext>
+            </a:extLst>
+          </p:cNvPr>
+          <p:cNvSpPr>
+            <a:spLocks xmlns:a="http://schemas.openxmlformats.org/drawingml/2006/main" noGrp="1"/>
+          </p:cNvSpPr>
+          <p:nvPr>
+            <p:ph type="body" idx="1"/>
+          </p:nvPr>
+        </p:nvSpPr>
+        <p:spPr>
+          <a:xfrm xmlns:a="http://schemas.openxmlformats.org/drawingml/2006/main">
+            <a:off x="457200" y="274638"/>
+            <a:ext cx="6019800" cy="5851525"/>
+          </a:xfrm>
+        </p:spPr>
+        <p:txBody>
+          <a:bodyPr xmlns:a="http://schemas.openxmlformats.org/drawingml/2006/main" vert="eaVert"/>
+          <a:lstStyle xmlns:a="http://schemas.openxmlformats.org/drawingml/2006/main"/>
+          <a:p xmlns:a="http://schemas.openxmlformats.org/drawingml/2006/main"/>
+        </p:txBody>
+      </p:sp>
+      <p:sp>
+        <p:nvSpPr>
+          <p:cNvPr id="4" name="Date Placeholder 3">
+            <a:extLst xmlns:a="http://schemas.openxmlformats.org/drawingml/2006/main">
+              <a:ext uri="{FF2B5EF4-FFF2-40B4-BE49-F238E27FC236}">
+                <a16:creationId xmlns:a16="http://schemas.microsoft.com/office/drawing/2014/main" id="{9F4D2B21-FDFC-4718-84C9-AE208364D998}"/>
+              </a:ext>
+            </a:extLst>
+          </p:cNvPr>
+          <p:cNvSpPr>
+            <a:spLocks xmlns:a="http://schemas.openxmlformats.org/drawingml/2006/main" noGrp="1"/>
+          </p:cNvSpPr>
+          <p:nvPr>
+            <p:ph type="dt" idx="10"/>
+          </p:nvPr>
+        </p:nvSpPr>
+        <p:spPr/>
+        <p:txBody>
+          <a:bodyPr xmlns:a="http://schemas.openxmlformats.org/drawingml/2006/main"/>
+          <a:lstStyle xmlns:a="http://schemas.openxmlformats.org/drawingml/2006/main"/>
+          <a:p xmlns:a="http://schemas.openxmlformats.org/drawingml/2006/main"/>
+        </p:txBody>
+      </p:sp>
+      <p:sp>
+        <p:nvSpPr>
+          <p:cNvPr id="5" name="Footer Placeholder 4">
+            <a:extLst xmlns:a="http://schemas.openxmlformats.org/drawingml/2006/main">
+              <a:ext uri="{FF2B5EF4-FFF2-40B4-BE49-F238E27FC236}">
+                <a16:creationId xmlns:a16="http://schemas.microsoft.com/office/drawing/2014/main" id="{9293141D-5A70-44CC-8EBB-83AA59BA1AD3}"/>
+              </a:ext>
+            </a:extLst>
+          </p:cNvPr>
+          <p:cNvSpPr>
+            <a:spLocks xmlns:a="http://schemas.openxmlformats.org/drawingml/2006/main" noGrp="1"/>
+          </p:cNvSpPr>
+          <p:nvPr>
+            <p:ph type="ftr" idx="11"/>
+          </p:nvPr>
+        </p:nvSpPr>
+        <p:spPr/>
+        <p:txBody>
+          <a:bodyPr xmlns:a="http://schemas.openxmlformats.org/drawingml/2006/main"/>
+          <a:lstStyle xmlns:a="http://schemas.openxmlformats.org/drawingml/2006/main"/>
+          <a:p xmlns:a="http://schemas.openxmlformats.org/drawingml/2006/main"/>
+        </p:txBody>
+      </p:sp>
+      <p:sp>
+        <p:nvSpPr>
+          <p:cNvPr id="6" name="Slide Number Placeholder 5">
+            <a:extLst xmlns:a="http://schemas.openxmlformats.org/drawingml/2006/main">
+              <a:ext uri="{FF2B5EF4-FFF2-40B4-BE49-F238E27FC236}">
+                <a16:creationId xmlns:a16="http://schemas.microsoft.com/office/drawing/2014/main" id="{0496E852-DC9D-460C-A799-3EFF5FCEB8AD}"/>
+              </a:ext>
+            </a:extLst>
+          </p:cNvPr>
+          <p:cNvSpPr>
+            <a:spLocks xmlns:a="http://schemas.openxmlformats.org/drawingml/2006/main" noGrp="1"/>
+          </p:cNvSpPr>
+          <p:nvPr>
+            <p:ph type="sldNum" idx="12"/>
+          </p:nvPr>
+        </p:nvSpPr>
+        <p:spPr/>
+        <p:txBody>
+          <a:bodyPr xmlns:a="http://schemas.openxmlformats.org/drawingml/2006/main"/>
+          <a:lstStyle xmlns:a="http://schemas.openxmlformats.org/drawingml/2006/main"/>
+          <a:p xmlns:a="http://schemas.openxmlformats.org/drawingml/2006/main"/>
+        </p:txBody>
+      </p:sp>
+    </p:spTree>
+  </p:cSld>
+</p:sldLayout>
+</file>
+
+<file path=ppt/slideLayouts/slideLayout2.xml><?xml version="1.0" encoding="utf-8"?>
+<p:sldLayout xmlns:p="http://schemas.openxmlformats.org/presentationml/2006/main" type="obj">
+  <p:cSld name="Title and Content">
+    <p:spTree>
+      <p:nvGrpSpPr>
+        <p:cNvPr id="1" name=""/>
+        <p:cNvGrpSpPr/>
+        <p:nvPr/>
+      </p:nvGrpSpPr>
+      <p:grpSpPr>
+        <a:xfrm xmlns:a="http://schemas.openxmlformats.org/drawingml/2006/main"/>
+      </p:grpSpPr>
+      <p:sp>
+        <p:nvSpPr>
+          <p:cNvPr id="2" name="Title 1">
+            <a:extLst xmlns:a="http://schemas.openxmlformats.org/drawingml/2006/main">
+              <a:ext uri="{FF2B5EF4-FFF2-40B4-BE49-F238E27FC236}">
+                <a16:creationId xmlns:a16="http://schemas.microsoft.com/office/drawing/2014/main" id="{F44FE04E-D81A-4E16-9CE4-A3D5D81B5FD7}"/>
+              </a:ext>
+            </a:extLst>
+          </p:cNvPr>
+          <p:cNvSpPr>
+            <a:spLocks xmlns:a="http://schemas.openxmlformats.org/drawingml/2006/main" noGrp="1"/>
+          </p:cNvSpPr>
+          <p:nvPr>
+            <p:ph type="title" idx="0"/>
+          </p:nvPr>
+        </p:nvSpPr>
+        <p:spPr/>
+        <p:txBody>
+          <a:bodyPr xmlns:a="http://schemas.openxmlformats.org/drawingml/2006/main"/>
+          <a:lstStyle xmlns:a="http://schemas.openxmlformats.org/drawingml/2006/main"/>
+          <a:p xmlns:a="http://schemas.openxmlformats.org/drawingml/2006/main"/>
+        </p:txBody>
+      </p:sp>
+      <p:sp>
+        <p:nvSpPr>
+          <p:cNvPr id="3" name="Content Placeholder 2">
+            <a:extLst xmlns:a="http://schemas.openxmlformats.org/drawingml/2006/main">
+              <a:ext uri="{FF2B5EF4-FFF2-40B4-BE49-F238E27FC236}">
+                <a16:creationId xmlns:a16="http://schemas.microsoft.com/office/drawing/2014/main" id="{468BEBE7-F5F5-4812-9A54-5279E7919159}"/>
+              </a:ext>
+            </a:extLst>
+          </p:cNvPr>
+          <p:cNvSpPr>
+            <a:spLocks xmlns:a="http://schemas.openxmlformats.org/drawingml/2006/main" noGrp="1"/>
+          </p:cNvSpPr>
+          <p:nvPr>
+            <p:ph idx="1"/>
+          </p:nvPr>
+        </p:nvSpPr>
+        <p:spPr/>
+        <p:txBody>
+          <a:bodyPr xmlns:a="http://schemas.openxmlformats.org/drawingml/2006/main"/>
+          <a:lstStyle xmlns:a="http://schemas.openxmlformats.org/drawingml/2006/main"/>
+          <a:p xmlns:a="http://schemas.openxmlformats.org/drawingml/2006/main"/>
+        </p:txBody>
+      </p:sp>
+      <p:sp>
+        <p:nvSpPr>
+          <p:cNvPr id="4" name="Date Placeholder 3">
+            <a:extLst xmlns:a="http://schemas.openxmlformats.org/drawingml/2006/main">
+              <a:ext uri="{FF2B5EF4-FFF2-40B4-BE49-F238E27FC236}">
+                <a16:creationId xmlns:a16="http://schemas.microsoft.com/office/drawing/2014/main" id="{6056BC62-C707-4268-AFF8-8250E939196E}"/>
+              </a:ext>
+            </a:extLst>
+          </p:cNvPr>
+          <p:cNvSpPr>
+            <a:spLocks xmlns:a="http://schemas.openxmlformats.org/drawingml/2006/main" noGrp="1"/>
+          </p:cNvSpPr>
+          <p:nvPr>
+            <p:ph type="dt" idx="10"/>
+          </p:nvPr>
+        </p:nvSpPr>
+        <p:spPr/>
+        <p:txBody>
+          <a:bodyPr xmlns:a="http://schemas.openxmlformats.org/drawingml/2006/main"/>
+          <a:lstStyle xmlns:a="http://schemas.openxmlformats.org/drawingml/2006/main"/>
+          <a:p xmlns:a="http://schemas.openxmlformats.org/drawingml/2006/main"/>
+        </p:txBody>
+      </p:sp>
+      <p:sp>
+        <p:nvSpPr>
+          <p:cNvPr id="5" name="Footer Placeholder 4">
+            <a:extLst xmlns:a="http://schemas.openxmlformats.org/drawingml/2006/main">
+              <a:ext uri="{FF2B5EF4-FFF2-40B4-BE49-F238E27FC236}">
+                <a16:creationId xmlns:a16="http://schemas.microsoft.com/office/drawing/2014/main" id="{889C815B-5BEE-4C31-822D-E752B091CBCD}"/>
+              </a:ext>
+            </a:extLst>
+          </p:cNvPr>
+          <p:cNvSpPr>
+            <a:spLocks xmlns:a="http://schemas.openxmlformats.org/drawingml/2006/main" noGrp="1"/>
+          </p:cNvSpPr>
+          <p:nvPr>
+            <p:ph type="ftr" idx="11"/>
+          </p:nvPr>
+        </p:nvSpPr>
+        <p:spPr/>
+        <p:txBody>
+          <a:bodyPr xmlns:a="http://schemas.openxmlformats.org/drawingml/2006/main"/>
+          <a:lstStyle xmlns:a="http://schemas.openxmlformats.org/drawingml/2006/main"/>
+          <a:p xmlns:a="http://schemas.openxmlformats.org/drawingml/2006/main"/>
+        </p:txBody>
+      </p:sp>
+      <p:sp>
+        <p:nvSpPr>
+          <p:cNvPr id="6" name="Slide Number Placeholder 5">
+            <a:extLst xmlns:a="http://schemas.openxmlformats.org/drawingml/2006/main">
+              <a:ext uri="{FF2B5EF4-FFF2-40B4-BE49-F238E27FC236}">
+                <a16:creationId xmlns:a16="http://schemas.microsoft.com/office/drawing/2014/main" id="{32D29DEB-BB46-454E-9373-DC4DEAC80466}"/>
+              </a:ext>
+            </a:extLst>
+          </p:cNvPr>
+          <p:cNvSpPr>
+            <a:spLocks xmlns:a="http://schemas.openxmlformats.org/drawingml/2006/main" noGrp="1"/>
+          </p:cNvSpPr>
+          <p:nvPr>
+            <p:ph type="sldNum" idx="12"/>
+          </p:nvPr>
+        </p:nvSpPr>
+        <p:spPr/>
+        <p:txBody>
+          <a:bodyPr xmlns:a="http://schemas.openxmlformats.org/drawingml/2006/main"/>
+          <a:lstStyle xmlns:a="http://schemas.openxmlformats.org/drawingml/2006/main"/>
+          <a:p xmlns:a="http://schemas.openxmlformats.org/drawingml/2006/main"/>
+        </p:txBody>
+      </p:sp>
+    </p:spTree>
+  </p:cSld>
+</p:sldLayout>
+</file>
+
+<file path=ppt/slideLayouts/slideLayout3.xml><?xml version="1.0" encoding="utf-8"?>
+<p:sldLayout xmlns:p="http://schemas.openxmlformats.org/presentationml/2006/main" type="secHead">
+  <p:cSld name="Section Header">
+    <p:spTree>
+      <p:nvGrpSpPr>
+        <p:cNvPr id="1" name=""/>
+        <p:cNvGrpSpPr/>
+        <p:nvPr/>
+      </p:nvGrpSpPr>
+      <p:grpSpPr>
+        <a:xfrm xmlns:a="http://schemas.openxmlformats.org/drawingml/2006/main"/>
+      </p:grpSpPr>
+      <p:sp>
+        <p:nvSpPr>
+          <p:cNvPr id="2" name="Title 1">
+            <a:extLst xmlns:a="http://schemas.openxmlformats.org/drawingml/2006/main">
+              <a:ext uri="{FF2B5EF4-FFF2-40B4-BE49-F238E27FC236}">
+                <a16:creationId xmlns:a16="http://schemas.microsoft.com/office/drawing/2014/main" id="{E89248A2-F6A0-4CBE-AAB7-5781931A337A}"/>
+              </a:ext>
+            </a:extLst>
+          </p:cNvPr>
+          <p:cNvSpPr>
+            <a:spLocks xmlns:a="http://schemas.openxmlformats.org/drawingml/2006/main" noGrp="1"/>
+          </p:cNvSpPr>
+          <p:nvPr>
+            <p:ph type="title" idx="0"/>
+          </p:nvPr>
+        </p:nvSpPr>
+        <p:spPr>
+          <a:xfrm xmlns:a="http://schemas.openxmlformats.org/drawingml/2006/main">
+            <a:off x="722313" y="4406900"/>
+            <a:ext cx="7772400" cy="1362075"/>
+          </a:xfrm>
+        </p:spPr>
+        <p:txBody>
+          <a:bodyPr xmlns:a="http://schemas.openxmlformats.org/drawingml/2006/main" anchor="t"/>
+          <a:lstStyle xmlns:a="http://schemas.openxmlformats.org/drawingml/2006/main">
+            <a:lvl1pPr algn="l">
+              <a:buNone/>
+              <a:defRPr sz="4000" b="1" cap="all"/>
+            </a:lvl1pPr>
+          </a:lstStyle>
+          <a:p xmlns:a="http://schemas.openxmlformats.org/drawingml/2006/main"/>
+        </p:txBody>
+      </p:sp>
+      <p:sp>
+        <p:nvSpPr>
+          <p:cNvPr id="3" name="Text Placeholder 2">
+            <a:extLst xmlns:a="http://schemas.openxmlformats.org/drawingml/2006/main">
+              <a:ext uri="{FF2B5EF4-FFF2-40B4-BE49-F238E27FC236}">
+                <a16:creationId xmlns:a16="http://schemas.microsoft.com/office/drawing/2014/main" id="{D2E6DD9A-B447-40B8-9AFA-23A870F403E8}"/>
+              </a:ext>
+            </a:extLst>
+          </p:cNvPr>
+          <p:cNvSpPr>
+            <a:spLocks xmlns:a="http://schemas.openxmlformats.org/drawingml/2006/main" noGrp="1"/>
+          </p:cNvSpPr>
+          <p:nvPr>
+            <p:ph type="body" idx="1"/>
+          </p:nvPr>
+        </p:nvSpPr>
+        <p:spPr>
+          <a:xfrm xmlns:a="http://schemas.openxmlformats.org/drawingml/2006/main">
+            <a:off x="722313" y="2906713"/>
+            <a:ext cx="7772400" cy="1500187"/>
+          </a:xfrm>
+        </p:spPr>
+        <p:txBody>
+          <a:bodyPr xmlns:a="http://schemas.openxmlformats.org/drawingml/2006/main" anchor="b"/>
+          <a:lstStyle xmlns:a="http://schemas.openxmlformats.org/drawingml/2006/main">
+            <a:lvl1pPr marL="0" indent="0">
+              <a:buNone/>
+              <a:defRPr sz="2000">
+                <a:solidFill>
+                  <a:schemeClr val="tx1">
+                    <a:tint val="75000"/>
+                  </a:schemeClr>
+                </a:solidFill>
+              </a:defRPr>
+            </a:lvl1pPr>
+            <a:lvl2pPr marL="457200" indent="0">
+              <a:buNone/>
+              <a:defRPr sz="1800">
+                <a:solidFill>
+                  <a:schemeClr val="tx1">
+                    <a:tint val="75000"/>
+                  </a:schemeClr>
+                </a:solidFill>
+              </a:defRPr>
+            </a:lvl2pPr>
+            <a:lvl3pPr marL="914400" indent="0">
+              <a:buNone/>
+              <a:defRPr sz="1600">
+                <a:solidFill>
+                  <a:schemeClr val="tx1">
+                    <a:tint val="75000"/>
+                  </a:schemeClr>
+                </a:solidFill>
+              </a:defRPr>
+            </a:lvl3pPr>
+            <a:lvl4pPr marL="1371600" indent="0">
+              <a:buNone/>
+              <a:defRPr sz="1400">
+                <a:solidFill>
+                  <a:schemeClr val="tx1">
+                    <a:tint val="75000"/>
+                  </a:schemeClr>
+                </a:solidFill>
+              </a:defRPr>
+            </a:lvl4pPr>
+            <a:lvl5pPr marL="1828800" indent="0">
+              <a:buNone/>
+              <a:defRPr sz="1400">
+                <a:solidFill>
+                  <a:schemeClr val="tx1">
+                    <a:tint val="75000"/>
+                  </a:schemeClr>
+                </a:solidFill>
+              </a:defRPr>
+            </a:lvl5pPr>
+            <a:lvl6pPr marL="2286000" indent="0">
+              <a:buNone/>
+              <a:defRPr sz="1400">
+                <a:solidFill>
+                  <a:schemeClr val="tx1">
+                    <a:tint val="75000"/>
+                  </a:schemeClr>
+                </a:solidFill>
+              </a:defRPr>
+            </a:lvl6pPr>
+            <a:lvl7pPr marL="2743200" indent="0">
+              <a:buNone/>
+              <a:defRPr sz="1400">
+                <a:solidFill>
+                  <a:schemeClr val="tx1">
+                    <a:tint val="75000"/>
+                  </a:schemeClr>
+                </a:solidFill>
+              </a:defRPr>
+            </a:lvl7pPr>
+            <a:lvl8pPr marL="3200400" indent="0">
+              <a:buNone/>
+              <a:defRPr sz="1400">
+                <a:solidFill>
+                  <a:schemeClr val="tx1">
+                    <a:tint val="75000"/>
+                  </a:schemeClr>
+                </a:solidFill>
+              </a:defRPr>
+            </a:lvl8pPr>
+            <a:lvl9pPr marL="3657600" indent="0">
+              <a:buNone/>
+              <a:defRPr sz="1400">
+                <a:solidFill>
+                  <a:schemeClr val="tx1">
+                    <a:tint val="75000"/>
+                  </a:schemeClr>
+                </a:solidFill>
+              </a:defRPr>
+            </a:lvl9pPr>
+          </a:lstStyle>
+          <a:p xmlns:a="http://schemas.openxmlformats.org/drawingml/2006/main"/>
+        </p:txBody>
+      </p:sp>
+      <p:sp>
+        <p:nvSpPr>
+          <p:cNvPr id="4" name="Date Placeholder 3">
+            <a:extLst xmlns:a="http://schemas.openxmlformats.org/drawingml/2006/main">
+              <a:ext uri="{FF2B5EF4-FFF2-40B4-BE49-F238E27FC236}">
+                <a16:creationId xmlns:a16="http://schemas.microsoft.com/office/drawing/2014/main" id="{11065299-A4C6-4A88-B11F-AFE90AB76D50}"/>
+              </a:ext>
+            </a:extLst>
+          </p:cNvPr>
+          <p:cNvSpPr>
+            <a:spLocks xmlns:a="http://schemas.openxmlformats.org/drawingml/2006/main" noGrp="1"/>
+          </p:cNvSpPr>
+          <p:nvPr>
+            <p:ph type="dt" idx="10"/>
+          </p:nvPr>
+        </p:nvSpPr>
+        <p:spPr/>
+        <p:txBody>
+          <a:bodyPr xmlns:a="http://schemas.openxmlformats.org/drawingml/2006/main"/>
+          <a:lstStyle xmlns:a="http://schemas.openxmlformats.org/drawingml/2006/main"/>
+          <a:p xmlns:a="http://schemas.openxmlformats.org/drawingml/2006/main"/>
+        </p:txBody>
+      </p:sp>
+      <p:sp>
+        <p:nvSpPr>
+          <p:cNvPr id="5" name="Footer Placeholder 4">
+            <a:extLst xmlns:a="http://schemas.openxmlformats.org/drawingml/2006/main">
+              <a:ext uri="{FF2B5EF4-FFF2-40B4-BE49-F238E27FC236}">
+                <a16:creationId xmlns:a16="http://schemas.microsoft.com/office/drawing/2014/main" id="{727DBC7F-E697-47E9-A21A-72968D92D3A3}"/>
+              </a:ext>
+            </a:extLst>
+          </p:cNvPr>
+          <p:cNvSpPr>
+            <a:spLocks xmlns:a="http://schemas.openxmlformats.org/drawingml/2006/main" noGrp="1"/>
+          </p:cNvSpPr>
+          <p:nvPr>
+            <p:ph type="ftr" idx="11"/>
+          </p:nvPr>
+        </p:nvSpPr>
+        <p:spPr/>
+        <p:txBody>
+          <a:bodyPr xmlns:a="http://schemas.openxmlformats.org/drawingml/2006/main"/>
+          <a:lstStyle xmlns:a="http://schemas.openxmlformats.org/drawingml/2006/main"/>
+          <a:p xmlns:a="http://schemas.openxmlformats.org/drawingml/2006/main"/>
+        </p:txBody>
+      </p:sp>
+      <p:sp>
+        <p:nvSpPr>
+          <p:cNvPr id="6" name="Slide Number Placeholder 5">
+            <a:extLst xmlns:a="http://schemas.openxmlformats.org/drawingml/2006/main">
+              <a:ext uri="{FF2B5EF4-FFF2-40B4-BE49-F238E27FC236}">
+                <a16:creationId xmlns:a16="http://schemas.microsoft.com/office/drawing/2014/main" id="{D2F6B092-117E-443A-B535-6D56670A2EF3}"/>
+              </a:ext>
+            </a:extLst>
+          </p:cNvPr>
+          <p:cNvSpPr>
+            <a:spLocks xmlns:a="http://schemas.openxmlformats.org/drawingml/2006/main" noGrp="1"/>
+          </p:cNvSpPr>
+          <p:nvPr>
+            <p:ph type="sldNum" idx="12"/>
+          </p:nvPr>
+        </p:nvSpPr>
+        <p:spPr/>
+        <p:txBody>
+          <a:bodyPr xmlns:a="http://schemas.openxmlformats.org/drawingml/2006/main"/>
+          <a:lstStyle xmlns:a="http://schemas.openxmlformats.org/drawingml/2006/main"/>
+          <a:p xmlns:a="http://schemas.openxmlformats.org/drawingml/2006/main"/>
+        </p:txBody>
+      </p:sp>
+    </p:spTree>
+  </p:cSld>
+</p:sldLayout>
+</file>
+
+<file path=ppt/slideLayouts/slideLayout4.xml><?xml version="1.0" encoding="utf-8"?>
+<p:sldLayout xmlns:p="http://schemas.openxmlformats.org/presentationml/2006/main" type="twoObj">
+  <p:cSld name="Two Content">
+    <p:spTree>
+      <p:nvGrpSpPr>
+        <p:cNvPr id="1" name=""/>
+        <p:cNvGrpSpPr/>
+        <p:nvPr/>
+      </p:nvGrpSpPr>
+      <p:grpSpPr>
+        <a:xfrm xmlns:a="http://schemas.openxmlformats.org/drawingml/2006/main"/>
+      </p:grpSpPr>
+      <p:sp>
+        <p:nvSpPr>
+          <p:cNvPr id="2" name="Title 1">
+            <a:extLst xmlns:a="http://schemas.openxmlformats.org/drawingml/2006/main">
+              <a:ext uri="{FF2B5EF4-FFF2-40B4-BE49-F238E27FC236}">
+                <a16:creationId xmlns:a16="http://schemas.microsoft.com/office/drawing/2014/main" id="{C18EE0B0-6535-4ECB-A1A8-F0D688B53D6B}"/>
+              </a:ext>
+            </a:extLst>
+          </p:cNvPr>
+          <p:cNvSpPr>
+            <a:spLocks xmlns:a="http://schemas.openxmlformats.org/drawingml/2006/main" noGrp="1"/>
+          </p:cNvSpPr>
+          <p:nvPr>
+            <p:ph type="title" idx="0"/>
+          </p:nvPr>
+        </p:nvSpPr>
+        <p:spPr/>
+        <p:txBody>
+          <a:bodyPr xmlns:a="http://schemas.openxmlformats.org/drawingml/2006/main"/>
+          <a:lstStyle xmlns:a="http://schemas.openxmlformats.org/drawingml/2006/main"/>
+          <a:p xmlns:a="http://schemas.openxmlformats.org/drawingml/2006/main"/>
+        </p:txBody>
+      </p:sp>
+      <p:sp>
+        <p:nvSpPr>
+          <p:cNvPr id="3" name="Content Placeholder 2">
+            <a:extLst xmlns:a="http://schemas.openxmlformats.org/drawingml/2006/main">
+              <a:ext uri="{FF2B5EF4-FFF2-40B4-BE49-F238E27FC236}">
+                <a16:creationId xmlns:a16="http://schemas.microsoft.com/office/drawing/2014/main" id="{5050762E-4905-4E36-A766-5B4D6C44A8F2}"/>
+              </a:ext>
+            </a:extLst>
+          </p:cNvPr>
+          <p:cNvSpPr>
+            <a:spLocks xmlns:a="http://schemas.openxmlformats.org/drawingml/2006/main" noGrp="1"/>
+          </p:cNvSpPr>
+          <p:nvPr>
+            <p:ph idx="1"/>
+          </p:nvPr>
+        </p:nvSpPr>
+        <p:spPr>
+          <a:xfrm xmlns:a="http://schemas.openxmlformats.org/drawingml/2006/main">
+            <a:off x="457200" y="1600200"/>
+            <a:ext cx="4038600" cy="4525963"/>
+          </a:xfrm>
+        </p:spPr>
+        <p:txBody>
+          <a:bodyPr xmlns:a="http://schemas.openxmlformats.org/drawingml/2006/main"/>
+          <a:lstStyle xmlns:a="http://schemas.openxmlformats.org/drawingml/2006/main">
+            <a:lvl1pPr>
+              <a:buNone/>
+              <a:defRPr sz="2800"/>
+            </a:lvl1pPr>
+            <a:lvl2pPr>
+              <a:buNone/>
+              <a:defRPr sz="2400"/>
+            </a:lvl2pPr>
+            <a:lvl3pPr>
+              <a:buNone/>
+              <a:defRPr sz="2000"/>
+            </a:lvl3pPr>
+            <a:lvl4pPr>
+              <a:buNone/>
+              <a:defRPr sz="1800"/>
+            </a:lvl4pPr>
+            <a:lvl5pPr>
+              <a:buNone/>
+              <a:defRPr sz="1800"/>
+            </a:lvl5pPr>
+            <a:lvl6pPr>
+              <a:buNone/>
+              <a:defRPr sz="1800"/>
+            </a:lvl6pPr>
+            <a:lvl7pPr>
+              <a:buNone/>
+              <a:defRPr sz="1800"/>
+            </a:lvl7pPr>
+            <a:lvl8pPr>
+              <a:buNone/>
+              <a:defRPr sz="1800"/>
+            </a:lvl8pPr>
+            <a:lvl9pPr>
+              <a:buNone/>
+              <a:defRPr sz="1800"/>
+            </a:lvl9pPr>
+          </a:lstStyle>
+          <a:p xmlns:a="http://schemas.openxmlformats.org/drawingml/2006/main"/>
+        </p:txBody>
+      </p:sp>
+      <p:sp>
+        <p:nvSpPr>
+          <p:cNvPr id="4" name="Content Placeholder 3">
+            <a:extLst xmlns:a="http://schemas.openxmlformats.org/drawingml/2006/main">
+              <a:ext uri="{FF2B5EF4-FFF2-40B4-BE49-F238E27FC236}">
+                <a16:creationId xmlns:a16="http://schemas.microsoft.com/office/drawing/2014/main" id="{4D3C4BC6-100E-4ADC-A461-6DEFB62E6A23}"/>
+              </a:ext>
+            </a:extLst>
+          </p:cNvPr>
+          <p:cNvSpPr>
+            <a:spLocks xmlns:a="http://schemas.openxmlformats.org/drawingml/2006/main" noGrp="1"/>
+          </p:cNvSpPr>
+          <p:nvPr>
+            <p:ph idx="2"/>
+          </p:nvPr>
+        </p:nvSpPr>
+        <p:spPr>
+          <a:xfrm xmlns:a="http://schemas.openxmlformats.org/drawingml/2006/main">
+            <a:off x="4648200" y="1600200"/>
+            <a:ext cx="4038600" cy="4525963"/>
+          </a:xfrm>
+        </p:spPr>
+        <p:txBody>
+          <a:bodyPr xmlns:a="http://schemas.openxmlformats.org/drawingml/2006/main"/>
+          <a:lstStyle xmlns:a="http://schemas.openxmlformats.org/drawingml/2006/main">
+            <a:lvl1pPr>
+              <a:buNone/>
+              <a:defRPr sz="2800"/>
+            </a:lvl1pPr>
+            <a:lvl2pPr>
+              <a:buNone/>
+              <a:defRPr sz="2400"/>
+            </a:lvl2pPr>
+            <a:lvl3pPr>
+              <a:buNone/>
+              <a:defRPr sz="2000"/>
+            </a:lvl3pPr>
+            <a:lvl4pPr>
+              <a:buNone/>
+              <a:defRPr sz="1800"/>
+            </a:lvl4pPr>
+            <a:lvl5pPr>
+              <a:buNone/>
+              <a:defRPr sz="1800"/>
+            </a:lvl5pPr>
+            <a:lvl6pPr>
+              <a:buNone/>
+              <a:defRPr sz="1800"/>
+            </a:lvl6pPr>
+            <a:lvl7pPr>
+              <a:buNone/>
+              <a:defRPr sz="1800"/>
+            </a:lvl7pPr>
+            <a:lvl8pPr>
+              <a:buNone/>
+              <a:defRPr sz="1800"/>
+            </a:lvl8pPr>
+            <a:lvl9pPr>
+              <a:buNone/>
+              <a:defRPr sz="1800"/>
+            </a:lvl9pPr>
+          </a:lstStyle>
+          <a:p xmlns:a="http://schemas.openxmlformats.org/drawingml/2006/main"/>
+        </p:txBody>
+      </p:sp>
+      <p:sp>
+        <p:nvSpPr>
+          <p:cNvPr id="5" name="Date Placeholder 4">
+            <a:extLst xmlns:a="http://schemas.openxmlformats.org/drawingml/2006/main">
+              <a:ext uri="{FF2B5EF4-FFF2-40B4-BE49-F238E27FC236}">
+                <a16:creationId xmlns:a16="http://schemas.microsoft.com/office/drawing/2014/main" id="{603B9F24-B096-4FFA-9488-BE80C1294191}"/>
+              </a:ext>
+            </a:extLst>
+          </p:cNvPr>
+          <p:cNvSpPr>
+            <a:spLocks xmlns:a="http://schemas.openxmlformats.org/drawingml/2006/main" noGrp="1"/>
+          </p:cNvSpPr>
+          <p:nvPr>
+            <p:ph type="dt" idx="10"/>
+          </p:nvPr>
+        </p:nvSpPr>
+        <p:spPr/>
+        <p:txBody>
+          <a:bodyPr xmlns:a="http://schemas.openxmlformats.org/drawingml/2006/main"/>
+          <a:lstStyle xmlns:a="http://schemas.openxmlformats.org/drawingml/2006/main"/>
+          <a:p xmlns:a="http://schemas.openxmlformats.org/drawingml/2006/main"/>
+        </p:txBody>
+      </p:sp>
+      <p:sp>
+        <p:nvSpPr>
+          <p:cNvPr id="6" name="Footer Placeholder 5">
+            <a:extLst xmlns:a="http://schemas.openxmlformats.org/drawingml/2006/main">
+              <a:ext uri="{FF2B5EF4-FFF2-40B4-BE49-F238E27FC236}">
+                <a16:creationId xmlns:a16="http://schemas.microsoft.com/office/drawing/2014/main" id="{EE6D6730-5DDE-4CC3-ADAD-38623F47DAE3}"/>
+              </a:ext>
+            </a:extLst>
+          </p:cNvPr>
+          <p:cNvSpPr>
+            <a:spLocks xmlns:a="http://schemas.openxmlformats.org/drawingml/2006/main" noGrp="1"/>
+          </p:cNvSpPr>
+          <p:nvPr>
+            <p:ph type="ftr" idx="11"/>
+          </p:nvPr>
+        </p:nvSpPr>
+        <p:spPr/>
+        <p:txBody>
+          <a:bodyPr xmlns:a="http://schemas.openxmlformats.org/drawingml/2006/main"/>
+          <a:lstStyle xmlns:a="http://schemas.openxmlformats.org/drawingml/2006/main"/>
+          <a:p xmlns:a="http://schemas.openxmlformats.org/drawingml/2006/main"/>
+        </p:txBody>
+      </p:sp>
+      <p:sp>
+        <p:nvSpPr>
+          <p:cNvPr id="7" name="Slide Number Placeholder 6">
+            <a:extLst xmlns:a="http://schemas.openxmlformats.org/drawingml/2006/main">
+              <a:ext uri="{FF2B5EF4-FFF2-40B4-BE49-F238E27FC236}">
+                <a16:creationId xmlns:a16="http://schemas.microsoft.com/office/drawing/2014/main" id="{2DC51CFE-838A-4545-86B3-14DB52C4F3DF}"/>
+              </a:ext>
+            </a:extLst>
+          </p:cNvPr>
+          <p:cNvSpPr>
+            <a:spLocks xmlns:a="http://schemas.openxmlformats.org/drawingml/2006/main" noGrp="1"/>
+          </p:cNvSpPr>
+          <p:nvPr>
+            <p:ph type="sldNum" idx="12"/>
+          </p:nvPr>
+        </p:nvSpPr>
+        <p:spPr/>
+        <p:txBody>
+          <a:bodyPr xmlns:a="http://schemas.openxmlformats.org/drawingml/2006/main"/>
+          <a:lstStyle xmlns:a="http://schemas.openxmlformats.org/drawingml/2006/main"/>
+          <a:p xmlns:a="http://schemas.openxmlformats.org/drawingml/2006/main"/>
+        </p:txBody>
+      </p:sp>
+    </p:spTree>
+  </p:cSld>
+</p:sldLayout>
+</file>
+
+<file path=ppt/slideLayouts/slideLayout5.xml><?xml version="1.0" encoding="utf-8"?>
+<p:sldLayout xmlns:p="http://schemas.openxmlformats.org/presentationml/2006/main" type="twoTxTwoObj">
+  <p:cSld name="Comparison">
+    <p:spTree>
+      <p:nvGrpSpPr>
+        <p:cNvPr id="1" name=""/>
+        <p:cNvGrpSpPr/>
+        <p:nvPr/>
+      </p:nvGrpSpPr>
+      <p:grpSpPr>
+        <a:xfrm xmlns:a="http://schemas.openxmlformats.org/drawingml/2006/main"/>
+      </p:grpSpPr>
+      <p:sp>
+        <p:nvSpPr>
+          <p:cNvPr id="2" name="Title 1">
+            <a:extLst xmlns:a="http://schemas.openxmlformats.org/drawingml/2006/main">
+              <a:ext uri="{FF2B5EF4-FFF2-40B4-BE49-F238E27FC236}">
+                <a16:creationId xmlns:a16="http://schemas.microsoft.com/office/drawing/2014/main" id="{817F595E-4669-4D31-AF7A-78C2EA38387F}"/>
+              </a:ext>
+            </a:extLst>
+          </p:cNvPr>
+          <p:cNvSpPr>
+            <a:spLocks xmlns:a="http://schemas.openxmlformats.org/drawingml/2006/main" noGrp="1"/>
+          </p:cNvSpPr>
+          <p:nvPr>
+            <p:ph type="title" idx="0"/>
+          </p:nvPr>
+        </p:nvSpPr>
+        <p:spPr/>
+        <p:txBody>
+          <a:bodyPr xmlns:a="http://schemas.openxmlformats.org/drawingml/2006/main"/>
+          <a:lstStyle xmlns:a="http://schemas.openxmlformats.org/drawingml/2006/main">
+            <a:lvl1pPr>
+              <a:buNone/>
+              <a:defRPr/>
+            </a:lvl1pPr>
+          </a:lstStyle>
+          <a:p xmlns:a="http://schemas.openxmlformats.org/drawingml/2006/main"/>
+        </p:txBody>
+      </p:sp>
+      <p:sp>
+        <p:nvSpPr>
+          <p:cNvPr id="3" name="Text Placeholder 2">
+            <a:extLst xmlns:a="http://schemas.openxmlformats.org/drawingml/2006/main">
+              <a:ext uri="{FF2B5EF4-FFF2-40B4-BE49-F238E27FC236}">
+                <a16:creationId xmlns:a16="http://schemas.microsoft.com/office/drawing/2014/main" id="{6491D423-9F6C-4CCF-AE91-FE775A90A298}"/>
+              </a:ext>
+            </a:extLst>
+          </p:cNvPr>
+          <p:cNvSpPr>
+            <a:spLocks xmlns:a="http://schemas.openxmlformats.org/drawingml/2006/main" noGrp="1"/>
+          </p:cNvSpPr>
+          <p:nvPr>
+            <p:ph type="body" idx="1"/>
+          </p:nvPr>
+        </p:nvSpPr>
+        <p:spPr>
+          <a:xfrm xmlns:a="http://schemas.openxmlformats.org/drawingml/2006/main">
+            <a:off x="457200" y="1535113"/>
+            <a:ext cx="4040188" cy="639762"/>
+          </a:xfrm>
+        </p:spPr>
+        <p:txBody>
+          <a:bodyPr xmlns:a="http://schemas.openxmlformats.org/drawingml/2006/main" anchor="b"/>
+          <a:lstStyle xmlns:a="http://schemas.openxmlformats.org/drawingml/2006/main">
+            <a:lvl1pPr marL="0" indent="0">
+              <a:buNone/>
+              <a:defRPr sz="2400" b="1"/>
+            </a:lvl1pPr>
+            <a:lvl2pPr marL="457200" indent="0">
+              <a:buNone/>
+              <a:defRPr sz="2000" b="1"/>
+            </a:lvl2pPr>
+            <a:lvl3pPr marL="914400" indent="0">
+              <a:buNone/>
+              <a:defRPr sz="1800" b="1"/>
+            </a:lvl3pPr>
+            <a:lvl4pPr marL="1371600" indent="0">
+              <a:buNone/>
+              <a:defRPr sz="1600" b="1"/>
+            </a:lvl4pPr>
+            <a:lvl5pPr marL="1828800" indent="0">
+              <a:buNone/>
+              <a:defRPr sz="1600" b="1"/>
+            </a:lvl5pPr>
+            <a:lvl6pPr marL="2286000" indent="0">
+              <a:buNone/>
+              <a:defRPr sz="1600" b="1"/>
+            </a:lvl6pPr>
+            <a:lvl7pPr marL="2743200" indent="0">
+              <a:buNone/>
+              <a:defRPr sz="1600" b="1"/>
+            </a:lvl7pPr>
+            <a:lvl8pPr marL="3200400" indent="0">
+              <a:buNone/>
+              <a:defRPr sz="1600" b="1"/>
+            </a:lvl8pPr>
+            <a:lvl9pPr marL="3657600" indent="0">
+              <a:buNone/>
+              <a:defRPr sz="1600" b="1"/>
+            </a:lvl9pPr>
+          </a:lstStyle>
+          <a:p xmlns:a="http://schemas.openxmlformats.org/drawingml/2006/main"/>
+        </p:txBody>
+      </p:sp>
+      <p:sp>
+        <p:nvSpPr>
+          <p:cNvPr id="4" name="Content Placeholder 3">
+            <a:extLst xmlns:a="http://schemas.openxmlformats.org/drawingml/2006/main">
+              <a:ext uri="{FF2B5EF4-FFF2-40B4-BE49-F238E27FC236}">
+                <a16:creationId xmlns:a16="http://schemas.microsoft.com/office/drawing/2014/main" id="{45ECEDBE-407F-493D-A416-AFB9DBBAD8E2}"/>
+              </a:ext>
+            </a:extLst>
+          </p:cNvPr>
+          <p:cNvSpPr>
+            <a:spLocks xmlns:a="http://schemas.openxmlformats.org/drawingml/2006/main" noGrp="1"/>
+          </p:cNvSpPr>
+          <p:nvPr>
+            <p:ph idx="2"/>
+          </p:nvPr>
+        </p:nvSpPr>
+        <p:spPr>
+          <a:xfrm xmlns:a="http://schemas.openxmlformats.org/drawingml/2006/main">
+            <a:off x="457200" y="2174875"/>
+            <a:ext cx="4040188" cy="3951288"/>
+          </a:xfrm>
+        </p:spPr>
+        <p:txBody>
+          <a:bodyPr xmlns:a="http://schemas.openxmlformats.org/drawingml/2006/main"/>
+          <a:lstStyle xmlns:a="http://schemas.openxmlformats.org/drawingml/2006/main">
+            <a:lvl1pPr>
+              <a:buNone/>
+              <a:defRPr sz="2400"/>
+            </a:lvl1pPr>
+            <a:lvl2pPr>
+              <a:buNone/>
+              <a:defRPr sz="2000"/>
+            </a:lvl2pPr>
+            <a:lvl3pPr>
+              <a:buNone/>
+              <a:defRPr sz="1800"/>
+            </a:lvl3pPr>
+            <a:lvl4pPr>
+              <a:buNone/>
+              <a:defRPr sz="1600"/>
+            </a:lvl4pPr>
+            <a:lvl5pPr>
+              <a:buNone/>
+              <a:defRPr sz="1600"/>
+            </a:lvl5pPr>
+            <a:lvl6pPr>
+              <a:buNone/>
+              <a:defRPr sz="1600"/>
+            </a:lvl6pPr>
+            <a:lvl7pPr>
+              <a:buNone/>
+              <a:defRPr sz="1600"/>
+            </a:lvl7pPr>
+            <a:lvl8pPr>
+              <a:buNone/>
+              <a:defRPr sz="1600"/>
+            </a:lvl8pPr>
+            <a:lvl9pPr>
+              <a:buNone/>
+              <a:defRPr sz="1600"/>
+            </a:lvl9pPr>
+          </a:lstStyle>
+          <a:p xmlns:a="http://schemas.openxmlformats.org/drawingml/2006/main"/>
+        </p:txBody>
+      </p:sp>
+      <p:sp>
+        <p:nvSpPr>
+          <p:cNvPr id="5" name="Text Placeholder 4">
+            <a:extLst xmlns:a="http://schemas.openxmlformats.org/drawingml/2006/main">
+              <a:ext uri="{FF2B5EF4-FFF2-40B4-BE49-F238E27FC236}">
+                <a16:creationId xmlns:a16="http://schemas.microsoft.com/office/drawing/2014/main" id="{71AFC811-B68E-4B6E-8F89-312283644430}"/>
+              </a:ext>
+            </a:extLst>
+          </p:cNvPr>
+          <p:cNvSpPr>
+            <a:spLocks xmlns:a="http://schemas.openxmlformats.org/drawingml/2006/main" noGrp="1"/>
+          </p:cNvSpPr>
+          <p:nvPr>
+            <p:ph type="body" idx="3"/>
+          </p:nvPr>
+        </p:nvSpPr>
+        <p:spPr>
+          <a:xfrm xmlns:a="http://schemas.openxmlformats.org/drawingml/2006/main">
+            <a:off x="4645025" y="1535113"/>
+            <a:ext cx="4041775" cy="639762"/>
+          </a:xfrm>
+        </p:spPr>
+        <p:txBody>
+          <a:bodyPr xmlns:a="http://schemas.openxmlformats.org/drawingml/2006/main" anchor="b"/>
+          <a:lstStyle xmlns:a="http://schemas.openxmlformats.org/drawingml/2006/main">
+            <a:lvl1pPr marL="0" indent="0">
+              <a:buNone/>
+              <a:defRPr sz="2400" b="1"/>
+            </a:lvl1pPr>
+            <a:lvl2pPr marL="457200" indent="0">
+              <a:buNone/>
+              <a:defRPr sz="2000" b="1"/>
+            </a:lvl2pPr>
+            <a:lvl3pPr marL="914400" indent="0">
+              <a:buNone/>
+              <a:defRPr sz="1800" b="1"/>
+            </a:lvl3pPr>
+            <a:lvl4pPr marL="1371600" indent="0">
+              <a:buNone/>
+              <a:defRPr sz="1600" b="1"/>
+            </a:lvl4pPr>
+            <a:lvl5pPr marL="1828800" indent="0">
+              <a:buNone/>
+              <a:defRPr sz="1600" b="1"/>
+            </a:lvl5pPr>
+            <a:lvl6pPr marL="2286000" indent="0">
+              <a:buNone/>
+              <a:defRPr sz="1600" b="1"/>
+            </a:lvl6pPr>
+            <a:lvl7pPr marL="2743200" indent="0">
+              <a:buNone/>
+              <a:defRPr sz="1600" b="1"/>
+            </a:lvl7pPr>
+            <a:lvl8pPr marL="3200400" indent="0">
+              <a:buNone/>
+              <a:defRPr sz="1600" b="1"/>
+            </a:lvl8pPr>
+            <a:lvl9pPr marL="3657600" indent="0">
+              <a:buNone/>
+              <a:defRPr sz="1600" b="1"/>
+            </a:lvl9pPr>
+          </a:lstStyle>
+          <a:p xmlns:a="http://schemas.openxmlformats.org/drawingml/2006/main"/>
+        </p:txBody>
+      </p:sp>
+      <p:sp>
+        <p:nvSpPr>
+          <p:cNvPr id="6" name="Content Placeholder 5">
+            <a:extLst xmlns:a="http://schemas.openxmlformats.org/drawingml/2006/main">
+              <a:ext uri="{FF2B5EF4-FFF2-40B4-BE49-F238E27FC236}">
+                <a16:creationId xmlns:a16="http://schemas.microsoft.com/office/drawing/2014/main" id="{FB0A3A31-BA1C-47FF-8F82-AA827C13D89F}"/>
+              </a:ext>
+            </a:extLst>
+          </p:cNvPr>
+          <p:cNvSpPr>
+            <a:spLocks xmlns:a="http://schemas.openxmlformats.org/drawingml/2006/main" noGrp="1"/>
+          </p:cNvSpPr>
+          <p:nvPr>
+            <p:ph idx="4"/>
+          </p:nvPr>
+        </p:nvSpPr>
+        <p:spPr>
+          <a:xfrm xmlns:a="http://schemas.openxmlformats.org/drawingml/2006/main">
+            <a:off x="4645025" y="2174875"/>
+            <a:ext cx="4041775" cy="3951288"/>
+          </a:xfrm>
+        </p:spPr>
+        <p:txBody>
+          <a:bodyPr xmlns:a="http://schemas.openxmlformats.org/drawingml/2006/main"/>
+          <a:lstStyle xmlns:a="http://schemas.openxmlformats.org/drawingml/2006/main">
+            <a:lvl1pPr>
+              <a:buNone/>
+              <a:defRPr sz="2400"/>
+            </a:lvl1pPr>
+            <a:lvl2pPr>
+              <a:buNone/>
+              <a:defRPr sz="2000"/>
+            </a:lvl2pPr>
+            <a:lvl3pPr>
+              <a:buNone/>
+              <a:defRPr sz="1800"/>
+            </a:lvl3pPr>
+            <a:lvl4pPr>
+              <a:buNone/>
+              <a:defRPr sz="1600"/>
+            </a:lvl4pPr>
+            <a:lvl5pPr>
+              <a:buNone/>
+              <a:defRPr sz="1600"/>
+            </a:lvl5pPr>
+            <a:lvl6pPr>
+              <a:buNone/>
+              <a:defRPr sz="1600"/>
+            </a:lvl6pPr>
+            <a:lvl7pPr>
+              <a:buNone/>
+              <a:defRPr sz="1600"/>
+            </a:lvl7pPr>
+            <a:lvl8pPr>
+              <a:buNone/>
+              <a:defRPr sz="1600"/>
+            </a:lvl8pPr>
+            <a:lvl9pPr>
+              <a:buNone/>
+              <a:defRPr sz="1600"/>
+            </a:lvl9pPr>
+          </a:lstStyle>
+          <a:p xmlns:a="http://schemas.openxmlformats.org/drawingml/2006/main"/>
+        </p:txBody>
+      </p:sp>
+      <p:sp>
+        <p:nvSpPr>
+          <p:cNvPr id="7" name="Date Placeholder 6">
+            <a:extLst xmlns:a="http://schemas.openxmlformats.org/drawingml/2006/main">
+              <a:ext uri="{FF2B5EF4-FFF2-40B4-BE49-F238E27FC236}">
+                <a16:creationId xmlns:a16="http://schemas.microsoft.com/office/drawing/2014/main" id="{0A9C6233-4E15-40A7-9299-8F5FB479846D}"/>
+              </a:ext>
+            </a:extLst>
+          </p:cNvPr>
+          <p:cNvSpPr>
+            <a:spLocks xmlns:a="http://schemas.openxmlformats.org/drawingml/2006/main" noGrp="1"/>
+          </p:cNvSpPr>
+          <p:nvPr>
+            <p:ph type="dt" idx="10"/>
+          </p:nvPr>
+        </p:nvSpPr>
+        <p:spPr/>
+        <p:txBody>
+          <a:bodyPr xmlns:a="http://schemas.openxmlformats.org/drawingml/2006/main"/>
+          <a:lstStyle xmlns:a="http://schemas.openxmlformats.org/drawingml/2006/main"/>
+          <a:p xmlns:a="http://schemas.openxmlformats.org/drawingml/2006/main"/>
+        </p:txBody>
+      </p:sp>
+      <p:sp>
+        <p:nvSpPr>
+          <p:cNvPr id="8" name="Footer Placeholder 7">
+            <a:extLst xmlns:a="http://schemas.openxmlformats.org/drawingml/2006/main">
+              <a:ext uri="{FF2B5EF4-FFF2-40B4-BE49-F238E27FC236}">
+                <a16:creationId xmlns:a16="http://schemas.microsoft.com/office/drawing/2014/main" id="{118102F0-0C75-4279-9A49-7448F5FF8226}"/>
+              </a:ext>
+            </a:extLst>
+          </p:cNvPr>
+          <p:cNvSpPr>
+            <a:spLocks xmlns:a="http://schemas.openxmlformats.org/drawingml/2006/main" noGrp="1"/>
+          </p:cNvSpPr>
+          <p:nvPr>
+            <p:ph type="ftr" idx="11"/>
+          </p:nvPr>
+        </p:nvSpPr>
+        <p:spPr/>
+        <p:txBody>
+          <a:bodyPr xmlns:a="http://schemas.openxmlformats.org/drawingml/2006/main"/>
+          <a:lstStyle xmlns:a="http://schemas.openxmlformats.org/drawingml/2006/main"/>
+          <a:p xmlns:a="http://schemas.openxmlformats.org/drawingml/2006/main"/>
+        </p:txBody>
+      </p:sp>
+      <p:sp>
+        <p:nvSpPr>
+          <p:cNvPr id="9" name="Slide Number Placeholder 8">
+            <a:extLst xmlns:a="http://schemas.openxmlformats.org/drawingml/2006/main">
+              <a:ext uri="{FF2B5EF4-FFF2-40B4-BE49-F238E27FC236}">
+                <a16:creationId xmlns:a16="http://schemas.microsoft.com/office/drawing/2014/main" id="{EDFC4468-74B7-4EE4-818C-81A502973670}"/>
+              </a:ext>
+            </a:extLst>
+          </p:cNvPr>
+          <p:cNvSpPr>
+            <a:spLocks xmlns:a="http://schemas.openxmlformats.org/drawingml/2006/main" noGrp="1"/>
+          </p:cNvSpPr>
+          <p:nvPr>
+            <p:ph type="sldNum" idx="12"/>
+          </p:nvPr>
+        </p:nvSpPr>
+        <p:spPr/>
+        <p:txBody>
+          <a:bodyPr xmlns:a="http://schemas.openxmlformats.org/drawingml/2006/main"/>
+          <a:lstStyle xmlns:a="http://schemas.openxmlformats.org/drawingml/2006/main"/>
+          <a:p xmlns:a="http://schemas.openxmlformats.org/drawingml/2006/main"/>
+        </p:txBody>
+      </p:sp>
+    </p:spTree>
+  </p:cSld>
+</p:sldLayout>
+</file>
+
+<file path=ppt/slideLayouts/slideLayout6.xml><?xml version="1.0" encoding="utf-8"?>
+<p:sldLayout xmlns:p="http://schemas.openxmlformats.org/presentationml/2006/main" type="titleOnly">
+  <p:cSld name="Title Only">
+    <p:spTree>
+      <p:nvGrpSpPr>
+        <p:cNvPr id="1" name=""/>
+        <p:cNvGrpSpPr/>
+        <p:nvPr/>
+      </p:nvGrpSpPr>
+      <p:grpSpPr>
+        <a:xfrm xmlns:a="http://schemas.openxmlformats.org/drawingml/2006/main"/>
+      </p:grpSpPr>
+      <p:sp>
+        <p:nvSpPr>
+          <p:cNvPr id="2" name="Title 1">
+            <a:extLst xmlns:a="http://schemas.openxmlformats.org/drawingml/2006/main">
+              <a:ext uri="{FF2B5EF4-FFF2-40B4-BE49-F238E27FC236}">
+                <a16:creationId xmlns:a16="http://schemas.microsoft.com/office/drawing/2014/main" id="{3E56E293-359C-437C-83B3-44D3D79876AE}"/>
+              </a:ext>
+            </a:extLst>
+          </p:cNvPr>
+          <p:cNvSpPr>
+            <a:spLocks xmlns:a="http://schemas.openxmlformats.org/drawingml/2006/main" noGrp="1"/>
+          </p:cNvSpPr>
+          <p:nvPr>
+            <p:ph type="title" idx="0"/>
+          </p:nvPr>
+        </p:nvSpPr>
+        <p:spPr/>
+        <p:txBody>
+          <a:bodyPr xmlns:a="http://schemas.openxmlformats.org/drawingml/2006/main"/>
+          <a:lstStyle xmlns:a="http://schemas.openxmlformats.org/drawingml/2006/main"/>
+          <a:p xmlns:a="http://schemas.openxmlformats.org/drawingml/2006/main"/>
+        </p:txBody>
+      </p:sp>
+      <p:sp>
+        <p:nvSpPr>
+          <p:cNvPr id="3" name="Date Placeholder 2">
+            <a:extLst xmlns:a="http://schemas.openxmlformats.org/drawingml/2006/main">
+              <a:ext uri="{FF2B5EF4-FFF2-40B4-BE49-F238E27FC236}">
+                <a16:creationId xmlns:a16="http://schemas.microsoft.com/office/drawing/2014/main" id="{E4B55D17-7BFB-4FF8-9035-B6FE85E03AB2}"/>
+              </a:ext>
+            </a:extLst>
+          </p:cNvPr>
+          <p:cNvSpPr>
+            <a:spLocks xmlns:a="http://schemas.openxmlformats.org/drawingml/2006/main" noGrp="1"/>
+          </p:cNvSpPr>
+          <p:nvPr>
+            <p:ph type="dt" idx="10"/>
+          </p:nvPr>
+        </p:nvSpPr>
+        <p:spPr/>
+        <p:txBody>
+          <a:bodyPr xmlns:a="http://schemas.openxmlformats.org/drawingml/2006/main"/>
+          <a:lstStyle xmlns:a="http://schemas.openxmlformats.org/drawingml/2006/main"/>
+          <a:p xmlns:a="http://schemas.openxmlformats.org/drawingml/2006/main"/>
+        </p:txBody>
+      </p:sp>
+      <p:sp>
+        <p:nvSpPr>
+          <p:cNvPr id="4" name="Footer Placeholder 3">
+            <a:extLst xmlns:a="http://schemas.openxmlformats.org/drawingml/2006/main">
+              <a:ext uri="{FF2B5EF4-FFF2-40B4-BE49-F238E27FC236}">
+                <a16:creationId xmlns:a16="http://schemas.microsoft.com/office/drawing/2014/main" id="{C10CF716-FD1C-42A4-B21D-376B600FFFF6}"/>
+              </a:ext>
+            </a:extLst>
+          </p:cNvPr>
+          <p:cNvSpPr>
+            <a:spLocks xmlns:a="http://schemas.openxmlformats.org/drawingml/2006/main" noGrp="1"/>
+          </p:cNvSpPr>
+          <p:nvPr>
+            <p:ph type="ftr" idx="11"/>
+          </p:nvPr>
+        </p:nvSpPr>
+        <p:spPr/>
+        <p:txBody>
+          <a:bodyPr xmlns:a="http://schemas.openxmlformats.org/drawingml/2006/main"/>
+          <a:lstStyle xmlns:a="http://schemas.openxmlformats.org/drawingml/2006/main"/>
+          <a:p xmlns:a="http://schemas.openxmlformats.org/drawingml/2006/main"/>
+        </p:txBody>
+      </p:sp>
+      <p:sp>
+        <p:nvSpPr>
+          <p:cNvPr id="5" name="Slide Number Placeholder 4">
+            <a:extLst xmlns:a="http://schemas.openxmlformats.org/drawingml/2006/main">
+              <a:ext uri="{FF2B5EF4-FFF2-40B4-BE49-F238E27FC236}">
+                <a16:creationId xmlns:a16="http://schemas.microsoft.com/office/drawing/2014/main" id="{6D2CAE4F-55CC-4AE5-8048-ED5C4411AC81}"/>
+              </a:ext>
+            </a:extLst>
+          </p:cNvPr>
+          <p:cNvSpPr>
+            <a:spLocks xmlns:a="http://schemas.openxmlformats.org/drawingml/2006/main" noGrp="1"/>
+          </p:cNvSpPr>
+          <p:nvPr>
+            <p:ph type="sldNum" idx="12"/>
+          </p:nvPr>
+        </p:nvSpPr>
+        <p:spPr/>
+        <p:txBody>
+          <a:bodyPr xmlns:a="http://schemas.openxmlformats.org/drawingml/2006/main"/>
+          <a:lstStyle xmlns:a="http://schemas.openxmlformats.org/drawingml/2006/main"/>
+          <a:p xmlns:a="http://schemas.openxmlformats.org/drawingml/2006/main"/>
+        </p:txBody>
+      </p:sp>
+    </p:spTree>
+  </p:cSld>
+</p:sldLayout>
+</file>
+
+<file path=ppt/slideLayouts/slideLayout7.xml><?xml version="1.0" encoding="utf-8"?>
+<p:sldLayout xmlns:p="http://schemas.openxmlformats.org/presentationml/2006/main" type="blank">
+  <p:cSld name="Blank">
+    <p:spTree>
+      <p:nvGrpSpPr>
+        <p:cNvPr id="1" name=""/>
+        <p:cNvGrpSpPr/>
+        <p:nvPr/>
+      </p:nvGrpSpPr>
+      <p:grpSpPr>
+        <a:xfrm xmlns:a="http://schemas.openxmlformats.org/drawingml/2006/main"/>
+      </p:grpSpPr>
+      <p:sp>
+        <p:nvSpPr>
+          <p:cNvPr id="2" name="Date Placeholder 1">
+            <a:extLst xmlns:a="http://schemas.openxmlformats.org/drawingml/2006/main">
+              <a:ext uri="{FF2B5EF4-FFF2-40B4-BE49-F238E27FC236}">
+                <a16:creationId xmlns:a16="http://schemas.microsoft.com/office/drawing/2014/main" id="{97AC856E-076B-4B24-9DBB-31B2D74ECC4F}"/>
+              </a:ext>
+            </a:extLst>
+          </p:cNvPr>
+          <p:cNvSpPr>
+            <a:spLocks xmlns:a="http://schemas.openxmlformats.org/drawingml/2006/main" noGrp="1"/>
+          </p:cNvSpPr>
+          <p:nvPr>
+            <p:ph type="dt" idx="10"/>
+          </p:nvPr>
+        </p:nvSpPr>
+        <p:spPr/>
+        <p:txBody>
+          <a:bodyPr xmlns:a="http://schemas.openxmlformats.org/drawingml/2006/main"/>
+          <a:lstStyle xmlns:a="http://schemas.openxmlformats.org/drawingml/2006/main"/>
+          <a:p xmlns:a="http://schemas.openxmlformats.org/drawingml/2006/main"/>
+        </p:txBody>
+      </p:sp>
+      <p:sp>
+        <p:nvSpPr>
+          <p:cNvPr id="3" name="Footer Placeholder 2">
+            <a:extLst xmlns:a="http://schemas.openxmlformats.org/drawingml/2006/main">
+              <a:ext uri="{FF2B5EF4-FFF2-40B4-BE49-F238E27FC236}">
+                <a16:creationId xmlns:a16="http://schemas.microsoft.com/office/drawing/2014/main" id="{BF760085-849F-4718-AFC0-16B6BD02F899}"/>
+              </a:ext>
+            </a:extLst>
+          </p:cNvPr>
+          <p:cNvSpPr>
+            <a:spLocks xmlns:a="http://schemas.openxmlformats.org/drawingml/2006/main" noGrp="1"/>
+          </p:cNvSpPr>
+          <p:nvPr>
+            <p:ph type="ftr" idx="11"/>
+          </p:nvPr>
+        </p:nvSpPr>
+        <p:spPr/>
+        <p:txBody>
+          <a:bodyPr xmlns:a="http://schemas.openxmlformats.org/drawingml/2006/main"/>
+          <a:lstStyle xmlns:a="http://schemas.openxmlformats.org/drawingml/2006/main"/>
+          <a:p xmlns:a="http://schemas.openxmlformats.org/drawingml/2006/main"/>
+        </p:txBody>
+      </p:sp>
+      <p:sp>
+        <p:nvSpPr>
+          <p:cNvPr id="4" name="Slide Number Placeholder 3">
+            <a:extLst xmlns:a="http://schemas.openxmlformats.org/drawingml/2006/main">
+              <a:ext uri="{FF2B5EF4-FFF2-40B4-BE49-F238E27FC236}">
+                <a16:creationId xmlns:a16="http://schemas.microsoft.com/office/drawing/2014/main" id="{E603517E-B94A-4EF2-B13C-F126426BA8B3}"/>
+              </a:ext>
+            </a:extLst>
+          </p:cNvPr>
+          <p:cNvSpPr>
+            <a:spLocks xmlns:a="http://schemas.openxmlformats.org/drawingml/2006/main" noGrp="1"/>
+          </p:cNvSpPr>
+          <p:nvPr>
+            <p:ph type="sldNum" idx="12"/>
+          </p:nvPr>
+        </p:nvSpPr>
+        <p:spPr/>
+        <p:txBody>
+          <a:bodyPr xmlns:a="http://schemas.openxmlformats.org/drawingml/2006/main"/>
+          <a:lstStyle xmlns:a="http://schemas.openxmlformats.org/drawingml/2006/main"/>
+          <a:p xmlns:a="http://schemas.openxmlformats.org/drawingml/2006/main"/>
+        </p:txBody>
+      </p:sp>
+    </p:spTree>
+  </p:cSld>
+</p:sldLayout>
+</file>
+
+<file path=ppt/slideLayouts/slideLayout8.xml><?xml version="1.0" encoding="utf-8"?>
+<p:sldLayout xmlns:p="http://schemas.openxmlformats.org/presentationml/2006/main" type="objTx">
+  <p:cSld name="Content with Caption">
+    <p:spTree>
+      <p:nvGrpSpPr>
+        <p:cNvPr id="1" name=""/>
+        <p:cNvGrpSpPr/>
+        <p:nvPr/>
+      </p:nvGrpSpPr>
+      <p:grpSpPr>
+        <a:xfrm xmlns:a="http://schemas.openxmlformats.org/drawingml/2006/main"/>
+      </p:grpSpPr>
+      <p:sp>
+        <p:nvSpPr>
+          <p:cNvPr id="2" name="Title 1">
+            <a:extLst xmlns:a="http://schemas.openxmlformats.org/drawingml/2006/main">
+              <a:ext uri="{FF2B5EF4-FFF2-40B4-BE49-F238E27FC236}">
+                <a16:creationId xmlns:a16="http://schemas.microsoft.com/office/drawing/2014/main" id="{D5CF1C79-5FB6-4089-B900-5E94E7D25ACA}"/>
+              </a:ext>
+            </a:extLst>
+          </p:cNvPr>
+          <p:cNvSpPr>
+            <a:spLocks xmlns:a="http://schemas.openxmlformats.org/drawingml/2006/main" noGrp="1"/>
+          </p:cNvSpPr>
+          <p:nvPr>
+            <p:ph type="title" idx="0"/>
+          </p:nvPr>
+        </p:nvSpPr>
+        <p:spPr>
+          <a:xfrm xmlns:a="http://schemas.openxmlformats.org/drawingml/2006/main">
+            <a:off x="457200" y="273050"/>
+            <a:ext cx="3008313" cy="1162050"/>
+          </a:xfrm>
+        </p:spPr>
+        <p:txBody>
+          <a:bodyPr xmlns:a="http://schemas.openxmlformats.org/drawingml/2006/main" anchor="b"/>
+          <a:lstStyle xmlns:a="http://schemas.openxmlformats.org/drawingml/2006/main">
+            <a:lvl1pPr algn="l">
+              <a:buNone/>
+              <a:defRPr sz="2000" b="1"/>
+            </a:lvl1pPr>
+          </a:lstStyle>
+          <a:p xmlns:a="http://schemas.openxmlformats.org/drawingml/2006/main"/>
+        </p:txBody>
+      </p:sp>
+      <p:sp>
+        <p:nvSpPr>
+          <p:cNvPr id="3" name="Content Placeholder 2">
+            <a:extLst xmlns:a="http://schemas.openxmlformats.org/drawingml/2006/main">
+              <a:ext uri="{FF2B5EF4-FFF2-40B4-BE49-F238E27FC236}">
+                <a16:creationId xmlns:a16="http://schemas.microsoft.com/office/drawing/2014/main" id="{3823D19A-ADA4-4AB3-8BF4-B5D950478ED9}"/>
+              </a:ext>
+            </a:extLst>
+          </p:cNvPr>
+          <p:cNvSpPr>
+            <a:spLocks xmlns:a="http://schemas.openxmlformats.org/drawingml/2006/main" noGrp="1"/>
+          </p:cNvSpPr>
+          <p:nvPr>
+            <p:ph idx="1"/>
+          </p:nvPr>
+        </p:nvSpPr>
+        <p:spPr>
+          <a:xfrm xmlns:a="http://schemas.openxmlformats.org/drawingml/2006/main">
+            <a:off x="3575050" y="273050"/>
+            <a:ext cx="5111750" cy="5853113"/>
+          </a:xfrm>
+        </p:spPr>
+        <p:txBody>
+          <a:bodyPr xmlns:a="http://schemas.openxmlformats.org/drawingml/2006/main"/>
+          <a:lstStyle xmlns:a="http://schemas.openxmlformats.org/drawingml/2006/main">
+            <a:lvl1pPr>
+              <a:buNone/>
+              <a:defRPr sz="3200"/>
+            </a:lvl1pPr>
+            <a:lvl2pPr>
+              <a:buNone/>
+              <a:defRPr sz="2800"/>
+            </a:lvl2pPr>
+            <a:lvl3pPr>
+              <a:buNone/>
+              <a:defRPr sz="2400"/>
+            </a:lvl3pPr>
+            <a:lvl4pPr>
+              <a:buNone/>
+              <a:defRPr sz="2000"/>
+            </a:lvl4pPr>
+            <a:lvl5pPr>
+              <a:buNone/>
+              <a:defRPr sz="2000"/>
+            </a:lvl5pPr>
+            <a:lvl6pPr>
+              <a:buNone/>
+              <a:defRPr sz="2000"/>
+            </a:lvl6pPr>
+            <a:lvl7pPr>
+              <a:buNone/>
+              <a:defRPr sz="2000"/>
+            </a:lvl7pPr>
+            <a:lvl8pPr>
+              <a:buNone/>
+              <a:defRPr sz="2000"/>
+            </a:lvl8pPr>
+            <a:lvl9pPr>
+              <a:buNone/>
+              <a:defRPr sz="2000"/>
+            </a:lvl9pPr>
+          </a:lstStyle>
+          <a:p xmlns:a="http://schemas.openxmlformats.org/drawingml/2006/main"/>
+        </p:txBody>
+      </p:sp>
+      <p:sp>
+        <p:nvSpPr>
+          <p:cNvPr id="4" name="Text Placeholder 3">
+            <a:extLst xmlns:a="http://schemas.openxmlformats.org/drawingml/2006/main">
+              <a:ext uri="{FF2B5EF4-FFF2-40B4-BE49-F238E27FC236}">
+                <a16:creationId xmlns:a16="http://schemas.microsoft.com/office/drawing/2014/main" id="{0F2ED1E5-F22B-4707-B361-A4C4FD15DDBE}"/>
+              </a:ext>
+            </a:extLst>
+          </p:cNvPr>
+          <p:cNvSpPr>
+            <a:spLocks xmlns:a="http://schemas.openxmlformats.org/drawingml/2006/main" noGrp="1"/>
+          </p:cNvSpPr>
+          <p:nvPr>
+            <p:ph type="body" idx="2"/>
+          </p:nvPr>
+        </p:nvSpPr>
+        <p:spPr>
+          <a:xfrm xmlns:a="http://schemas.openxmlformats.org/drawingml/2006/main">
+            <a:off x="457200" y="1435100"/>
+            <a:ext cx="3008313" cy="4691063"/>
+          </a:xfrm>
+        </p:spPr>
+        <p:txBody>
+          <a:bodyPr xmlns:a="http://schemas.openxmlformats.org/drawingml/2006/main"/>
+          <a:lstStyle xmlns:a="http://schemas.openxmlformats.org/drawingml/2006/main">
+            <a:lvl1pPr marL="0" indent="0">
+              <a:buNone/>
+              <a:defRPr sz="1400"/>
+            </a:lvl1pPr>
+            <a:lvl2pPr marL="457200" indent="0">
+              <a:buNone/>
+              <a:defRPr sz="1200"/>
+            </a:lvl2pPr>
+            <a:lvl3pPr marL="914400" indent="0">
+              <a:buNone/>
+              <a:defRPr sz="1000"/>
+            </a:lvl3pPr>
+            <a:lvl4pPr marL="1371600" indent="0">
+              <a:buNone/>
+              <a:defRPr sz="900"/>
+            </a:lvl4pPr>
+            <a:lvl5pPr marL="1828800" indent="0">
+              <a:buNone/>
+              <a:defRPr sz="900"/>
+            </a:lvl5pPr>
+            <a:lvl6pPr marL="2286000" indent="0">
+              <a:buNone/>
+              <a:defRPr sz="900"/>
+            </a:lvl6pPr>
+            <a:lvl7pPr marL="2743200" indent="0">
+              <a:buNone/>
+              <a:defRPr sz="900"/>
+            </a:lvl7pPr>
+            <a:lvl8pPr marL="3200400" indent="0">
+              <a:buNone/>
+              <a:defRPr sz="900"/>
+            </a:lvl8pPr>
+            <a:lvl9pPr marL="3657600" indent="0">
+              <a:buNone/>
+              <a:defRPr sz="900"/>
+            </a:lvl9pPr>
+          </a:lstStyle>
+          <a:p xmlns:a="http://schemas.openxmlformats.org/drawingml/2006/main"/>
+        </p:txBody>
+      </p:sp>
+      <p:sp>
+        <p:nvSpPr>
+          <p:cNvPr id="5" name="Date Placeholder 4">
+            <a:extLst xmlns:a="http://schemas.openxmlformats.org/drawingml/2006/main">
+              <a:ext uri="{FF2B5EF4-FFF2-40B4-BE49-F238E27FC236}">
+                <a16:creationId xmlns:a16="http://schemas.microsoft.com/office/drawing/2014/main" id="{819FC581-AD36-4FC7-8773-487F97205B81}"/>
+              </a:ext>
+            </a:extLst>
+          </p:cNvPr>
+          <p:cNvSpPr>
+            <a:spLocks xmlns:a="http://schemas.openxmlformats.org/drawingml/2006/main" noGrp="1"/>
+          </p:cNvSpPr>
+          <p:nvPr>
+            <p:ph type="dt" idx="10"/>
+          </p:nvPr>
+        </p:nvSpPr>
+        <p:spPr/>
+        <p:txBody>
+          <a:bodyPr xmlns:a="http://schemas.openxmlformats.org/drawingml/2006/main"/>
+          <a:lstStyle xmlns:a="http://schemas.openxmlformats.org/drawingml/2006/main"/>
+          <a:p xmlns:a="http://schemas.openxmlformats.org/drawingml/2006/main"/>
+        </p:txBody>
+      </p:sp>
+      <p:sp>
+        <p:nvSpPr>
+          <p:cNvPr id="6" name="Footer Placeholder 5">
+            <a:extLst xmlns:a="http://schemas.openxmlformats.org/drawingml/2006/main">
+              <a:ext uri="{FF2B5EF4-FFF2-40B4-BE49-F238E27FC236}">
+                <a16:creationId xmlns:a16="http://schemas.microsoft.com/office/drawing/2014/main" id="{027CFAD6-1823-4332-9071-39257D8A14C1}"/>
+              </a:ext>
+            </a:extLst>
+          </p:cNvPr>
+          <p:cNvSpPr>
+            <a:spLocks xmlns:a="http://schemas.openxmlformats.org/drawingml/2006/main" noGrp="1"/>
+          </p:cNvSpPr>
+          <p:nvPr>
+            <p:ph type="ftr" idx="11"/>
+          </p:nvPr>
+        </p:nvSpPr>
+        <p:spPr/>
+        <p:txBody>
+          <a:bodyPr xmlns:a="http://schemas.openxmlformats.org/drawingml/2006/main"/>
+          <a:lstStyle xmlns:a="http://schemas.openxmlformats.org/drawingml/2006/main"/>
+          <a:p xmlns:a="http://schemas.openxmlformats.org/drawingml/2006/main"/>
+        </p:txBody>
+      </p:sp>
+      <p:sp>
+        <p:nvSpPr>
+          <p:cNvPr id="7" name="Slide Number Placeholder 6">
+            <a:extLst xmlns:a="http://schemas.openxmlformats.org/drawingml/2006/main">
+              <a:ext uri="{FF2B5EF4-FFF2-40B4-BE49-F238E27FC236}">
+                <a16:creationId xmlns:a16="http://schemas.microsoft.com/office/drawing/2014/main" id="{5AF4BD73-D22C-4C72-9550-74A7B0D396E0}"/>
+              </a:ext>
+            </a:extLst>
+          </p:cNvPr>
+          <p:cNvSpPr>
+            <a:spLocks xmlns:a="http://schemas.openxmlformats.org/drawingml/2006/main" noGrp="1"/>
+          </p:cNvSpPr>
+          <p:nvPr>
+            <p:ph type="sldNum" idx="12"/>
+          </p:nvPr>
+        </p:nvSpPr>
+        <p:spPr/>
+        <p:txBody>
+          <a:bodyPr xmlns:a="http://schemas.openxmlformats.org/drawingml/2006/main"/>
+          <a:lstStyle xmlns:a="http://schemas.openxmlformats.org/drawingml/2006/main"/>
+          <a:p xmlns:a="http://schemas.openxmlformats.org/drawingml/2006/main"/>
+        </p:txBody>
+      </p:sp>
+    </p:spTree>
+  </p:cSld>
+</p:sldLayout>
+</file>
+
+<file path=ppt/slideLayouts/slideLayout9.xml><?xml version="1.0" encoding="utf-8"?>
 <p:sldLayout xmlns:p="http://schemas.openxmlformats.org/presentationml/2006/main" type="picTx">
   <p:cSld name="Picture with Caption">
     <p:spTree>
@@ -1978,7 +4330,9 @@
               </a:ext>
             </a:extLst>
           </p:cNvPr>
-          <p:cNvSpPr/>
+          <p:cNvSpPr>
+            <a:spLocks xmlns:a="http://schemas.openxmlformats.org/drawingml/2006/main" noGrp="1"/>
+          </p:cNvSpPr>
           <p:nvPr>
             <p:ph type="title" idx="0"/>
           </p:nvPr>
@@ -2009,7 +4363,9 @@
               </a:ext>
             </a:extLst>
           </p:cNvPr>
-          <p:cNvSpPr/>
+          <p:cNvSpPr>
+            <a:spLocks xmlns:a="http://schemas.openxmlformats.org/drawingml/2006/main" noGrp="1"/>
+          </p:cNvSpPr>
           <p:nvPr>
             <p:ph type="pic" idx="1"/>
           </p:nvPr>
@@ -2072,7 +4428,9 @@
               </a:ext>
             </a:extLst>
           </p:cNvPr>
-          <p:cNvSpPr/>
+          <p:cNvSpPr>
+            <a:spLocks xmlns:a="http://schemas.openxmlformats.org/drawingml/2006/main" noGrp="1"/>
+          </p:cNvSpPr>
           <p:nvPr>
             <p:ph type="body" idx="2"/>
           </p:nvPr>
@@ -2135,7 +4493,9 @@
               </a:ext>
             </a:extLst>
           </p:cNvPr>
-          <p:cNvSpPr/>
+          <p:cNvSpPr>
+            <a:spLocks xmlns:a="http://schemas.openxmlformats.org/drawingml/2006/main" noGrp="1"/>
+          </p:cNvSpPr>
           <p:nvPr>
             <p:ph type="dt" idx="10"/>
           </p:nvPr>
@@ -2156,7 +4516,9 @@
               </a:ext>
             </a:extLst>
           </p:cNvPr>
-          <p:cNvSpPr/>
+          <p:cNvSpPr>
+            <a:spLocks xmlns:a="http://schemas.openxmlformats.org/drawingml/2006/main" noGrp="1"/>
+          </p:cNvSpPr>
           <p:nvPr>
             <p:ph type="ftr" idx="11"/>
           </p:nvPr>
@@ -2177,1837 +4539,9 @@
               </a:ext>
             </a:extLst>
           </p:cNvPr>
-          <p:cNvSpPr/>
-          <p:nvPr>
-            <p:ph type="sldNum" idx="12"/>
-          </p:nvPr>
-        </p:nvSpPr>
-        <p:spPr/>
-        <p:txBody>
-          <a:bodyPr xmlns:a="http://schemas.openxmlformats.org/drawingml/2006/main"/>
-          <a:lstStyle xmlns:a="http://schemas.openxmlformats.org/drawingml/2006/main"/>
-          <a:p xmlns:a="http://schemas.openxmlformats.org/drawingml/2006/main"/>
-        </p:txBody>
-      </p:sp>
-    </p:spTree>
-  </p:cSld>
-</p:sldLayout>
-</file>
-
-<file path=ppt/slideLayouts/slideLayout11.xml><?xml version="1.0" encoding="utf-8"?>
-<p:sldLayout xmlns:p="http://schemas.openxmlformats.org/presentationml/2006/main" type="vertTx">
-  <p:cSld name="Title and Vertical Text">
-    <p:spTree>
-      <p:nvGrpSpPr>
-        <p:cNvPr id="1" name=""/>
-        <p:cNvGrpSpPr/>
-        <p:nvPr/>
-      </p:nvGrpSpPr>
-      <p:grpSpPr>
-        <a:xfrm xmlns:a="http://schemas.openxmlformats.org/drawingml/2006/main"/>
-      </p:grpSpPr>
-      <p:sp>
-        <p:nvSpPr>
-          <p:cNvPr id="2" name="Title 1">
-            <a:extLst xmlns:a="http://schemas.openxmlformats.org/drawingml/2006/main">
-              <a:ext uri="{FF2B5EF4-FFF2-40B4-BE49-F238E27FC236}">
-                <a16:creationId xmlns:a16="http://schemas.microsoft.com/office/drawing/2014/main" id="{8610E5D0-3F86-456B-8311-51DF23CA0099}"/>
-              </a:ext>
-            </a:extLst>
-          </p:cNvPr>
-          <p:cNvSpPr/>
-          <p:nvPr>
-            <p:ph type="title" idx="0"/>
-          </p:nvPr>
-        </p:nvSpPr>
-        <p:spPr/>
-        <p:txBody>
-          <a:bodyPr xmlns:a="http://schemas.openxmlformats.org/drawingml/2006/main"/>
-          <a:lstStyle xmlns:a="http://schemas.openxmlformats.org/drawingml/2006/main"/>
-          <a:p xmlns:a="http://schemas.openxmlformats.org/drawingml/2006/main"/>
-        </p:txBody>
-      </p:sp>
-      <p:sp>
-        <p:nvSpPr>
-          <p:cNvPr id="3" name="Vertical Text Placeholder 2">
-            <a:extLst xmlns:a="http://schemas.openxmlformats.org/drawingml/2006/main">
-              <a:ext uri="{FF2B5EF4-FFF2-40B4-BE49-F238E27FC236}">
-                <a16:creationId xmlns:a16="http://schemas.microsoft.com/office/drawing/2014/main" id="{DE118C4B-B266-49C5-92CE-BA0A2B12DBDA}"/>
-              </a:ext>
-            </a:extLst>
-          </p:cNvPr>
-          <p:cNvSpPr/>
-          <p:nvPr>
-            <p:ph type="body" idx="1"/>
-          </p:nvPr>
-        </p:nvSpPr>
-        <p:spPr/>
-        <p:txBody>
-          <a:bodyPr xmlns:a="http://schemas.openxmlformats.org/drawingml/2006/main" vert="eaVert"/>
-          <a:lstStyle xmlns:a="http://schemas.openxmlformats.org/drawingml/2006/main"/>
-          <a:p xmlns:a="http://schemas.openxmlformats.org/drawingml/2006/main"/>
-        </p:txBody>
-      </p:sp>
-      <p:sp>
-        <p:nvSpPr>
-          <p:cNvPr id="4" name="Date Placeholder 3">
-            <a:extLst xmlns:a="http://schemas.openxmlformats.org/drawingml/2006/main">
-              <a:ext uri="{FF2B5EF4-FFF2-40B4-BE49-F238E27FC236}">
-                <a16:creationId xmlns:a16="http://schemas.microsoft.com/office/drawing/2014/main" id="{7F2F644B-5D26-49C1-B1EF-5BFC10E3EE1C}"/>
-              </a:ext>
-            </a:extLst>
-          </p:cNvPr>
-          <p:cNvSpPr/>
-          <p:nvPr>
-            <p:ph type="dt" idx="10"/>
-          </p:nvPr>
-        </p:nvSpPr>
-        <p:spPr/>
-        <p:txBody>
-          <a:bodyPr xmlns:a="http://schemas.openxmlformats.org/drawingml/2006/main"/>
-          <a:lstStyle xmlns:a="http://schemas.openxmlformats.org/drawingml/2006/main"/>
-          <a:p xmlns:a="http://schemas.openxmlformats.org/drawingml/2006/main"/>
-        </p:txBody>
-      </p:sp>
-      <p:sp>
-        <p:nvSpPr>
-          <p:cNvPr id="5" name="Footer Placeholder 4">
-            <a:extLst xmlns:a="http://schemas.openxmlformats.org/drawingml/2006/main">
-              <a:ext uri="{FF2B5EF4-FFF2-40B4-BE49-F238E27FC236}">
-                <a16:creationId xmlns:a16="http://schemas.microsoft.com/office/drawing/2014/main" id="{D80B6C13-05E1-4A53-8E38-AC76E23B5641}"/>
-              </a:ext>
-            </a:extLst>
-          </p:cNvPr>
-          <p:cNvSpPr/>
-          <p:nvPr>
-            <p:ph type="ftr" idx="11"/>
-          </p:nvPr>
-        </p:nvSpPr>
-        <p:spPr/>
-        <p:txBody>
-          <a:bodyPr xmlns:a="http://schemas.openxmlformats.org/drawingml/2006/main"/>
-          <a:lstStyle xmlns:a="http://schemas.openxmlformats.org/drawingml/2006/main"/>
-          <a:p xmlns:a="http://schemas.openxmlformats.org/drawingml/2006/main"/>
-        </p:txBody>
-      </p:sp>
-      <p:sp>
-        <p:nvSpPr>
-          <p:cNvPr id="6" name="Slide Number Placeholder 5">
-            <a:extLst xmlns:a="http://schemas.openxmlformats.org/drawingml/2006/main">
-              <a:ext uri="{FF2B5EF4-FFF2-40B4-BE49-F238E27FC236}">
-                <a16:creationId xmlns:a16="http://schemas.microsoft.com/office/drawing/2014/main" id="{1FBFACAA-0A94-44D6-B1A7-C17FD58BE406}"/>
-              </a:ext>
-            </a:extLst>
-          </p:cNvPr>
-          <p:cNvSpPr/>
-          <p:nvPr>
-            <p:ph type="sldNum" idx="12"/>
-          </p:nvPr>
-        </p:nvSpPr>
-        <p:spPr/>
-        <p:txBody>
-          <a:bodyPr xmlns:a="http://schemas.openxmlformats.org/drawingml/2006/main"/>
-          <a:lstStyle xmlns:a="http://schemas.openxmlformats.org/drawingml/2006/main"/>
-          <a:p xmlns:a="http://schemas.openxmlformats.org/drawingml/2006/main"/>
-        </p:txBody>
-      </p:sp>
-    </p:spTree>
-  </p:cSld>
-</p:sldLayout>
-</file>
-
-<file path=ppt/slideLayouts/slideLayout12.xml><?xml version="1.0" encoding="utf-8"?>
-<p:sldLayout xmlns:p="http://schemas.openxmlformats.org/presentationml/2006/main" type="vertTitleAndTx">
-  <p:cSld name="Vertical Title and Text">
-    <p:spTree>
-      <p:nvGrpSpPr>
-        <p:cNvPr id="1" name=""/>
-        <p:cNvGrpSpPr/>
-        <p:nvPr/>
-      </p:nvGrpSpPr>
-      <p:grpSpPr>
-        <a:xfrm xmlns:a="http://schemas.openxmlformats.org/drawingml/2006/main"/>
-      </p:grpSpPr>
-      <p:sp>
-        <p:nvSpPr>
-          <p:cNvPr id="2" name="Vertical Title 1">
-            <a:extLst xmlns:a="http://schemas.openxmlformats.org/drawingml/2006/main">
-              <a:ext uri="{FF2B5EF4-FFF2-40B4-BE49-F238E27FC236}">
-                <a16:creationId xmlns:a16="http://schemas.microsoft.com/office/drawing/2014/main" id="{8F2BCED5-3A5D-47F0-9DF4-6A63AC0FA9AD}"/>
-              </a:ext>
-            </a:extLst>
-          </p:cNvPr>
-          <p:cNvSpPr/>
-          <p:nvPr>
-            <p:ph type="title" idx="0"/>
-          </p:nvPr>
-        </p:nvSpPr>
-        <p:spPr>
-          <a:xfrm xmlns:a="http://schemas.openxmlformats.org/drawingml/2006/main">
-            <a:off x="6629400" y="274638"/>
-            <a:ext cx="2057400" cy="5851525"/>
-          </a:xfrm>
-        </p:spPr>
-        <p:txBody>
-          <a:bodyPr xmlns:a="http://schemas.openxmlformats.org/drawingml/2006/main" vert="eaVert"/>
-          <a:lstStyle xmlns:a="http://schemas.openxmlformats.org/drawingml/2006/main"/>
-          <a:p xmlns:a="http://schemas.openxmlformats.org/drawingml/2006/main"/>
-        </p:txBody>
-      </p:sp>
-      <p:sp>
-        <p:nvSpPr>
-          <p:cNvPr id="3" name="Vertical Text Placeholder 2">
-            <a:extLst xmlns:a="http://schemas.openxmlformats.org/drawingml/2006/main">
-              <a:ext uri="{FF2B5EF4-FFF2-40B4-BE49-F238E27FC236}">
-                <a16:creationId xmlns:a16="http://schemas.microsoft.com/office/drawing/2014/main" id="{C07DC90D-B8AC-4453-9186-2BDA81724E16}"/>
-              </a:ext>
-            </a:extLst>
-          </p:cNvPr>
-          <p:cNvSpPr/>
-          <p:nvPr>
-            <p:ph type="body" idx="1"/>
-          </p:nvPr>
-        </p:nvSpPr>
-        <p:spPr>
-          <a:xfrm xmlns:a="http://schemas.openxmlformats.org/drawingml/2006/main">
-            <a:off x="457200" y="274638"/>
-            <a:ext cx="6019800" cy="5851525"/>
-          </a:xfrm>
-        </p:spPr>
-        <p:txBody>
-          <a:bodyPr xmlns:a="http://schemas.openxmlformats.org/drawingml/2006/main" vert="eaVert"/>
-          <a:lstStyle xmlns:a="http://schemas.openxmlformats.org/drawingml/2006/main"/>
-          <a:p xmlns:a="http://schemas.openxmlformats.org/drawingml/2006/main"/>
-        </p:txBody>
-      </p:sp>
-      <p:sp>
-        <p:nvSpPr>
-          <p:cNvPr id="4" name="Date Placeholder 3">
-            <a:extLst xmlns:a="http://schemas.openxmlformats.org/drawingml/2006/main">
-              <a:ext uri="{FF2B5EF4-FFF2-40B4-BE49-F238E27FC236}">
-                <a16:creationId xmlns:a16="http://schemas.microsoft.com/office/drawing/2014/main" id="{9F4D2B21-FDFC-4718-84C9-AE208364D998}"/>
-              </a:ext>
-            </a:extLst>
-          </p:cNvPr>
-          <p:cNvSpPr/>
-          <p:nvPr>
-            <p:ph type="dt" idx="10"/>
-          </p:nvPr>
-        </p:nvSpPr>
-        <p:spPr/>
-        <p:txBody>
-          <a:bodyPr xmlns:a="http://schemas.openxmlformats.org/drawingml/2006/main"/>
-          <a:lstStyle xmlns:a="http://schemas.openxmlformats.org/drawingml/2006/main"/>
-          <a:p xmlns:a="http://schemas.openxmlformats.org/drawingml/2006/main"/>
-        </p:txBody>
-      </p:sp>
-      <p:sp>
-        <p:nvSpPr>
-          <p:cNvPr id="5" name="Footer Placeholder 4">
-            <a:extLst xmlns:a="http://schemas.openxmlformats.org/drawingml/2006/main">
-              <a:ext uri="{FF2B5EF4-FFF2-40B4-BE49-F238E27FC236}">
-                <a16:creationId xmlns:a16="http://schemas.microsoft.com/office/drawing/2014/main" id="{9293141D-5A70-44CC-8EBB-83AA59BA1AD3}"/>
-              </a:ext>
-            </a:extLst>
-          </p:cNvPr>
-          <p:cNvSpPr/>
-          <p:nvPr>
-            <p:ph type="ftr" idx="11"/>
-          </p:nvPr>
-        </p:nvSpPr>
-        <p:spPr/>
-        <p:txBody>
-          <a:bodyPr xmlns:a="http://schemas.openxmlformats.org/drawingml/2006/main"/>
-          <a:lstStyle xmlns:a="http://schemas.openxmlformats.org/drawingml/2006/main"/>
-          <a:p xmlns:a="http://schemas.openxmlformats.org/drawingml/2006/main"/>
-        </p:txBody>
-      </p:sp>
-      <p:sp>
-        <p:nvSpPr>
-          <p:cNvPr id="6" name="Slide Number Placeholder 5">
-            <a:extLst xmlns:a="http://schemas.openxmlformats.org/drawingml/2006/main">
-              <a:ext uri="{FF2B5EF4-FFF2-40B4-BE49-F238E27FC236}">
-                <a16:creationId xmlns:a16="http://schemas.microsoft.com/office/drawing/2014/main" id="{0496E852-DC9D-460C-A799-3EFF5FCEB8AD}"/>
-              </a:ext>
-            </a:extLst>
-          </p:cNvPr>
-          <p:cNvSpPr/>
-          <p:nvPr>
-            <p:ph type="sldNum" idx="12"/>
-          </p:nvPr>
-        </p:nvSpPr>
-        <p:spPr/>
-        <p:txBody>
-          <a:bodyPr xmlns:a="http://schemas.openxmlformats.org/drawingml/2006/main"/>
-          <a:lstStyle xmlns:a="http://schemas.openxmlformats.org/drawingml/2006/main"/>
-          <a:p xmlns:a="http://schemas.openxmlformats.org/drawingml/2006/main"/>
-        </p:txBody>
-      </p:sp>
-    </p:spTree>
-  </p:cSld>
-</p:sldLayout>
-</file>
-
-<file path=ppt/slideLayouts/slideLayout2.xml><?xml version="1.0" encoding="utf-8"?>
-<p:sldLayout xmlns:p="http://schemas.openxmlformats.org/presentationml/2006/main" type="title">
-  <p:cSld name="Title Slide">
-    <p:spTree>
-      <p:nvGrpSpPr>
-        <p:cNvPr id="1" name=""/>
-        <p:cNvGrpSpPr/>
-        <p:nvPr/>
-      </p:nvGrpSpPr>
-      <p:grpSpPr>
-        <a:xfrm xmlns:a="http://schemas.openxmlformats.org/drawingml/2006/main"/>
-      </p:grpSpPr>
-      <p:sp>
-        <p:nvSpPr>
-          <p:cNvPr id="2" name="Title 1">
-            <a:extLst xmlns:a="http://schemas.openxmlformats.org/drawingml/2006/main">
-              <a:ext uri="{FF2B5EF4-FFF2-40B4-BE49-F238E27FC236}">
-                <a16:creationId xmlns:a16="http://schemas.microsoft.com/office/drawing/2014/main" id="{672FBE4E-4632-450D-8EFF-077568A25D35}"/>
-              </a:ext>
-            </a:extLst>
-          </p:cNvPr>
-          <p:cNvSpPr/>
-          <p:nvPr>
-            <p:ph type="ctrTitle" idx="0"/>
-          </p:nvPr>
-        </p:nvSpPr>
-        <p:spPr>
-          <a:xfrm xmlns:a="http://schemas.openxmlformats.org/drawingml/2006/main">
-            <a:off x="685800" y="2130425"/>
-            <a:ext cx="7772400" cy="1470025"/>
-          </a:xfrm>
-        </p:spPr>
-        <p:txBody>
-          <a:bodyPr xmlns:a="http://schemas.openxmlformats.org/drawingml/2006/main"/>
-          <a:lstStyle xmlns:a="http://schemas.openxmlformats.org/drawingml/2006/main"/>
-          <a:p xmlns:a="http://schemas.openxmlformats.org/drawingml/2006/main"/>
-        </p:txBody>
-      </p:sp>
-      <p:sp>
-        <p:nvSpPr>
-          <p:cNvPr id="3" name="Subtitle 2">
-            <a:extLst xmlns:a="http://schemas.openxmlformats.org/drawingml/2006/main">
-              <a:ext uri="{FF2B5EF4-FFF2-40B4-BE49-F238E27FC236}">
-                <a16:creationId xmlns:a16="http://schemas.microsoft.com/office/drawing/2014/main" id="{FF6E20E1-6307-405F-B51A-2E701D28FFB2}"/>
-              </a:ext>
-            </a:extLst>
-          </p:cNvPr>
-          <p:cNvSpPr/>
-          <p:nvPr>
-            <p:ph type="subTitle" idx="1"/>
-          </p:nvPr>
-        </p:nvSpPr>
-        <p:spPr>
-          <a:xfrm xmlns:a="http://schemas.openxmlformats.org/drawingml/2006/main">
-            <a:off x="1371600" y="3886200"/>
-            <a:ext cx="6400800" cy="1752600"/>
-          </a:xfrm>
-        </p:spPr>
-        <p:txBody>
-          <a:bodyPr xmlns:a="http://schemas.openxmlformats.org/drawingml/2006/main"/>
-          <a:lstStyle xmlns:a="http://schemas.openxmlformats.org/drawingml/2006/main">
-            <a:lvl1pPr marL="0" indent="0" algn="ctr">
-              <a:buNone/>
-              <a:defRPr>
-                <a:solidFill>
-                  <a:schemeClr val="tx1">
-                    <a:tint val="75000"/>
-                  </a:schemeClr>
-                </a:solidFill>
-              </a:defRPr>
-            </a:lvl1pPr>
-            <a:lvl2pPr marL="457200" indent="0" algn="ctr">
-              <a:buNone/>
-              <a:defRPr>
-                <a:solidFill>
-                  <a:schemeClr val="tx1">
-                    <a:tint val="75000"/>
-                  </a:schemeClr>
-                </a:solidFill>
-              </a:defRPr>
-            </a:lvl2pPr>
-            <a:lvl3pPr marL="914400" indent="0" algn="ctr">
-              <a:buNone/>
-              <a:defRPr>
-                <a:solidFill>
-                  <a:schemeClr val="tx1">
-                    <a:tint val="75000"/>
-                  </a:schemeClr>
-                </a:solidFill>
-              </a:defRPr>
-            </a:lvl3pPr>
-            <a:lvl4pPr marL="1371600" indent="0" algn="ctr">
-              <a:buNone/>
-              <a:defRPr>
-                <a:solidFill>
-                  <a:schemeClr val="tx1">
-                    <a:tint val="75000"/>
-                  </a:schemeClr>
-                </a:solidFill>
-              </a:defRPr>
-            </a:lvl4pPr>
-            <a:lvl5pPr marL="1828800" indent="0" algn="ctr">
-              <a:buNone/>
-              <a:defRPr>
-                <a:solidFill>
-                  <a:schemeClr val="tx1">
-                    <a:tint val="75000"/>
-                  </a:schemeClr>
-                </a:solidFill>
-              </a:defRPr>
-            </a:lvl5pPr>
-            <a:lvl6pPr marL="2286000" indent="0" algn="ctr">
-              <a:buNone/>
-              <a:defRPr>
-                <a:solidFill>
-                  <a:schemeClr val="tx1">
-                    <a:tint val="75000"/>
-                  </a:schemeClr>
-                </a:solidFill>
-              </a:defRPr>
-            </a:lvl6pPr>
-            <a:lvl7pPr marL="2743200" indent="0" algn="ctr">
-              <a:buNone/>
-              <a:defRPr>
-                <a:solidFill>
-                  <a:schemeClr val="tx1">
-                    <a:tint val="75000"/>
-                  </a:schemeClr>
-                </a:solidFill>
-              </a:defRPr>
-            </a:lvl7pPr>
-            <a:lvl8pPr marL="3200400" indent="0" algn="ctr">
-              <a:buNone/>
-              <a:defRPr>
-                <a:solidFill>
-                  <a:schemeClr val="tx1">
-                    <a:tint val="75000"/>
-                  </a:schemeClr>
-                </a:solidFill>
-              </a:defRPr>
-            </a:lvl8pPr>
-            <a:lvl9pPr marL="3657600" indent="0" algn="ctr">
-              <a:buNone/>
-              <a:defRPr>
-                <a:solidFill>
-                  <a:schemeClr val="tx1">
-                    <a:tint val="75000"/>
-                  </a:schemeClr>
-                </a:solidFill>
-              </a:defRPr>
-            </a:lvl9pPr>
-          </a:lstStyle>
-          <a:p xmlns:a="http://schemas.openxmlformats.org/drawingml/2006/main"/>
-        </p:txBody>
-      </p:sp>
-      <p:sp>
-        <p:nvSpPr>
-          <p:cNvPr id="4" name="Date Placeholder 3">
-            <a:extLst xmlns:a="http://schemas.openxmlformats.org/drawingml/2006/main">
-              <a:ext uri="{FF2B5EF4-FFF2-40B4-BE49-F238E27FC236}">
-                <a16:creationId xmlns:a16="http://schemas.microsoft.com/office/drawing/2014/main" id="{AB7034E0-4B34-4E14-8F07-F73748865B82}"/>
-              </a:ext>
-            </a:extLst>
-          </p:cNvPr>
-          <p:cNvSpPr/>
-          <p:nvPr>
-            <p:ph type="dt" idx="10"/>
-          </p:nvPr>
-        </p:nvSpPr>
-        <p:spPr/>
-        <p:txBody>
-          <a:bodyPr xmlns:a="http://schemas.openxmlformats.org/drawingml/2006/main"/>
-          <a:lstStyle xmlns:a="http://schemas.openxmlformats.org/drawingml/2006/main"/>
-          <a:p xmlns:a="http://schemas.openxmlformats.org/drawingml/2006/main"/>
-        </p:txBody>
-      </p:sp>
-      <p:sp>
-        <p:nvSpPr>
-          <p:cNvPr id="5" name="Footer Placeholder 4">
-            <a:extLst xmlns:a="http://schemas.openxmlformats.org/drawingml/2006/main">
-              <a:ext uri="{FF2B5EF4-FFF2-40B4-BE49-F238E27FC236}">
-                <a16:creationId xmlns:a16="http://schemas.microsoft.com/office/drawing/2014/main" id="{88EFDD7E-F2A1-42A0-B03E-D4B6EEF54318}"/>
-              </a:ext>
-            </a:extLst>
-          </p:cNvPr>
-          <p:cNvSpPr/>
-          <p:nvPr>
-            <p:ph type="ftr" idx="11"/>
-          </p:nvPr>
-        </p:nvSpPr>
-        <p:spPr/>
-        <p:txBody>
-          <a:bodyPr xmlns:a="http://schemas.openxmlformats.org/drawingml/2006/main"/>
-          <a:lstStyle xmlns:a="http://schemas.openxmlformats.org/drawingml/2006/main"/>
-          <a:p xmlns:a="http://schemas.openxmlformats.org/drawingml/2006/main"/>
-        </p:txBody>
-      </p:sp>
-      <p:sp>
-        <p:nvSpPr>
-          <p:cNvPr id="6" name="Slide Number Placeholder 5">
-            <a:extLst xmlns:a="http://schemas.openxmlformats.org/drawingml/2006/main">
-              <a:ext uri="{FF2B5EF4-FFF2-40B4-BE49-F238E27FC236}">
-                <a16:creationId xmlns:a16="http://schemas.microsoft.com/office/drawing/2014/main" id="{5D4F7104-DE34-4551-AC50-6833C90427A0}"/>
-              </a:ext>
-            </a:extLst>
-          </p:cNvPr>
-          <p:cNvSpPr/>
-          <p:nvPr>
-            <p:ph type="sldNum" idx="12"/>
-          </p:nvPr>
-        </p:nvSpPr>
-        <p:spPr/>
-        <p:txBody>
-          <a:bodyPr xmlns:a="http://schemas.openxmlformats.org/drawingml/2006/main"/>
-          <a:lstStyle xmlns:a="http://schemas.openxmlformats.org/drawingml/2006/main"/>
-          <a:p xmlns:a="http://schemas.openxmlformats.org/drawingml/2006/main"/>
-        </p:txBody>
-      </p:sp>
-    </p:spTree>
-  </p:cSld>
-</p:sldLayout>
-</file>
-
-<file path=ppt/slideLayouts/slideLayout3.xml><?xml version="1.0" encoding="utf-8"?>
-<p:sldLayout xmlns:p="http://schemas.openxmlformats.org/presentationml/2006/main" type="obj">
-  <p:cSld name="Title and Content">
-    <p:spTree>
-      <p:nvGrpSpPr>
-        <p:cNvPr id="1" name=""/>
-        <p:cNvGrpSpPr/>
-        <p:nvPr/>
-      </p:nvGrpSpPr>
-      <p:grpSpPr>
-        <a:xfrm xmlns:a="http://schemas.openxmlformats.org/drawingml/2006/main"/>
-      </p:grpSpPr>
-      <p:sp>
-        <p:nvSpPr>
-          <p:cNvPr id="2" name="Title 1">
-            <a:extLst xmlns:a="http://schemas.openxmlformats.org/drawingml/2006/main">
-              <a:ext uri="{FF2B5EF4-FFF2-40B4-BE49-F238E27FC236}">
-                <a16:creationId xmlns:a16="http://schemas.microsoft.com/office/drawing/2014/main" id="{F44FE04E-D81A-4E16-9CE4-A3D5D81B5FD7}"/>
-              </a:ext>
-            </a:extLst>
-          </p:cNvPr>
-          <p:cNvSpPr/>
-          <p:nvPr>
-            <p:ph type="title" idx="0"/>
-          </p:nvPr>
-        </p:nvSpPr>
-        <p:spPr/>
-        <p:txBody>
-          <a:bodyPr xmlns:a="http://schemas.openxmlformats.org/drawingml/2006/main"/>
-          <a:lstStyle xmlns:a="http://schemas.openxmlformats.org/drawingml/2006/main"/>
-          <a:p xmlns:a="http://schemas.openxmlformats.org/drawingml/2006/main"/>
-        </p:txBody>
-      </p:sp>
-      <p:sp>
-        <p:nvSpPr>
-          <p:cNvPr id="3" name="Content Placeholder 2">
-            <a:extLst xmlns:a="http://schemas.openxmlformats.org/drawingml/2006/main">
-              <a:ext uri="{FF2B5EF4-FFF2-40B4-BE49-F238E27FC236}">
-                <a16:creationId xmlns:a16="http://schemas.microsoft.com/office/drawing/2014/main" id="{468BEBE7-F5F5-4812-9A54-5279E7919159}"/>
-              </a:ext>
-            </a:extLst>
-          </p:cNvPr>
-          <p:cNvSpPr/>
-          <p:nvPr>
-            <p:ph idx="1"/>
-          </p:nvPr>
-        </p:nvSpPr>
-        <p:spPr/>
-        <p:txBody>
-          <a:bodyPr xmlns:a="http://schemas.openxmlformats.org/drawingml/2006/main"/>
-          <a:lstStyle xmlns:a="http://schemas.openxmlformats.org/drawingml/2006/main"/>
-          <a:p xmlns:a="http://schemas.openxmlformats.org/drawingml/2006/main"/>
-        </p:txBody>
-      </p:sp>
-      <p:sp>
-        <p:nvSpPr>
-          <p:cNvPr id="4" name="Date Placeholder 3">
-            <a:extLst xmlns:a="http://schemas.openxmlformats.org/drawingml/2006/main">
-              <a:ext uri="{FF2B5EF4-FFF2-40B4-BE49-F238E27FC236}">
-                <a16:creationId xmlns:a16="http://schemas.microsoft.com/office/drawing/2014/main" id="{6056BC62-C707-4268-AFF8-8250E939196E}"/>
-              </a:ext>
-            </a:extLst>
-          </p:cNvPr>
-          <p:cNvSpPr/>
-          <p:nvPr>
-            <p:ph type="dt" idx="10"/>
-          </p:nvPr>
-        </p:nvSpPr>
-        <p:spPr/>
-        <p:txBody>
-          <a:bodyPr xmlns:a="http://schemas.openxmlformats.org/drawingml/2006/main"/>
-          <a:lstStyle xmlns:a="http://schemas.openxmlformats.org/drawingml/2006/main"/>
-          <a:p xmlns:a="http://schemas.openxmlformats.org/drawingml/2006/main"/>
-        </p:txBody>
-      </p:sp>
-      <p:sp>
-        <p:nvSpPr>
-          <p:cNvPr id="5" name="Footer Placeholder 4">
-            <a:extLst xmlns:a="http://schemas.openxmlformats.org/drawingml/2006/main">
-              <a:ext uri="{FF2B5EF4-FFF2-40B4-BE49-F238E27FC236}">
-                <a16:creationId xmlns:a16="http://schemas.microsoft.com/office/drawing/2014/main" id="{889C815B-5BEE-4C31-822D-E752B091CBCD}"/>
-              </a:ext>
-            </a:extLst>
-          </p:cNvPr>
-          <p:cNvSpPr/>
-          <p:nvPr>
-            <p:ph type="ftr" idx="11"/>
-          </p:nvPr>
-        </p:nvSpPr>
-        <p:spPr/>
-        <p:txBody>
-          <a:bodyPr xmlns:a="http://schemas.openxmlformats.org/drawingml/2006/main"/>
-          <a:lstStyle xmlns:a="http://schemas.openxmlformats.org/drawingml/2006/main"/>
-          <a:p xmlns:a="http://schemas.openxmlformats.org/drawingml/2006/main"/>
-        </p:txBody>
-      </p:sp>
-      <p:sp>
-        <p:nvSpPr>
-          <p:cNvPr id="6" name="Slide Number Placeholder 5">
-            <a:extLst xmlns:a="http://schemas.openxmlformats.org/drawingml/2006/main">
-              <a:ext uri="{FF2B5EF4-FFF2-40B4-BE49-F238E27FC236}">
-                <a16:creationId xmlns:a16="http://schemas.microsoft.com/office/drawing/2014/main" id="{32D29DEB-BB46-454E-9373-DC4DEAC80466}"/>
-              </a:ext>
-            </a:extLst>
-          </p:cNvPr>
-          <p:cNvSpPr/>
-          <p:nvPr>
-            <p:ph type="sldNum" idx="12"/>
-          </p:nvPr>
-        </p:nvSpPr>
-        <p:spPr/>
-        <p:txBody>
-          <a:bodyPr xmlns:a="http://schemas.openxmlformats.org/drawingml/2006/main"/>
-          <a:lstStyle xmlns:a="http://schemas.openxmlformats.org/drawingml/2006/main"/>
-          <a:p xmlns:a="http://schemas.openxmlformats.org/drawingml/2006/main"/>
-        </p:txBody>
-      </p:sp>
-    </p:spTree>
-  </p:cSld>
-</p:sldLayout>
-</file>
-
-<file path=ppt/slideLayouts/slideLayout4.xml><?xml version="1.0" encoding="utf-8"?>
-<p:sldLayout xmlns:p="http://schemas.openxmlformats.org/presentationml/2006/main" type="secHead">
-  <p:cSld name="Section Header">
-    <p:spTree>
-      <p:nvGrpSpPr>
-        <p:cNvPr id="1" name=""/>
-        <p:cNvGrpSpPr/>
-        <p:nvPr/>
-      </p:nvGrpSpPr>
-      <p:grpSpPr>
-        <a:xfrm xmlns:a="http://schemas.openxmlformats.org/drawingml/2006/main"/>
-      </p:grpSpPr>
-      <p:sp>
-        <p:nvSpPr>
-          <p:cNvPr id="2" name="Title 1">
-            <a:extLst xmlns:a="http://schemas.openxmlformats.org/drawingml/2006/main">
-              <a:ext uri="{FF2B5EF4-FFF2-40B4-BE49-F238E27FC236}">
-                <a16:creationId xmlns:a16="http://schemas.microsoft.com/office/drawing/2014/main" id="{E89248A2-F6A0-4CBE-AAB7-5781931A337A}"/>
-              </a:ext>
-            </a:extLst>
-          </p:cNvPr>
-          <p:cNvSpPr/>
-          <p:nvPr>
-            <p:ph type="title" idx="0"/>
-          </p:nvPr>
-        </p:nvSpPr>
-        <p:spPr>
-          <a:xfrm xmlns:a="http://schemas.openxmlformats.org/drawingml/2006/main">
-            <a:off x="722313" y="4406900"/>
-            <a:ext cx="7772400" cy="1362075"/>
-          </a:xfrm>
-        </p:spPr>
-        <p:txBody>
-          <a:bodyPr xmlns:a="http://schemas.openxmlformats.org/drawingml/2006/main" anchor="t"/>
-          <a:lstStyle xmlns:a="http://schemas.openxmlformats.org/drawingml/2006/main">
-            <a:lvl1pPr algn="l">
-              <a:buNone/>
-              <a:defRPr sz="4000" b="1" cap="all"/>
-            </a:lvl1pPr>
-          </a:lstStyle>
-          <a:p xmlns:a="http://schemas.openxmlformats.org/drawingml/2006/main"/>
-        </p:txBody>
-      </p:sp>
-      <p:sp>
-        <p:nvSpPr>
-          <p:cNvPr id="3" name="Text Placeholder 2">
-            <a:extLst xmlns:a="http://schemas.openxmlformats.org/drawingml/2006/main">
-              <a:ext uri="{FF2B5EF4-FFF2-40B4-BE49-F238E27FC236}">
-                <a16:creationId xmlns:a16="http://schemas.microsoft.com/office/drawing/2014/main" id="{D2E6DD9A-B447-40B8-9AFA-23A870F403E8}"/>
-              </a:ext>
-            </a:extLst>
-          </p:cNvPr>
-          <p:cNvSpPr/>
-          <p:nvPr>
-            <p:ph type="body" idx="1"/>
-          </p:nvPr>
-        </p:nvSpPr>
-        <p:spPr>
-          <a:xfrm xmlns:a="http://schemas.openxmlformats.org/drawingml/2006/main">
-            <a:off x="722313" y="2906713"/>
-            <a:ext cx="7772400" cy="1500187"/>
-          </a:xfrm>
-        </p:spPr>
-        <p:txBody>
-          <a:bodyPr xmlns:a="http://schemas.openxmlformats.org/drawingml/2006/main" anchor="b"/>
-          <a:lstStyle xmlns:a="http://schemas.openxmlformats.org/drawingml/2006/main">
-            <a:lvl1pPr marL="0" indent="0">
-              <a:buNone/>
-              <a:defRPr sz="2000">
-                <a:solidFill>
-                  <a:schemeClr val="tx1">
-                    <a:tint val="75000"/>
-                  </a:schemeClr>
-                </a:solidFill>
-              </a:defRPr>
-            </a:lvl1pPr>
-            <a:lvl2pPr marL="457200" indent="0">
-              <a:buNone/>
-              <a:defRPr sz="1800">
-                <a:solidFill>
-                  <a:schemeClr val="tx1">
-                    <a:tint val="75000"/>
-                  </a:schemeClr>
-                </a:solidFill>
-              </a:defRPr>
-            </a:lvl2pPr>
-            <a:lvl3pPr marL="914400" indent="0">
-              <a:buNone/>
-              <a:defRPr sz="1600">
-                <a:solidFill>
-                  <a:schemeClr val="tx1">
-                    <a:tint val="75000"/>
-                  </a:schemeClr>
-                </a:solidFill>
-              </a:defRPr>
-            </a:lvl3pPr>
-            <a:lvl4pPr marL="1371600" indent="0">
-              <a:buNone/>
-              <a:defRPr sz="1400">
-                <a:solidFill>
-                  <a:schemeClr val="tx1">
-                    <a:tint val="75000"/>
-                  </a:schemeClr>
-                </a:solidFill>
-              </a:defRPr>
-            </a:lvl4pPr>
-            <a:lvl5pPr marL="1828800" indent="0">
-              <a:buNone/>
-              <a:defRPr sz="1400">
-                <a:solidFill>
-                  <a:schemeClr val="tx1">
-                    <a:tint val="75000"/>
-                  </a:schemeClr>
-                </a:solidFill>
-              </a:defRPr>
-            </a:lvl5pPr>
-            <a:lvl6pPr marL="2286000" indent="0">
-              <a:buNone/>
-              <a:defRPr sz="1400">
-                <a:solidFill>
-                  <a:schemeClr val="tx1">
-                    <a:tint val="75000"/>
-                  </a:schemeClr>
-                </a:solidFill>
-              </a:defRPr>
-            </a:lvl6pPr>
-            <a:lvl7pPr marL="2743200" indent="0">
-              <a:buNone/>
-              <a:defRPr sz="1400">
-                <a:solidFill>
-                  <a:schemeClr val="tx1">
-                    <a:tint val="75000"/>
-                  </a:schemeClr>
-                </a:solidFill>
-              </a:defRPr>
-            </a:lvl7pPr>
-            <a:lvl8pPr marL="3200400" indent="0">
-              <a:buNone/>
-              <a:defRPr sz="1400">
-                <a:solidFill>
-                  <a:schemeClr val="tx1">
-                    <a:tint val="75000"/>
-                  </a:schemeClr>
-                </a:solidFill>
-              </a:defRPr>
-            </a:lvl8pPr>
-            <a:lvl9pPr marL="3657600" indent="0">
-              <a:buNone/>
-              <a:defRPr sz="1400">
-                <a:solidFill>
-                  <a:schemeClr val="tx1">
-                    <a:tint val="75000"/>
-                  </a:schemeClr>
-                </a:solidFill>
-              </a:defRPr>
-            </a:lvl9pPr>
-          </a:lstStyle>
-          <a:p xmlns:a="http://schemas.openxmlformats.org/drawingml/2006/main"/>
-        </p:txBody>
-      </p:sp>
-      <p:sp>
-        <p:nvSpPr>
-          <p:cNvPr id="4" name="Date Placeholder 3">
-            <a:extLst xmlns:a="http://schemas.openxmlformats.org/drawingml/2006/main">
-              <a:ext uri="{FF2B5EF4-FFF2-40B4-BE49-F238E27FC236}">
-                <a16:creationId xmlns:a16="http://schemas.microsoft.com/office/drawing/2014/main" id="{11065299-A4C6-4A88-B11F-AFE90AB76D50}"/>
-              </a:ext>
-            </a:extLst>
-          </p:cNvPr>
-          <p:cNvSpPr/>
-          <p:nvPr>
-            <p:ph type="dt" idx="10"/>
-          </p:nvPr>
-        </p:nvSpPr>
-        <p:spPr/>
-        <p:txBody>
-          <a:bodyPr xmlns:a="http://schemas.openxmlformats.org/drawingml/2006/main"/>
-          <a:lstStyle xmlns:a="http://schemas.openxmlformats.org/drawingml/2006/main"/>
-          <a:p xmlns:a="http://schemas.openxmlformats.org/drawingml/2006/main"/>
-        </p:txBody>
-      </p:sp>
-      <p:sp>
-        <p:nvSpPr>
-          <p:cNvPr id="5" name="Footer Placeholder 4">
-            <a:extLst xmlns:a="http://schemas.openxmlformats.org/drawingml/2006/main">
-              <a:ext uri="{FF2B5EF4-FFF2-40B4-BE49-F238E27FC236}">
-                <a16:creationId xmlns:a16="http://schemas.microsoft.com/office/drawing/2014/main" id="{727DBC7F-E697-47E9-A21A-72968D92D3A3}"/>
-              </a:ext>
-            </a:extLst>
-          </p:cNvPr>
-          <p:cNvSpPr/>
-          <p:nvPr>
-            <p:ph type="ftr" idx="11"/>
-          </p:nvPr>
-        </p:nvSpPr>
-        <p:spPr/>
-        <p:txBody>
-          <a:bodyPr xmlns:a="http://schemas.openxmlformats.org/drawingml/2006/main"/>
-          <a:lstStyle xmlns:a="http://schemas.openxmlformats.org/drawingml/2006/main"/>
-          <a:p xmlns:a="http://schemas.openxmlformats.org/drawingml/2006/main"/>
-        </p:txBody>
-      </p:sp>
-      <p:sp>
-        <p:nvSpPr>
-          <p:cNvPr id="6" name="Slide Number Placeholder 5">
-            <a:extLst xmlns:a="http://schemas.openxmlformats.org/drawingml/2006/main">
-              <a:ext uri="{FF2B5EF4-FFF2-40B4-BE49-F238E27FC236}">
-                <a16:creationId xmlns:a16="http://schemas.microsoft.com/office/drawing/2014/main" id="{D2F6B092-117E-443A-B535-6D56670A2EF3}"/>
-              </a:ext>
-            </a:extLst>
-          </p:cNvPr>
-          <p:cNvSpPr/>
-          <p:nvPr>
-            <p:ph type="sldNum" idx="12"/>
-          </p:nvPr>
-        </p:nvSpPr>
-        <p:spPr/>
-        <p:txBody>
-          <a:bodyPr xmlns:a="http://schemas.openxmlformats.org/drawingml/2006/main"/>
-          <a:lstStyle xmlns:a="http://schemas.openxmlformats.org/drawingml/2006/main"/>
-          <a:p xmlns:a="http://schemas.openxmlformats.org/drawingml/2006/main"/>
-        </p:txBody>
-      </p:sp>
-    </p:spTree>
-  </p:cSld>
-</p:sldLayout>
-</file>
-
-<file path=ppt/slideLayouts/slideLayout5.xml><?xml version="1.0" encoding="utf-8"?>
-<p:sldLayout xmlns:p="http://schemas.openxmlformats.org/presentationml/2006/main" type="twoObj">
-  <p:cSld name="Two Content">
-    <p:spTree>
-      <p:nvGrpSpPr>
-        <p:cNvPr id="1" name=""/>
-        <p:cNvGrpSpPr/>
-        <p:nvPr/>
-      </p:nvGrpSpPr>
-      <p:grpSpPr>
-        <a:xfrm xmlns:a="http://schemas.openxmlformats.org/drawingml/2006/main"/>
-      </p:grpSpPr>
-      <p:sp>
-        <p:nvSpPr>
-          <p:cNvPr id="2" name="Title 1">
-            <a:extLst xmlns:a="http://schemas.openxmlformats.org/drawingml/2006/main">
-              <a:ext uri="{FF2B5EF4-FFF2-40B4-BE49-F238E27FC236}">
-                <a16:creationId xmlns:a16="http://schemas.microsoft.com/office/drawing/2014/main" id="{C18EE0B0-6535-4ECB-A1A8-F0D688B53D6B}"/>
-              </a:ext>
-            </a:extLst>
-          </p:cNvPr>
-          <p:cNvSpPr/>
-          <p:nvPr>
-            <p:ph type="title" idx="0"/>
-          </p:nvPr>
-        </p:nvSpPr>
-        <p:spPr/>
-        <p:txBody>
-          <a:bodyPr xmlns:a="http://schemas.openxmlformats.org/drawingml/2006/main"/>
-          <a:lstStyle xmlns:a="http://schemas.openxmlformats.org/drawingml/2006/main"/>
-          <a:p xmlns:a="http://schemas.openxmlformats.org/drawingml/2006/main"/>
-        </p:txBody>
-      </p:sp>
-      <p:sp>
-        <p:nvSpPr>
-          <p:cNvPr id="3" name="Content Placeholder 2">
-            <a:extLst xmlns:a="http://schemas.openxmlformats.org/drawingml/2006/main">
-              <a:ext uri="{FF2B5EF4-FFF2-40B4-BE49-F238E27FC236}">
-                <a16:creationId xmlns:a16="http://schemas.microsoft.com/office/drawing/2014/main" id="{5050762E-4905-4E36-A766-5B4D6C44A8F2}"/>
-              </a:ext>
-            </a:extLst>
-          </p:cNvPr>
-          <p:cNvSpPr/>
-          <p:nvPr>
-            <p:ph idx="1"/>
-          </p:nvPr>
-        </p:nvSpPr>
-        <p:spPr>
-          <a:xfrm xmlns:a="http://schemas.openxmlformats.org/drawingml/2006/main">
-            <a:off x="457200" y="1600200"/>
-            <a:ext cx="4038600" cy="4525963"/>
-          </a:xfrm>
-        </p:spPr>
-        <p:txBody>
-          <a:bodyPr xmlns:a="http://schemas.openxmlformats.org/drawingml/2006/main"/>
-          <a:lstStyle xmlns:a="http://schemas.openxmlformats.org/drawingml/2006/main">
-            <a:lvl1pPr>
-              <a:buNone/>
-              <a:defRPr sz="2800"/>
-            </a:lvl1pPr>
-            <a:lvl2pPr>
-              <a:buNone/>
-              <a:defRPr sz="2400"/>
-            </a:lvl2pPr>
-            <a:lvl3pPr>
-              <a:buNone/>
-              <a:defRPr sz="2000"/>
-            </a:lvl3pPr>
-            <a:lvl4pPr>
-              <a:buNone/>
-              <a:defRPr sz="1800"/>
-            </a:lvl4pPr>
-            <a:lvl5pPr>
-              <a:buNone/>
-              <a:defRPr sz="1800"/>
-            </a:lvl5pPr>
-            <a:lvl6pPr>
-              <a:buNone/>
-              <a:defRPr sz="1800"/>
-            </a:lvl6pPr>
-            <a:lvl7pPr>
-              <a:buNone/>
-              <a:defRPr sz="1800"/>
-            </a:lvl7pPr>
-            <a:lvl8pPr>
-              <a:buNone/>
-              <a:defRPr sz="1800"/>
-            </a:lvl8pPr>
-            <a:lvl9pPr>
-              <a:buNone/>
-              <a:defRPr sz="1800"/>
-            </a:lvl9pPr>
-          </a:lstStyle>
-          <a:p xmlns:a="http://schemas.openxmlformats.org/drawingml/2006/main"/>
-        </p:txBody>
-      </p:sp>
-      <p:sp>
-        <p:nvSpPr>
-          <p:cNvPr id="4" name="Content Placeholder 3">
-            <a:extLst xmlns:a="http://schemas.openxmlformats.org/drawingml/2006/main">
-              <a:ext uri="{FF2B5EF4-FFF2-40B4-BE49-F238E27FC236}">
-                <a16:creationId xmlns:a16="http://schemas.microsoft.com/office/drawing/2014/main" id="{4D3C4BC6-100E-4ADC-A461-6DEFB62E6A23}"/>
-              </a:ext>
-            </a:extLst>
-          </p:cNvPr>
-          <p:cNvSpPr/>
-          <p:nvPr>
-            <p:ph idx="2"/>
-          </p:nvPr>
-        </p:nvSpPr>
-        <p:spPr>
-          <a:xfrm xmlns:a="http://schemas.openxmlformats.org/drawingml/2006/main">
-            <a:off x="4648200" y="1600200"/>
-            <a:ext cx="4038600" cy="4525963"/>
-          </a:xfrm>
-        </p:spPr>
-        <p:txBody>
-          <a:bodyPr xmlns:a="http://schemas.openxmlformats.org/drawingml/2006/main"/>
-          <a:lstStyle xmlns:a="http://schemas.openxmlformats.org/drawingml/2006/main">
-            <a:lvl1pPr>
-              <a:buNone/>
-              <a:defRPr sz="2800"/>
-            </a:lvl1pPr>
-            <a:lvl2pPr>
-              <a:buNone/>
-              <a:defRPr sz="2400"/>
-            </a:lvl2pPr>
-            <a:lvl3pPr>
-              <a:buNone/>
-              <a:defRPr sz="2000"/>
-            </a:lvl3pPr>
-            <a:lvl4pPr>
-              <a:buNone/>
-              <a:defRPr sz="1800"/>
-            </a:lvl4pPr>
-            <a:lvl5pPr>
-              <a:buNone/>
-              <a:defRPr sz="1800"/>
-            </a:lvl5pPr>
-            <a:lvl6pPr>
-              <a:buNone/>
-              <a:defRPr sz="1800"/>
-            </a:lvl6pPr>
-            <a:lvl7pPr>
-              <a:buNone/>
-              <a:defRPr sz="1800"/>
-            </a:lvl7pPr>
-            <a:lvl8pPr>
-              <a:buNone/>
-              <a:defRPr sz="1800"/>
-            </a:lvl8pPr>
-            <a:lvl9pPr>
-              <a:buNone/>
-              <a:defRPr sz="1800"/>
-            </a:lvl9pPr>
-          </a:lstStyle>
-          <a:p xmlns:a="http://schemas.openxmlformats.org/drawingml/2006/main"/>
-        </p:txBody>
-      </p:sp>
-      <p:sp>
-        <p:nvSpPr>
-          <p:cNvPr id="5" name="Date Placeholder 4">
-            <a:extLst xmlns:a="http://schemas.openxmlformats.org/drawingml/2006/main">
-              <a:ext uri="{FF2B5EF4-FFF2-40B4-BE49-F238E27FC236}">
-                <a16:creationId xmlns:a16="http://schemas.microsoft.com/office/drawing/2014/main" id="{603B9F24-B096-4FFA-9488-BE80C1294191}"/>
-              </a:ext>
-            </a:extLst>
-          </p:cNvPr>
-          <p:cNvSpPr/>
-          <p:nvPr>
-            <p:ph type="dt" idx="10"/>
-          </p:nvPr>
-        </p:nvSpPr>
-        <p:spPr/>
-        <p:txBody>
-          <a:bodyPr xmlns:a="http://schemas.openxmlformats.org/drawingml/2006/main"/>
-          <a:lstStyle xmlns:a="http://schemas.openxmlformats.org/drawingml/2006/main"/>
-          <a:p xmlns:a="http://schemas.openxmlformats.org/drawingml/2006/main"/>
-        </p:txBody>
-      </p:sp>
-      <p:sp>
-        <p:nvSpPr>
-          <p:cNvPr id="6" name="Footer Placeholder 5">
-            <a:extLst xmlns:a="http://schemas.openxmlformats.org/drawingml/2006/main">
-              <a:ext uri="{FF2B5EF4-FFF2-40B4-BE49-F238E27FC236}">
-                <a16:creationId xmlns:a16="http://schemas.microsoft.com/office/drawing/2014/main" id="{EE6D6730-5DDE-4CC3-ADAD-38623F47DAE3}"/>
-              </a:ext>
-            </a:extLst>
-          </p:cNvPr>
-          <p:cNvSpPr/>
-          <p:nvPr>
-            <p:ph type="ftr" idx="11"/>
-          </p:nvPr>
-        </p:nvSpPr>
-        <p:spPr/>
-        <p:txBody>
-          <a:bodyPr xmlns:a="http://schemas.openxmlformats.org/drawingml/2006/main"/>
-          <a:lstStyle xmlns:a="http://schemas.openxmlformats.org/drawingml/2006/main"/>
-          <a:p xmlns:a="http://schemas.openxmlformats.org/drawingml/2006/main"/>
-        </p:txBody>
-      </p:sp>
-      <p:sp>
-        <p:nvSpPr>
-          <p:cNvPr id="7" name="Slide Number Placeholder 6">
-            <a:extLst xmlns:a="http://schemas.openxmlformats.org/drawingml/2006/main">
-              <a:ext uri="{FF2B5EF4-FFF2-40B4-BE49-F238E27FC236}">
-                <a16:creationId xmlns:a16="http://schemas.microsoft.com/office/drawing/2014/main" id="{2DC51CFE-838A-4545-86B3-14DB52C4F3DF}"/>
-              </a:ext>
-            </a:extLst>
-          </p:cNvPr>
-          <p:cNvSpPr/>
-          <p:nvPr>
-            <p:ph type="sldNum" idx="12"/>
-          </p:nvPr>
-        </p:nvSpPr>
-        <p:spPr/>
-        <p:txBody>
-          <a:bodyPr xmlns:a="http://schemas.openxmlformats.org/drawingml/2006/main"/>
-          <a:lstStyle xmlns:a="http://schemas.openxmlformats.org/drawingml/2006/main"/>
-          <a:p xmlns:a="http://schemas.openxmlformats.org/drawingml/2006/main"/>
-        </p:txBody>
-      </p:sp>
-    </p:spTree>
-  </p:cSld>
-</p:sldLayout>
-</file>
-
-<file path=ppt/slideLayouts/slideLayout6.xml><?xml version="1.0" encoding="utf-8"?>
-<p:sldLayout xmlns:p="http://schemas.openxmlformats.org/presentationml/2006/main" type="twoTxTwoObj">
-  <p:cSld name="Comparison">
-    <p:spTree>
-      <p:nvGrpSpPr>
-        <p:cNvPr id="1" name=""/>
-        <p:cNvGrpSpPr/>
-        <p:nvPr/>
-      </p:nvGrpSpPr>
-      <p:grpSpPr>
-        <a:xfrm xmlns:a="http://schemas.openxmlformats.org/drawingml/2006/main"/>
-      </p:grpSpPr>
-      <p:sp>
-        <p:nvSpPr>
-          <p:cNvPr id="2" name="Title 1">
-            <a:extLst xmlns:a="http://schemas.openxmlformats.org/drawingml/2006/main">
-              <a:ext uri="{FF2B5EF4-FFF2-40B4-BE49-F238E27FC236}">
-                <a16:creationId xmlns:a16="http://schemas.microsoft.com/office/drawing/2014/main" id="{817F595E-4669-4D31-AF7A-78C2EA38387F}"/>
-              </a:ext>
-            </a:extLst>
-          </p:cNvPr>
-          <p:cNvSpPr/>
-          <p:nvPr>
-            <p:ph type="title" idx="0"/>
-          </p:nvPr>
-        </p:nvSpPr>
-        <p:spPr/>
-        <p:txBody>
-          <a:bodyPr xmlns:a="http://schemas.openxmlformats.org/drawingml/2006/main"/>
-          <a:lstStyle xmlns:a="http://schemas.openxmlformats.org/drawingml/2006/main">
-            <a:lvl1pPr>
-              <a:buNone/>
-              <a:defRPr/>
-            </a:lvl1pPr>
-          </a:lstStyle>
-          <a:p xmlns:a="http://schemas.openxmlformats.org/drawingml/2006/main"/>
-        </p:txBody>
-      </p:sp>
-      <p:sp>
-        <p:nvSpPr>
-          <p:cNvPr id="3" name="Text Placeholder 2">
-            <a:extLst xmlns:a="http://schemas.openxmlformats.org/drawingml/2006/main">
-              <a:ext uri="{FF2B5EF4-FFF2-40B4-BE49-F238E27FC236}">
-                <a16:creationId xmlns:a16="http://schemas.microsoft.com/office/drawing/2014/main" id="{6491D423-9F6C-4CCF-AE91-FE775A90A298}"/>
-              </a:ext>
-            </a:extLst>
-          </p:cNvPr>
-          <p:cNvSpPr/>
-          <p:nvPr>
-            <p:ph type="body" idx="1"/>
-          </p:nvPr>
-        </p:nvSpPr>
-        <p:spPr>
-          <a:xfrm xmlns:a="http://schemas.openxmlformats.org/drawingml/2006/main">
-            <a:off x="457200" y="1535113"/>
-            <a:ext cx="4040188" cy="639762"/>
-          </a:xfrm>
-        </p:spPr>
-        <p:txBody>
-          <a:bodyPr xmlns:a="http://schemas.openxmlformats.org/drawingml/2006/main" anchor="b"/>
-          <a:lstStyle xmlns:a="http://schemas.openxmlformats.org/drawingml/2006/main">
-            <a:lvl1pPr marL="0" indent="0">
-              <a:buNone/>
-              <a:defRPr sz="2400" b="1"/>
-            </a:lvl1pPr>
-            <a:lvl2pPr marL="457200" indent="0">
-              <a:buNone/>
-              <a:defRPr sz="2000" b="1"/>
-            </a:lvl2pPr>
-            <a:lvl3pPr marL="914400" indent="0">
-              <a:buNone/>
-              <a:defRPr sz="1800" b="1"/>
-            </a:lvl3pPr>
-            <a:lvl4pPr marL="1371600" indent="0">
-              <a:buNone/>
-              <a:defRPr sz="1600" b="1"/>
-            </a:lvl4pPr>
-            <a:lvl5pPr marL="1828800" indent="0">
-              <a:buNone/>
-              <a:defRPr sz="1600" b="1"/>
-            </a:lvl5pPr>
-            <a:lvl6pPr marL="2286000" indent="0">
-              <a:buNone/>
-              <a:defRPr sz="1600" b="1"/>
-            </a:lvl6pPr>
-            <a:lvl7pPr marL="2743200" indent="0">
-              <a:buNone/>
-              <a:defRPr sz="1600" b="1"/>
-            </a:lvl7pPr>
-            <a:lvl8pPr marL="3200400" indent="0">
-              <a:buNone/>
-              <a:defRPr sz="1600" b="1"/>
-            </a:lvl8pPr>
-            <a:lvl9pPr marL="3657600" indent="0">
-              <a:buNone/>
-              <a:defRPr sz="1600" b="1"/>
-            </a:lvl9pPr>
-          </a:lstStyle>
-          <a:p xmlns:a="http://schemas.openxmlformats.org/drawingml/2006/main"/>
-        </p:txBody>
-      </p:sp>
-      <p:sp>
-        <p:nvSpPr>
-          <p:cNvPr id="4" name="Content Placeholder 3">
-            <a:extLst xmlns:a="http://schemas.openxmlformats.org/drawingml/2006/main">
-              <a:ext uri="{FF2B5EF4-FFF2-40B4-BE49-F238E27FC236}">
-                <a16:creationId xmlns:a16="http://schemas.microsoft.com/office/drawing/2014/main" id="{45ECEDBE-407F-493D-A416-AFB9DBBAD8E2}"/>
-              </a:ext>
-            </a:extLst>
-          </p:cNvPr>
-          <p:cNvSpPr/>
-          <p:nvPr>
-            <p:ph idx="2"/>
-          </p:nvPr>
-        </p:nvSpPr>
-        <p:spPr>
-          <a:xfrm xmlns:a="http://schemas.openxmlformats.org/drawingml/2006/main">
-            <a:off x="457200" y="2174875"/>
-            <a:ext cx="4040188" cy="3951288"/>
-          </a:xfrm>
-        </p:spPr>
-        <p:txBody>
-          <a:bodyPr xmlns:a="http://schemas.openxmlformats.org/drawingml/2006/main"/>
-          <a:lstStyle xmlns:a="http://schemas.openxmlformats.org/drawingml/2006/main">
-            <a:lvl1pPr>
-              <a:buNone/>
-              <a:defRPr sz="2400"/>
-            </a:lvl1pPr>
-            <a:lvl2pPr>
-              <a:buNone/>
-              <a:defRPr sz="2000"/>
-            </a:lvl2pPr>
-            <a:lvl3pPr>
-              <a:buNone/>
-              <a:defRPr sz="1800"/>
-            </a:lvl3pPr>
-            <a:lvl4pPr>
-              <a:buNone/>
-              <a:defRPr sz="1600"/>
-            </a:lvl4pPr>
-            <a:lvl5pPr>
-              <a:buNone/>
-              <a:defRPr sz="1600"/>
-            </a:lvl5pPr>
-            <a:lvl6pPr>
-              <a:buNone/>
-              <a:defRPr sz="1600"/>
-            </a:lvl6pPr>
-            <a:lvl7pPr>
-              <a:buNone/>
-              <a:defRPr sz="1600"/>
-            </a:lvl7pPr>
-            <a:lvl8pPr>
-              <a:buNone/>
-              <a:defRPr sz="1600"/>
-            </a:lvl8pPr>
-            <a:lvl9pPr>
-              <a:buNone/>
-              <a:defRPr sz="1600"/>
-            </a:lvl9pPr>
-          </a:lstStyle>
-          <a:p xmlns:a="http://schemas.openxmlformats.org/drawingml/2006/main"/>
-        </p:txBody>
-      </p:sp>
-      <p:sp>
-        <p:nvSpPr>
-          <p:cNvPr id="5" name="Text Placeholder 4">
-            <a:extLst xmlns:a="http://schemas.openxmlformats.org/drawingml/2006/main">
-              <a:ext uri="{FF2B5EF4-FFF2-40B4-BE49-F238E27FC236}">
-                <a16:creationId xmlns:a16="http://schemas.microsoft.com/office/drawing/2014/main" id="{71AFC811-B68E-4B6E-8F89-312283644430}"/>
-              </a:ext>
-            </a:extLst>
-          </p:cNvPr>
-          <p:cNvSpPr/>
-          <p:nvPr>
-            <p:ph type="body" idx="3"/>
-          </p:nvPr>
-        </p:nvSpPr>
-        <p:spPr>
-          <a:xfrm xmlns:a="http://schemas.openxmlformats.org/drawingml/2006/main">
-            <a:off x="4645025" y="1535113"/>
-            <a:ext cx="4041775" cy="639762"/>
-          </a:xfrm>
-        </p:spPr>
-        <p:txBody>
-          <a:bodyPr xmlns:a="http://schemas.openxmlformats.org/drawingml/2006/main" anchor="b"/>
-          <a:lstStyle xmlns:a="http://schemas.openxmlformats.org/drawingml/2006/main">
-            <a:lvl1pPr marL="0" indent="0">
-              <a:buNone/>
-              <a:defRPr sz="2400" b="1"/>
-            </a:lvl1pPr>
-            <a:lvl2pPr marL="457200" indent="0">
-              <a:buNone/>
-              <a:defRPr sz="2000" b="1"/>
-            </a:lvl2pPr>
-            <a:lvl3pPr marL="914400" indent="0">
-              <a:buNone/>
-              <a:defRPr sz="1800" b="1"/>
-            </a:lvl3pPr>
-            <a:lvl4pPr marL="1371600" indent="0">
-              <a:buNone/>
-              <a:defRPr sz="1600" b="1"/>
-            </a:lvl4pPr>
-            <a:lvl5pPr marL="1828800" indent="0">
-              <a:buNone/>
-              <a:defRPr sz="1600" b="1"/>
-            </a:lvl5pPr>
-            <a:lvl6pPr marL="2286000" indent="0">
-              <a:buNone/>
-              <a:defRPr sz="1600" b="1"/>
-            </a:lvl6pPr>
-            <a:lvl7pPr marL="2743200" indent="0">
-              <a:buNone/>
-              <a:defRPr sz="1600" b="1"/>
-            </a:lvl7pPr>
-            <a:lvl8pPr marL="3200400" indent="0">
-              <a:buNone/>
-              <a:defRPr sz="1600" b="1"/>
-            </a:lvl8pPr>
-            <a:lvl9pPr marL="3657600" indent="0">
-              <a:buNone/>
-              <a:defRPr sz="1600" b="1"/>
-            </a:lvl9pPr>
-          </a:lstStyle>
-          <a:p xmlns:a="http://schemas.openxmlformats.org/drawingml/2006/main"/>
-        </p:txBody>
-      </p:sp>
-      <p:sp>
-        <p:nvSpPr>
-          <p:cNvPr id="6" name="Content Placeholder 5">
-            <a:extLst xmlns:a="http://schemas.openxmlformats.org/drawingml/2006/main">
-              <a:ext uri="{FF2B5EF4-FFF2-40B4-BE49-F238E27FC236}">
-                <a16:creationId xmlns:a16="http://schemas.microsoft.com/office/drawing/2014/main" id="{FB0A3A31-BA1C-47FF-8F82-AA827C13D89F}"/>
-              </a:ext>
-            </a:extLst>
-          </p:cNvPr>
-          <p:cNvSpPr/>
-          <p:nvPr>
-            <p:ph idx="4"/>
-          </p:nvPr>
-        </p:nvSpPr>
-        <p:spPr>
-          <a:xfrm xmlns:a="http://schemas.openxmlformats.org/drawingml/2006/main">
-            <a:off x="4645025" y="2174875"/>
-            <a:ext cx="4041775" cy="3951288"/>
-          </a:xfrm>
-        </p:spPr>
-        <p:txBody>
-          <a:bodyPr xmlns:a="http://schemas.openxmlformats.org/drawingml/2006/main"/>
-          <a:lstStyle xmlns:a="http://schemas.openxmlformats.org/drawingml/2006/main">
-            <a:lvl1pPr>
-              <a:buNone/>
-              <a:defRPr sz="2400"/>
-            </a:lvl1pPr>
-            <a:lvl2pPr>
-              <a:buNone/>
-              <a:defRPr sz="2000"/>
-            </a:lvl2pPr>
-            <a:lvl3pPr>
-              <a:buNone/>
-              <a:defRPr sz="1800"/>
-            </a:lvl3pPr>
-            <a:lvl4pPr>
-              <a:buNone/>
-              <a:defRPr sz="1600"/>
-            </a:lvl4pPr>
-            <a:lvl5pPr>
-              <a:buNone/>
-              <a:defRPr sz="1600"/>
-            </a:lvl5pPr>
-            <a:lvl6pPr>
-              <a:buNone/>
-              <a:defRPr sz="1600"/>
-            </a:lvl6pPr>
-            <a:lvl7pPr>
-              <a:buNone/>
-              <a:defRPr sz="1600"/>
-            </a:lvl7pPr>
-            <a:lvl8pPr>
-              <a:buNone/>
-              <a:defRPr sz="1600"/>
-            </a:lvl8pPr>
-            <a:lvl9pPr>
-              <a:buNone/>
-              <a:defRPr sz="1600"/>
-            </a:lvl9pPr>
-          </a:lstStyle>
-          <a:p xmlns:a="http://schemas.openxmlformats.org/drawingml/2006/main"/>
-        </p:txBody>
-      </p:sp>
-      <p:sp>
-        <p:nvSpPr>
-          <p:cNvPr id="7" name="Date Placeholder 6">
-            <a:extLst xmlns:a="http://schemas.openxmlformats.org/drawingml/2006/main">
-              <a:ext uri="{FF2B5EF4-FFF2-40B4-BE49-F238E27FC236}">
-                <a16:creationId xmlns:a16="http://schemas.microsoft.com/office/drawing/2014/main" id="{0A9C6233-4E15-40A7-9299-8F5FB479846D}"/>
-              </a:ext>
-            </a:extLst>
-          </p:cNvPr>
-          <p:cNvSpPr/>
-          <p:nvPr>
-            <p:ph type="dt" idx="10"/>
-          </p:nvPr>
-        </p:nvSpPr>
-        <p:spPr/>
-        <p:txBody>
-          <a:bodyPr xmlns:a="http://schemas.openxmlformats.org/drawingml/2006/main"/>
-          <a:lstStyle xmlns:a="http://schemas.openxmlformats.org/drawingml/2006/main"/>
-          <a:p xmlns:a="http://schemas.openxmlformats.org/drawingml/2006/main"/>
-        </p:txBody>
-      </p:sp>
-      <p:sp>
-        <p:nvSpPr>
-          <p:cNvPr id="8" name="Footer Placeholder 7">
-            <a:extLst xmlns:a="http://schemas.openxmlformats.org/drawingml/2006/main">
-              <a:ext uri="{FF2B5EF4-FFF2-40B4-BE49-F238E27FC236}">
-                <a16:creationId xmlns:a16="http://schemas.microsoft.com/office/drawing/2014/main" id="{118102F0-0C75-4279-9A49-7448F5FF8226}"/>
-              </a:ext>
-            </a:extLst>
-          </p:cNvPr>
-          <p:cNvSpPr/>
-          <p:nvPr>
-            <p:ph type="ftr" idx="11"/>
-          </p:nvPr>
-        </p:nvSpPr>
-        <p:spPr/>
-        <p:txBody>
-          <a:bodyPr xmlns:a="http://schemas.openxmlformats.org/drawingml/2006/main"/>
-          <a:lstStyle xmlns:a="http://schemas.openxmlformats.org/drawingml/2006/main"/>
-          <a:p xmlns:a="http://schemas.openxmlformats.org/drawingml/2006/main"/>
-        </p:txBody>
-      </p:sp>
-      <p:sp>
-        <p:nvSpPr>
-          <p:cNvPr id="9" name="Slide Number Placeholder 8">
-            <a:extLst xmlns:a="http://schemas.openxmlformats.org/drawingml/2006/main">
-              <a:ext uri="{FF2B5EF4-FFF2-40B4-BE49-F238E27FC236}">
-                <a16:creationId xmlns:a16="http://schemas.microsoft.com/office/drawing/2014/main" id="{EDFC4468-74B7-4EE4-818C-81A502973670}"/>
-              </a:ext>
-            </a:extLst>
-          </p:cNvPr>
-          <p:cNvSpPr/>
-          <p:nvPr>
-            <p:ph type="sldNum" idx="12"/>
-          </p:nvPr>
-        </p:nvSpPr>
-        <p:spPr/>
-        <p:txBody>
-          <a:bodyPr xmlns:a="http://schemas.openxmlformats.org/drawingml/2006/main"/>
-          <a:lstStyle xmlns:a="http://schemas.openxmlformats.org/drawingml/2006/main"/>
-          <a:p xmlns:a="http://schemas.openxmlformats.org/drawingml/2006/main"/>
-        </p:txBody>
-      </p:sp>
-    </p:spTree>
-  </p:cSld>
-</p:sldLayout>
-</file>
-
-<file path=ppt/slideLayouts/slideLayout7.xml><?xml version="1.0" encoding="utf-8"?>
-<p:sldLayout xmlns:p="http://schemas.openxmlformats.org/presentationml/2006/main" type="titleOnly">
-  <p:cSld name="Title Only">
-    <p:spTree>
-      <p:nvGrpSpPr>
-        <p:cNvPr id="1" name=""/>
-        <p:cNvGrpSpPr/>
-        <p:nvPr/>
-      </p:nvGrpSpPr>
-      <p:grpSpPr>
-        <a:xfrm xmlns:a="http://schemas.openxmlformats.org/drawingml/2006/main"/>
-      </p:grpSpPr>
-      <p:sp>
-        <p:nvSpPr>
-          <p:cNvPr id="2" name="Title 1">
-            <a:extLst xmlns:a="http://schemas.openxmlformats.org/drawingml/2006/main">
-              <a:ext uri="{FF2B5EF4-FFF2-40B4-BE49-F238E27FC236}">
-                <a16:creationId xmlns:a16="http://schemas.microsoft.com/office/drawing/2014/main" id="{3E56E293-359C-437C-83B3-44D3D79876AE}"/>
-              </a:ext>
-            </a:extLst>
-          </p:cNvPr>
-          <p:cNvSpPr/>
-          <p:nvPr>
-            <p:ph type="title" idx="0"/>
-          </p:nvPr>
-        </p:nvSpPr>
-        <p:spPr/>
-        <p:txBody>
-          <a:bodyPr xmlns:a="http://schemas.openxmlformats.org/drawingml/2006/main"/>
-          <a:lstStyle xmlns:a="http://schemas.openxmlformats.org/drawingml/2006/main"/>
-          <a:p xmlns:a="http://schemas.openxmlformats.org/drawingml/2006/main"/>
-        </p:txBody>
-      </p:sp>
-      <p:sp>
-        <p:nvSpPr>
-          <p:cNvPr id="3" name="Date Placeholder 2">
-            <a:extLst xmlns:a="http://schemas.openxmlformats.org/drawingml/2006/main">
-              <a:ext uri="{FF2B5EF4-FFF2-40B4-BE49-F238E27FC236}">
-                <a16:creationId xmlns:a16="http://schemas.microsoft.com/office/drawing/2014/main" id="{E4B55D17-7BFB-4FF8-9035-B6FE85E03AB2}"/>
-              </a:ext>
-            </a:extLst>
-          </p:cNvPr>
-          <p:cNvSpPr/>
-          <p:nvPr>
-            <p:ph type="dt" idx="10"/>
-          </p:nvPr>
-        </p:nvSpPr>
-        <p:spPr/>
-        <p:txBody>
-          <a:bodyPr xmlns:a="http://schemas.openxmlformats.org/drawingml/2006/main"/>
-          <a:lstStyle xmlns:a="http://schemas.openxmlformats.org/drawingml/2006/main"/>
-          <a:p xmlns:a="http://schemas.openxmlformats.org/drawingml/2006/main"/>
-        </p:txBody>
-      </p:sp>
-      <p:sp>
-        <p:nvSpPr>
-          <p:cNvPr id="4" name="Footer Placeholder 3">
-            <a:extLst xmlns:a="http://schemas.openxmlformats.org/drawingml/2006/main">
-              <a:ext uri="{FF2B5EF4-FFF2-40B4-BE49-F238E27FC236}">
-                <a16:creationId xmlns:a16="http://schemas.microsoft.com/office/drawing/2014/main" id="{C10CF716-FD1C-42A4-B21D-376B600FFFF6}"/>
-              </a:ext>
-            </a:extLst>
-          </p:cNvPr>
-          <p:cNvSpPr/>
-          <p:nvPr>
-            <p:ph type="ftr" idx="11"/>
-          </p:nvPr>
-        </p:nvSpPr>
-        <p:spPr/>
-        <p:txBody>
-          <a:bodyPr xmlns:a="http://schemas.openxmlformats.org/drawingml/2006/main"/>
-          <a:lstStyle xmlns:a="http://schemas.openxmlformats.org/drawingml/2006/main"/>
-          <a:p xmlns:a="http://schemas.openxmlformats.org/drawingml/2006/main"/>
-        </p:txBody>
-      </p:sp>
-      <p:sp>
-        <p:nvSpPr>
-          <p:cNvPr id="5" name="Slide Number Placeholder 4">
-            <a:extLst xmlns:a="http://schemas.openxmlformats.org/drawingml/2006/main">
-              <a:ext uri="{FF2B5EF4-FFF2-40B4-BE49-F238E27FC236}">
-                <a16:creationId xmlns:a16="http://schemas.microsoft.com/office/drawing/2014/main" id="{6D2CAE4F-55CC-4AE5-8048-ED5C4411AC81}"/>
-              </a:ext>
-            </a:extLst>
-          </p:cNvPr>
-          <p:cNvSpPr/>
-          <p:nvPr>
-            <p:ph type="sldNum" idx="12"/>
-          </p:nvPr>
-        </p:nvSpPr>
-        <p:spPr/>
-        <p:txBody>
-          <a:bodyPr xmlns:a="http://schemas.openxmlformats.org/drawingml/2006/main"/>
-          <a:lstStyle xmlns:a="http://schemas.openxmlformats.org/drawingml/2006/main"/>
-          <a:p xmlns:a="http://schemas.openxmlformats.org/drawingml/2006/main"/>
-        </p:txBody>
-      </p:sp>
-    </p:spTree>
-  </p:cSld>
-</p:sldLayout>
-</file>
-
-<file path=ppt/slideLayouts/slideLayout8.xml><?xml version="1.0" encoding="utf-8"?>
-<p:sldLayout xmlns:p="http://schemas.openxmlformats.org/presentationml/2006/main" type="blank">
-  <p:cSld name="Blank">
-    <p:spTree>
-      <p:nvGrpSpPr>
-        <p:cNvPr id="1" name=""/>
-        <p:cNvGrpSpPr/>
-        <p:nvPr/>
-      </p:nvGrpSpPr>
-      <p:grpSpPr>
-        <a:xfrm xmlns:a="http://schemas.openxmlformats.org/drawingml/2006/main"/>
-      </p:grpSpPr>
-      <p:sp>
-        <p:nvSpPr>
-          <p:cNvPr id="2" name="Date Placeholder 1">
-            <a:extLst xmlns:a="http://schemas.openxmlformats.org/drawingml/2006/main">
-              <a:ext uri="{FF2B5EF4-FFF2-40B4-BE49-F238E27FC236}">
-                <a16:creationId xmlns:a16="http://schemas.microsoft.com/office/drawing/2014/main" id="{97AC856E-076B-4B24-9DBB-31B2D74ECC4F}"/>
-              </a:ext>
-            </a:extLst>
-          </p:cNvPr>
-          <p:cNvSpPr/>
-          <p:nvPr>
-            <p:ph type="dt" idx="10"/>
-          </p:nvPr>
-        </p:nvSpPr>
-        <p:spPr/>
-        <p:txBody>
-          <a:bodyPr xmlns:a="http://schemas.openxmlformats.org/drawingml/2006/main"/>
-          <a:lstStyle xmlns:a="http://schemas.openxmlformats.org/drawingml/2006/main"/>
-          <a:p xmlns:a="http://schemas.openxmlformats.org/drawingml/2006/main"/>
-        </p:txBody>
-      </p:sp>
-      <p:sp>
-        <p:nvSpPr>
-          <p:cNvPr id="3" name="Footer Placeholder 2">
-            <a:extLst xmlns:a="http://schemas.openxmlformats.org/drawingml/2006/main">
-              <a:ext uri="{FF2B5EF4-FFF2-40B4-BE49-F238E27FC236}">
-                <a16:creationId xmlns:a16="http://schemas.microsoft.com/office/drawing/2014/main" id="{BF760085-849F-4718-AFC0-16B6BD02F899}"/>
-              </a:ext>
-            </a:extLst>
-          </p:cNvPr>
-          <p:cNvSpPr/>
-          <p:nvPr>
-            <p:ph type="ftr" idx="11"/>
-          </p:nvPr>
-        </p:nvSpPr>
-        <p:spPr/>
-        <p:txBody>
-          <a:bodyPr xmlns:a="http://schemas.openxmlformats.org/drawingml/2006/main"/>
-          <a:lstStyle xmlns:a="http://schemas.openxmlformats.org/drawingml/2006/main"/>
-          <a:p xmlns:a="http://schemas.openxmlformats.org/drawingml/2006/main"/>
-        </p:txBody>
-      </p:sp>
-      <p:sp>
-        <p:nvSpPr>
-          <p:cNvPr id="4" name="Slide Number Placeholder 3">
-            <a:extLst xmlns:a="http://schemas.openxmlformats.org/drawingml/2006/main">
-              <a:ext uri="{FF2B5EF4-FFF2-40B4-BE49-F238E27FC236}">
-                <a16:creationId xmlns:a16="http://schemas.microsoft.com/office/drawing/2014/main" id="{E603517E-B94A-4EF2-B13C-F126426BA8B3}"/>
-              </a:ext>
-            </a:extLst>
-          </p:cNvPr>
-          <p:cNvSpPr/>
-          <p:nvPr>
-            <p:ph type="sldNum" idx="12"/>
-          </p:nvPr>
-        </p:nvSpPr>
-        <p:spPr/>
-        <p:txBody>
-          <a:bodyPr xmlns:a="http://schemas.openxmlformats.org/drawingml/2006/main"/>
-          <a:lstStyle xmlns:a="http://schemas.openxmlformats.org/drawingml/2006/main"/>
-          <a:p xmlns:a="http://schemas.openxmlformats.org/drawingml/2006/main"/>
-        </p:txBody>
-      </p:sp>
-    </p:spTree>
-  </p:cSld>
-</p:sldLayout>
-</file>
-
-<file path=ppt/slideLayouts/slideLayout9.xml><?xml version="1.0" encoding="utf-8"?>
-<p:sldLayout xmlns:p="http://schemas.openxmlformats.org/presentationml/2006/main" type="objTx">
-  <p:cSld name="Content with Caption">
-    <p:spTree>
-      <p:nvGrpSpPr>
-        <p:cNvPr id="1" name=""/>
-        <p:cNvGrpSpPr/>
-        <p:nvPr/>
-      </p:nvGrpSpPr>
-      <p:grpSpPr>
-        <a:xfrm xmlns:a="http://schemas.openxmlformats.org/drawingml/2006/main"/>
-      </p:grpSpPr>
-      <p:sp>
-        <p:nvSpPr>
-          <p:cNvPr id="2" name="Title 1">
-            <a:extLst xmlns:a="http://schemas.openxmlformats.org/drawingml/2006/main">
-              <a:ext uri="{FF2B5EF4-FFF2-40B4-BE49-F238E27FC236}">
-                <a16:creationId xmlns:a16="http://schemas.microsoft.com/office/drawing/2014/main" id="{D5CF1C79-5FB6-4089-B900-5E94E7D25ACA}"/>
-              </a:ext>
-            </a:extLst>
-          </p:cNvPr>
-          <p:cNvSpPr/>
-          <p:nvPr>
-            <p:ph type="title" idx="0"/>
-          </p:nvPr>
-        </p:nvSpPr>
-        <p:spPr>
-          <a:xfrm xmlns:a="http://schemas.openxmlformats.org/drawingml/2006/main">
-            <a:off x="457200" y="273050"/>
-            <a:ext cx="3008313" cy="1162050"/>
-          </a:xfrm>
-        </p:spPr>
-        <p:txBody>
-          <a:bodyPr xmlns:a="http://schemas.openxmlformats.org/drawingml/2006/main" anchor="b"/>
-          <a:lstStyle xmlns:a="http://schemas.openxmlformats.org/drawingml/2006/main">
-            <a:lvl1pPr algn="l">
-              <a:buNone/>
-              <a:defRPr sz="2000" b="1"/>
-            </a:lvl1pPr>
-          </a:lstStyle>
-          <a:p xmlns:a="http://schemas.openxmlformats.org/drawingml/2006/main"/>
-        </p:txBody>
-      </p:sp>
-      <p:sp>
-        <p:nvSpPr>
-          <p:cNvPr id="3" name="Content Placeholder 2">
-            <a:extLst xmlns:a="http://schemas.openxmlformats.org/drawingml/2006/main">
-              <a:ext uri="{FF2B5EF4-FFF2-40B4-BE49-F238E27FC236}">
-                <a16:creationId xmlns:a16="http://schemas.microsoft.com/office/drawing/2014/main" id="{3823D19A-ADA4-4AB3-8BF4-B5D950478ED9}"/>
-              </a:ext>
-            </a:extLst>
-          </p:cNvPr>
-          <p:cNvSpPr/>
-          <p:nvPr>
-            <p:ph idx="1"/>
-          </p:nvPr>
-        </p:nvSpPr>
-        <p:spPr>
-          <a:xfrm xmlns:a="http://schemas.openxmlformats.org/drawingml/2006/main">
-            <a:off x="3575050" y="273050"/>
-            <a:ext cx="5111750" cy="5853113"/>
-          </a:xfrm>
-        </p:spPr>
-        <p:txBody>
-          <a:bodyPr xmlns:a="http://schemas.openxmlformats.org/drawingml/2006/main"/>
-          <a:lstStyle xmlns:a="http://schemas.openxmlformats.org/drawingml/2006/main">
-            <a:lvl1pPr>
-              <a:buNone/>
-              <a:defRPr sz="3200"/>
-            </a:lvl1pPr>
-            <a:lvl2pPr>
-              <a:buNone/>
-              <a:defRPr sz="2800"/>
-            </a:lvl2pPr>
-            <a:lvl3pPr>
-              <a:buNone/>
-              <a:defRPr sz="2400"/>
-            </a:lvl3pPr>
-            <a:lvl4pPr>
-              <a:buNone/>
-              <a:defRPr sz="2000"/>
-            </a:lvl4pPr>
-            <a:lvl5pPr>
-              <a:buNone/>
-              <a:defRPr sz="2000"/>
-            </a:lvl5pPr>
-            <a:lvl6pPr>
-              <a:buNone/>
-              <a:defRPr sz="2000"/>
-            </a:lvl6pPr>
-            <a:lvl7pPr>
-              <a:buNone/>
-              <a:defRPr sz="2000"/>
-            </a:lvl7pPr>
-            <a:lvl8pPr>
-              <a:buNone/>
-              <a:defRPr sz="2000"/>
-            </a:lvl8pPr>
-            <a:lvl9pPr>
-              <a:buNone/>
-              <a:defRPr sz="2000"/>
-            </a:lvl9pPr>
-          </a:lstStyle>
-          <a:p xmlns:a="http://schemas.openxmlformats.org/drawingml/2006/main"/>
-        </p:txBody>
-      </p:sp>
-      <p:sp>
-        <p:nvSpPr>
-          <p:cNvPr id="4" name="Text Placeholder 3">
-            <a:extLst xmlns:a="http://schemas.openxmlformats.org/drawingml/2006/main">
-              <a:ext uri="{FF2B5EF4-FFF2-40B4-BE49-F238E27FC236}">
-                <a16:creationId xmlns:a16="http://schemas.microsoft.com/office/drawing/2014/main" id="{0F2ED1E5-F22B-4707-B361-A4C4FD15DDBE}"/>
-              </a:ext>
-            </a:extLst>
-          </p:cNvPr>
-          <p:cNvSpPr/>
-          <p:nvPr>
-            <p:ph type="body" idx="2"/>
-          </p:nvPr>
-        </p:nvSpPr>
-        <p:spPr>
-          <a:xfrm xmlns:a="http://schemas.openxmlformats.org/drawingml/2006/main">
-            <a:off x="457200" y="1435100"/>
-            <a:ext cx="3008313" cy="4691063"/>
-          </a:xfrm>
-        </p:spPr>
-        <p:txBody>
-          <a:bodyPr xmlns:a="http://schemas.openxmlformats.org/drawingml/2006/main"/>
-          <a:lstStyle xmlns:a="http://schemas.openxmlformats.org/drawingml/2006/main">
-            <a:lvl1pPr marL="0" indent="0">
-              <a:buNone/>
-              <a:defRPr sz="1400"/>
-            </a:lvl1pPr>
-            <a:lvl2pPr marL="457200" indent="0">
-              <a:buNone/>
-              <a:defRPr sz="1200"/>
-            </a:lvl2pPr>
-            <a:lvl3pPr marL="914400" indent="0">
-              <a:buNone/>
-              <a:defRPr sz="1000"/>
-            </a:lvl3pPr>
-            <a:lvl4pPr marL="1371600" indent="0">
-              <a:buNone/>
-              <a:defRPr sz="900"/>
-            </a:lvl4pPr>
-            <a:lvl5pPr marL="1828800" indent="0">
-              <a:buNone/>
-              <a:defRPr sz="900"/>
-            </a:lvl5pPr>
-            <a:lvl6pPr marL="2286000" indent="0">
-              <a:buNone/>
-              <a:defRPr sz="900"/>
-            </a:lvl6pPr>
-            <a:lvl7pPr marL="2743200" indent="0">
-              <a:buNone/>
-              <a:defRPr sz="900"/>
-            </a:lvl7pPr>
-            <a:lvl8pPr marL="3200400" indent="0">
-              <a:buNone/>
-              <a:defRPr sz="900"/>
-            </a:lvl8pPr>
-            <a:lvl9pPr marL="3657600" indent="0">
-              <a:buNone/>
-              <a:defRPr sz="900"/>
-            </a:lvl9pPr>
-          </a:lstStyle>
-          <a:p xmlns:a="http://schemas.openxmlformats.org/drawingml/2006/main"/>
-        </p:txBody>
-      </p:sp>
-      <p:sp>
-        <p:nvSpPr>
-          <p:cNvPr id="5" name="Date Placeholder 4">
-            <a:extLst xmlns:a="http://schemas.openxmlformats.org/drawingml/2006/main">
-              <a:ext uri="{FF2B5EF4-FFF2-40B4-BE49-F238E27FC236}">
-                <a16:creationId xmlns:a16="http://schemas.microsoft.com/office/drawing/2014/main" id="{819FC581-AD36-4FC7-8773-487F97205B81}"/>
-              </a:ext>
-            </a:extLst>
-          </p:cNvPr>
-          <p:cNvSpPr/>
-          <p:nvPr>
-            <p:ph type="dt" idx="10"/>
-          </p:nvPr>
-        </p:nvSpPr>
-        <p:spPr/>
-        <p:txBody>
-          <a:bodyPr xmlns:a="http://schemas.openxmlformats.org/drawingml/2006/main"/>
-          <a:lstStyle xmlns:a="http://schemas.openxmlformats.org/drawingml/2006/main"/>
-          <a:p xmlns:a="http://schemas.openxmlformats.org/drawingml/2006/main"/>
-        </p:txBody>
-      </p:sp>
-      <p:sp>
-        <p:nvSpPr>
-          <p:cNvPr id="6" name="Footer Placeholder 5">
-            <a:extLst xmlns:a="http://schemas.openxmlformats.org/drawingml/2006/main">
-              <a:ext uri="{FF2B5EF4-FFF2-40B4-BE49-F238E27FC236}">
-                <a16:creationId xmlns:a16="http://schemas.microsoft.com/office/drawing/2014/main" id="{027CFAD6-1823-4332-9071-39257D8A14C1}"/>
-              </a:ext>
-            </a:extLst>
-          </p:cNvPr>
-          <p:cNvSpPr/>
-          <p:nvPr>
-            <p:ph type="ftr" idx="11"/>
-          </p:nvPr>
-        </p:nvSpPr>
-        <p:spPr/>
-        <p:txBody>
-          <a:bodyPr xmlns:a="http://schemas.openxmlformats.org/drawingml/2006/main"/>
-          <a:lstStyle xmlns:a="http://schemas.openxmlformats.org/drawingml/2006/main"/>
-          <a:p xmlns:a="http://schemas.openxmlformats.org/drawingml/2006/main"/>
-        </p:txBody>
-      </p:sp>
-      <p:sp>
-        <p:nvSpPr>
-          <p:cNvPr id="7" name="Slide Number Placeholder 6">
-            <a:extLst xmlns:a="http://schemas.openxmlformats.org/drawingml/2006/main">
-              <a:ext uri="{FF2B5EF4-FFF2-40B4-BE49-F238E27FC236}">
-                <a16:creationId xmlns:a16="http://schemas.microsoft.com/office/drawing/2014/main" id="{5AF4BD73-D22C-4C72-9550-74A7B0D396E0}"/>
-              </a:ext>
-            </a:extLst>
-          </p:cNvPr>
-          <p:cNvSpPr/>
+          <p:cNvSpPr>
+            <a:spLocks xmlns:a="http://schemas.openxmlformats.org/drawingml/2006/main" noGrp="1"/>
+          </p:cNvSpPr>
           <p:nvPr>
             <p:ph type="sldNum" idx="12"/>
           </p:nvPr>
@@ -4050,7 +4584,9 @@
               </a:ext>
             </a:extLst>
           </p:cNvPr>
-          <p:cNvSpPr/>
+          <p:cNvSpPr>
+            <a:spLocks xmlns:a="http://schemas.openxmlformats.org/drawingml/2006/main" noGrp="1"/>
+          </p:cNvSpPr>
           <p:nvPr>
             <p:ph type="title" idx="0"/>
           </p:nvPr>
@@ -4081,7 +4617,9 @@
               </a:ext>
             </a:extLst>
           </p:cNvPr>
-          <p:cNvSpPr/>
+          <p:cNvSpPr>
+            <a:spLocks xmlns:a="http://schemas.openxmlformats.org/drawingml/2006/main" noGrp="1"/>
+          </p:cNvSpPr>
           <p:nvPr>
             <p:ph type="body" idx="1"/>
           </p:nvPr>
@@ -4112,7 +4650,9 @@
               </a:ext>
             </a:extLst>
           </p:cNvPr>
-          <p:cNvSpPr/>
+          <p:cNvSpPr>
+            <a:spLocks xmlns:a="http://schemas.openxmlformats.org/drawingml/2006/main" noGrp="1"/>
+          </p:cNvSpPr>
           <p:nvPr>
             <p:ph type="dt" idx="2"/>
           </p:nvPr>
@@ -4152,7 +4692,9 @@
               </a:ext>
             </a:extLst>
           </p:cNvPr>
-          <p:cNvSpPr/>
+          <p:cNvSpPr>
+            <a:spLocks xmlns:a="http://schemas.openxmlformats.org/drawingml/2006/main" noGrp="1"/>
+          </p:cNvSpPr>
           <p:nvPr>
             <p:ph type="ftr" idx="3"/>
           </p:nvPr>
@@ -4192,7 +4734,9 @@
               </a:ext>
             </a:extLst>
           </p:cNvPr>
-          <p:cNvSpPr/>
+          <p:cNvSpPr>
+            <a:spLocks xmlns:a="http://schemas.openxmlformats.org/drawingml/2006/main" noGrp="1"/>
+          </p:cNvSpPr>
           <p:nvPr>
             <p:ph type="sldNum" idx="4"/>
           </p:nvPr>
@@ -4227,17 +4771,17 @@
   </p:cSld>
   <p:clrMap bg1="lt1" tx1="dk1" bg2="lt2" tx2="dk2" accent1="accent1" accent2="accent2" accent3="accent3" accent4="accent4" accent5="accent5" accent6="accent6" hlink="hlink" folHlink="folHlink"/>
   <p:sldLayoutIdLst>
-    <p:sldLayoutId xmlns:r="http://schemas.openxmlformats.org/officeDocument/2006/relationships" id="2147483649" r:id="R47d44a3a1c85434d"/>
-    <p:sldLayoutId xmlns:r="http://schemas.openxmlformats.org/officeDocument/2006/relationships" id="2147483650" r:id="Rbe7b1e62856e4f69"/>
-    <p:sldLayoutId xmlns:r="http://schemas.openxmlformats.org/officeDocument/2006/relationships" id="2147483651" r:id="R58b0f894269a4092"/>
-    <p:sldLayoutId xmlns:r="http://schemas.openxmlformats.org/officeDocument/2006/relationships" id="2147483652" r:id="Rf999bc46c1a343cd"/>
-    <p:sldLayoutId xmlns:r="http://schemas.openxmlformats.org/officeDocument/2006/relationships" id="2147483653" r:id="Rce1d092ca5ff4596"/>
-    <p:sldLayoutId xmlns:r="http://schemas.openxmlformats.org/officeDocument/2006/relationships" id="2147483654" r:id="R514479435d424abc"/>
-    <p:sldLayoutId xmlns:r="http://schemas.openxmlformats.org/officeDocument/2006/relationships" id="2147483655" r:id="R4da9a6d12cbc4930"/>
-    <p:sldLayoutId xmlns:r="http://schemas.openxmlformats.org/officeDocument/2006/relationships" id="2147483656" r:id="Rc17f8104584241eb"/>
-    <p:sldLayoutId xmlns:r="http://schemas.openxmlformats.org/officeDocument/2006/relationships" id="2147483657" r:id="R98c501a99aab42c7"/>
-    <p:sldLayoutId xmlns:r="http://schemas.openxmlformats.org/officeDocument/2006/relationships" id="2147483658" r:id="R388d0c2478bd42ba"/>
-    <p:sldLayoutId xmlns:r="http://schemas.openxmlformats.org/officeDocument/2006/relationships" id="2147483659" r:id="R0a9ae69493de4e85"/>
+    <p:sldLayoutId xmlns:r="http://schemas.openxmlformats.org/officeDocument/2006/relationships" id="2147483649" r:id="R0cab71ac26bd4104"/>
+    <p:sldLayoutId xmlns:r="http://schemas.openxmlformats.org/officeDocument/2006/relationships" id="2147483650" r:id="Rf14435d87e8040e4"/>
+    <p:sldLayoutId xmlns:r="http://schemas.openxmlformats.org/officeDocument/2006/relationships" id="2147483651" r:id="Rc31ce51b7adc4f2f"/>
+    <p:sldLayoutId xmlns:r="http://schemas.openxmlformats.org/officeDocument/2006/relationships" id="2147483652" r:id="Reed6145135c34caa"/>
+    <p:sldLayoutId xmlns:r="http://schemas.openxmlformats.org/officeDocument/2006/relationships" id="2147483653" r:id="Rcb54c0a9653c49cc"/>
+    <p:sldLayoutId xmlns:r="http://schemas.openxmlformats.org/officeDocument/2006/relationships" id="2147483654" r:id="R3150022f267348ba"/>
+    <p:sldLayoutId xmlns:r="http://schemas.openxmlformats.org/officeDocument/2006/relationships" id="2147483655" r:id="R197b99d4f0a94d41"/>
+    <p:sldLayoutId xmlns:r="http://schemas.openxmlformats.org/officeDocument/2006/relationships" id="2147483656" r:id="Re9a382b0faec4094"/>
+    <p:sldLayoutId xmlns:r="http://schemas.openxmlformats.org/officeDocument/2006/relationships" id="2147483657" r:id="Rb921f91d9f9a4c2b"/>
+    <p:sldLayoutId xmlns:r="http://schemas.openxmlformats.org/officeDocument/2006/relationships" id="2147483658" r:id="Rd9619a162f18423c"/>
+    <p:sldLayoutId xmlns:r="http://schemas.openxmlformats.org/officeDocument/2006/relationships" id="2147483659" r:id="Rd936a5434f154c61"/>
   </p:sldLayoutIdLst>
   <p:txStyles>
     <p:titleStyle>
@@ -4489,6 +5033,238 @@
 </p:sldMaster>
 </file>
 
+<file path=ppt/slideMasters/theme/theme2.xml><?xml version="1.0" encoding="utf-8"?>
+<a:theme xmlns:a="http://schemas.openxmlformats.org/drawingml/2006/main" name="Office">
+  <a:themeElements>
+    <a:clrScheme name="Office">
+      <a:dk1>
+        <a:sysClr val="windowText" lastClr="000000"/>
+      </a:dk1>
+      <a:lt1>
+        <a:sysClr val="window" lastClr="FFFFFF"/>
+      </a:lt1>
+      <a:dk2>
+        <a:srgbClr val="1F497D"/>
+      </a:dk2>
+      <a:lt2>
+        <a:srgbClr val="EEECE1"/>
+      </a:lt2>
+      <a:accent1>
+        <a:srgbClr val="4F81BD"/>
+      </a:accent1>
+      <a:accent2>
+        <a:srgbClr val="C0504D"/>
+      </a:accent2>
+      <a:accent3>
+        <a:srgbClr val="9BBB59"/>
+      </a:accent3>
+      <a:accent4>
+        <a:srgbClr val="8064A2"/>
+      </a:accent4>
+      <a:accent5>
+        <a:srgbClr val="4BACC6"/>
+      </a:accent5>
+      <a:accent6>
+        <a:srgbClr val="F79646"/>
+      </a:accent6>
+      <a:hlink>
+        <a:srgbClr val="0000FF"/>
+      </a:hlink>
+      <a:folHlink>
+        <a:srgbClr val="800080"/>
+      </a:folHlink>
+    </a:clrScheme>
+    <a:fontScheme name="Office">
+      <a:majorFont>
+        <a:latin typeface="Calibri"/>
+        <a:ea typeface=""/>
+        <a:cs typeface=""/>
+        <a:font script="Jpan" typeface="ＭＳ Ｐゴシック"/>
+        <a:font script="Hang" typeface="맑은 고딕"/>
+        <a:font script="Hans" typeface="宋体"/>
+        <a:font script="Hant" typeface="新細明體"/>
+        <a:font script="Arab" typeface="Times New Roman"/>
+        <a:font script="Hebr" typeface="Times New Roman"/>
+        <a:font script="Thai" typeface="Angsana New"/>
+        <a:font script="Ethi" typeface="Nyala"/>
+        <a:font script="Beng" typeface="Vrinda"/>
+        <a:font script="Gujr" typeface="Shruti"/>
+        <a:font script="Khmr" typeface="MoolBoran"/>
+        <a:font script="Knda" typeface="Tunga"/>
+        <a:font script="Guru" typeface="Raavi"/>
+        <a:font script="Cans" typeface="Euphemia"/>
+        <a:font script="Cher" typeface="Plantagenet Cherokee"/>
+        <a:font script="Yiii" typeface="Microsoft Yi Baiti"/>
+        <a:font script="Tibt" typeface="Microsoft Himalaya"/>
+        <a:font script="Thaa" typeface="MV Boli"/>
+        <a:font script="Deva" typeface="Mangal"/>
+        <a:font script="Telu" typeface="Gautami"/>
+        <a:font script="Taml" typeface="Latha"/>
+        <a:font script="Syrc" typeface="Estrangelo Edessa"/>
+        <a:font script="Orya" typeface="Kalinga"/>
+        <a:font script="Mlym" typeface="Kartika"/>
+        <a:font script="Laoo" typeface="DokChampa"/>
+        <a:font script="Sinh" typeface="Iskoola Pota"/>
+        <a:font script="Mong" typeface="Mongolian Baiti"/>
+        <a:font script="Viet" typeface="Times New Roman"/>
+        <a:font script="Uigh" typeface="Microsoft Uighur"/>
+        <a:font script="Geor" typeface="Sylfaen"/>
+      </a:majorFont>
+      <a:minorFont>
+        <a:latin typeface="Calibri"/>
+        <a:ea typeface=""/>
+        <a:cs typeface=""/>
+        <a:font script="Jpan" typeface="ＭＳ Ｐゴシック"/>
+        <a:font script="Hang" typeface="맑은 고딕"/>
+        <a:font script="Hans" typeface="宋体"/>
+        <a:font script="Hant" typeface="新細明體"/>
+        <a:font script="Arab" typeface="Arial"/>
+        <a:font script="Hebr" typeface="Arial"/>
+        <a:font script="Thai" typeface="Cordia New"/>
+        <a:font script="Ethi" typeface="Nyala"/>
+        <a:font script="Beng" typeface="Vrinda"/>
+        <a:font script="Gujr" typeface="Shruti"/>
+        <a:font script="Khmr" typeface="DaunPenh"/>
+        <a:font script="Knda" typeface="Tunga"/>
+        <a:font script="Guru" typeface="Raavi"/>
+        <a:font script="Cans" typeface="Euphemia"/>
+        <a:font script="Cher" typeface="Plantagenet Cherokee"/>
+        <a:font script="Yiii" typeface="Microsoft Yi Baiti"/>
+        <a:font script="Tibt" typeface="Microsoft Himalaya"/>
+        <a:font script="Thaa" typeface="MV Boli"/>
+        <a:font script="Deva" typeface="Mangal"/>
+        <a:font script="Telu" typeface="Gautami"/>
+        <a:font script="Taml" typeface="Latha"/>
+        <a:font script="Syrc" typeface="Estrangelo Edessa"/>
+        <a:font script="Orya" typeface="Kalinga"/>
+        <a:font script="Mlym" typeface="Kartika"/>
+        <a:font script="Laoo" typeface="DokChampa"/>
+        <a:font script="Sinh" typeface="Iskoola Pota"/>
+        <a:font script="Mong" typeface="Mongolian Baiti"/>
+        <a:font script="Viet" typeface="Arial"/>
+        <a:font script="Uigh" typeface="Microsoft Uighur"/>
+        <a:font script="Geor" typeface="Sylfaen"/>
+      </a:minorFont>
+    </a:fontScheme>
+    <a:fmtScheme name="Office">
+      <a:fillStyleLst>
+        <a:solidFill>
+          <a:schemeClr val="phClr"/>
+        </a:solidFill>
+        <a:solidFill>
+          <a:schemeClr val="dk1"/>
+        </a:solidFill>
+        <a:solidFill>
+          <a:schemeClr val="accent1"/>
+        </a:solidFill>
+      </a:fillStyleLst>
+      <a:lnStyleLst>
+        <a:ln w="9525">
+          <a:solidFill>
+            <a:schemeClr val="phClr">
+              <a:shade val="95000"/>
+              <a:satMod val="105000"/>
+            </a:schemeClr>
+          </a:solidFill>
+          <a:prstDash val="solid"/>
+        </a:ln>
+        <a:ln w="25400">
+          <a:solidFill>
+            <a:schemeClr val="phClr"/>
+          </a:solidFill>
+          <a:prstDash val="solid"/>
+        </a:ln>
+        <a:ln w="38100">
+          <a:solidFill>
+            <a:schemeClr val="phClr"/>
+          </a:solidFill>
+          <a:prstDash val="solid"/>
+        </a:ln>
+      </a:lnStyleLst>
+      <a:effectStyleLst>
+        <a:effectStyle>
+          <a:effectLst>
+            <a:outerShdw blurRad="40000" dist="20000" dir="5400000" rotWithShape="0">
+              <a:srgbClr val="000000">
+                <a:alpha val="38000"/>
+              </a:srgbClr>
+            </a:outerShdw>
+          </a:effectLst>
+        </a:effectStyle>
+        <a:effectStyle>
+          <a:effectLst>
+            <a:outerShdw blurRad="40000" dist="23000" dir="5400000" rotWithShape="0">
+              <a:srgbClr val="000000">
+                <a:alpha val="35000"/>
+              </a:srgbClr>
+            </a:outerShdw>
+          </a:effectLst>
+        </a:effectStyle>
+        <a:effectStyle>
+          <a:effectLst>
+            <a:outerShdw blurRad="40000" dist="23000" dir="5400000" rotWithShape="0">
+              <a:srgbClr val="000000">
+                <a:alpha val="35000"/>
+              </a:srgbClr>
+            </a:outerShdw>
+          </a:effectLst>
+        </a:effectStyle>
+      </a:effectStyleLst>
+      <a:bgFillStyleLst>
+        <a:solidFill>
+          <a:schemeClr val="phClr"/>
+        </a:solidFill>
+        <a:gradFill>
+          <a:gsLst>
+            <a:gs pos="0">
+              <a:schemeClr val="phClr">
+                <a:tint val="40000"/>
+                <a:satMod val="350000"/>
+              </a:schemeClr>
+            </a:gs>
+            <a:gs pos="40000">
+              <a:schemeClr val="phClr">
+                <a:tint val="45000"/>
+                <a:shade val="99000"/>
+                <a:satMod val="350000"/>
+              </a:schemeClr>
+            </a:gs>
+            <a:gs pos="100000">
+              <a:schemeClr val="phClr">
+                <a:shade val="20000"/>
+                <a:satMod val="255000"/>
+              </a:schemeClr>
+            </a:gs>
+          </a:gsLst>
+          <a:path path="circle">
+            <a:fillToRect l="50000" t="-80000" r="50000" b="180000"/>
+          </a:path>
+        </a:gradFill>
+        <a:gradFill>
+          <a:gsLst>
+            <a:gs pos="0">
+              <a:schemeClr val="phClr">
+                <a:tint val="80000"/>
+                <a:satMod val="300000"/>
+              </a:schemeClr>
+            </a:gs>
+            <a:gs pos="100000">
+              <a:schemeClr val="phClr">
+                <a:shade val="30000"/>
+                <a:satMod val="200000"/>
+              </a:schemeClr>
+            </a:gs>
+          </a:gsLst>
+          <a:path path="circle">
+            <a:fillToRect l="50000" t="50000" r="50000" b="50000"/>
+          </a:path>
+        </a:gradFill>
+      </a:bgFillStyleLst>
+    </a:fmtScheme>
+  </a:themeElements>
+</a:theme>
+</file>
+
 <file path=ppt/slides/slide1.xml><?xml version="1.0" encoding="utf-8"?>
 <p:sld xmlns:p="http://schemas.openxmlformats.org/presentationml/2006/main">
   <p:cSld>
@@ -4522,7 +5298,9 @@
           <a:bodyPr xmlns:a="http://schemas.openxmlformats.org/drawingml/2006/main"/>
           <a:lstStyle xmlns:a="http://schemas.openxmlformats.org/drawingml/2006/main"/>
           <a:p xmlns:a="http://schemas.openxmlformats.org/drawingml/2006/main">
-            <a:pPr algn="ctr"/>
+            <a:pPr algn="ctr">
+              <a:buNone/>
+            </a:pPr>
             <a:r>
               <a:rPr sz="2850" b="1">
                 <a:solidFill>
@@ -4532,7 +5310,7 @@
                 <a:ea typeface="Arial"/>
                 <a:cs typeface="Arial"/>
               </a:rPr>
-              <a:t>rUTI Clinical-to-Genomic Analysis: Current UTI / Not_UTI Evidence</a:t>
+              <a:t>rUTI Clinical-to-Genomic Analysis: Longcycler-Only Operational UTI Evidence</a:t>
             </a:r>
           </a:p>
         </p:txBody>
@@ -4558,7 +5336,9 @@
           <a:bodyPr xmlns:a="http://schemas.openxmlformats.org/drawingml/2006/main"/>
           <a:lstStyle xmlns:a="http://schemas.openxmlformats.org/drawingml/2006/main"/>
           <a:p xmlns:a="http://schemas.openxmlformats.org/drawingml/2006/main">
-            <a:pPr algn="ctr"/>
+            <a:pPr algn="ctr">
+              <a:buNone/>
+            </a:pPr>
             <a:r>
               <a:rPr sz="1500">
                 <a:solidFill>
@@ -4568,7 +5348,7 @@
                 <a:ea typeface="Arial"/>
                 <a:cs typeface="Arial"/>
               </a:rPr>
-              <a:t>Do strains persist? What changes when symptoms emerge? What can sparse UTI events support? | Scientific review and handover</a:t>
+              <a:t>Selected cohort: 532 episodes from 161 residents | RQ01-RQ10 scientific review and handover</a:t>
             </a:r>
           </a:p>
         </p:txBody>
@@ -4629,7 +5409,7 @@
                 <a:ea typeface="Arial"/>
                 <a:cs typeface="Arial"/>
               </a:rPr>
-              <a:t>Population-level VF findings remain exploratory under sparse UTI counts</a:t>
+              <a:t>Population-level VF analysis remains exploratory with 16 operational UTI episodes</a:t>
             </a:r>
           </a:p>
         </p:txBody>
@@ -4673,25 +5453,25 @@
                 <a:ea typeface="Arial"/>
                 <a:cs typeface="Arial"/>
               </a:rPr>
-              <a:t>EXPLORATORY | No global VF association remains significant after FDR correction; 17 VF-ready UTI episodes.</a:t>
+              <a:t>EXPLORATORY | Participant-aware models and robustness panels are descriptive and do not support causal inference.</a:t>
             </a:r>
           </a:p>
         </p:txBody>
       </p:sp>
       <p:pic>
         <p:nvPicPr>
-          <p:cNvPr id="6" name=""/>
+          <p:cNvPr id="9" name=""/>
           <p:cNvPicPr>
             <a:picLocks xmlns:a="http://schemas.openxmlformats.org/drawingml/2006/main" noChangeAspect="1"/>
           </p:cNvPicPr>
           <p:nvPr/>
         </p:nvPicPr>
         <p:blipFill>
-          <a:blip xmlns:r="http://schemas.openxmlformats.org/officeDocument/2006/relationships" xmlns:a="http://schemas.openxmlformats.org/drawingml/2006/main" r:embed="Raef8f9736cd04c8b"/>
+          <a:blip xmlns:r="http://schemas.openxmlformats.org/officeDocument/2006/relationships" xmlns:a="http://schemas.openxmlformats.org/drawingml/2006/main" r:embed="R00229c0d9af544cf"/>
           <a:stretch xmlns:a="http://schemas.openxmlformats.org/drawingml/2006/main"/>
         </p:blipFill>
         <p:spPr>
-          <a:xfrm xmlns:a="http://schemas.openxmlformats.org/drawingml/2006/main">
+          <a:xfrm xmlns:a="http://schemas.openxmlformats.org/drawingml/2006/main" flipH="0" flipV="0">
             <a:off x="841375" y="1524000"/>
             <a:ext cx="7461250" cy="4476750"/>
           </a:xfrm>
@@ -4795,7 +5575,7 @@
                 <a:ea typeface="Arial"/>
                 <a:cs typeface="Arial"/>
               </a:rPr>
-              <a:t>DESCRIPTIVE TRANSITION EVIDENCE</a:t>
+              <a:t>DESCRIPTIVE DIRECT EVIDENCE</a:t>
             </a:r>
           </a:p>
           <a:p xmlns:a="http://schemas.openxmlformats.org/drawingml/2006/main">
@@ -4812,7 +5592,7 @@
                 <a:ea typeface="Arial"/>
                 <a:cs typeface="Arial"/>
               </a:rPr>
-              <a:t>11 clinical Not_UTI-to-UTI transitions; 10 have WGS/VF endpoints.</a:t>
+              <a:t>893 within-resident pairs; 371 adjacent pairs from 139 residents.</a:t>
             </a:r>
           </a:p>
           <a:p xmlns:a="http://schemas.openxmlformats.org/drawingml/2006/main">
@@ -4829,7 +5609,7 @@
                 <a:ea typeface="Arial"/>
                 <a:cs typeface="Arial"/>
               </a:rPr>
-              <a:t>Four stable-profile cases and three replacement-consistent cases shape the biological story.</a:t>
+              <a:t>140/371 adjacent pairs and 5/9 focused pairs are &lt;=25 SNPs.</a:t>
             </a:r>
           </a:p>
           <a:p xmlns:a="http://schemas.openxmlformats.org/drawingml/2006/main">
@@ -4838,7 +5618,7 @@
               <a:defRPr sz="2400"/>
             </a:pPr>
             <a:r>
-              <a:t/>
+              <a:t>Casebook: 9/9/0 cases/linked/missing.</a:t>
             </a:r>
           </a:p>
           <a:p xmlns:a="http://schemas.openxmlformats.org/drawingml/2006/main">
@@ -4855,7 +5635,7 @@
                 <a:ea typeface="Arial"/>
                 <a:cs typeface="Arial"/>
               </a:rPr>
-              <a:t>EXPLORATORY POPULATION EVIDENCE</a:t>
+              <a:t/>
             </a:r>
           </a:p>
           <a:p xmlns:a="http://schemas.openxmlformats.org/drawingml/2006/main">
@@ -4872,7 +5652,7 @@
                 <a:ea typeface="Arial"/>
                 <a:cs typeface="Arial"/>
               </a:rPr>
-              <a:t>No FDR-significant global VF association; sparse UTI counts constrain precision.</a:t>
+              <a:t>EXPLORATORY POPULATION EVIDENCE</a:t>
             </a:r>
           </a:p>
           <a:p xmlns:a="http://schemas.openxmlformats.org/drawingml/2006/main">
@@ -4889,7 +5669,24 @@
                 <a:ea typeface="Arial"/>
                 <a:cs typeface="Arial"/>
               </a:rPr>
-              <a:t>Sensitivity panels diagnose fragility rather than confirm association.</a:t>
+              <a:t>16 operational UTI episodes constrain precision.</a:t>
+            </a:r>
+          </a:p>
+          <a:p xmlns:a="http://schemas.openxmlformats.org/drawingml/2006/main">
+            <a:pPr algn="l">
+              <a:buNone/>
+              <a:defRPr sz="2400"/>
+            </a:pPr>
+            <a:r>
+              <a:rPr sz="1425">
+                <a:solidFill>
+                  <a:srgbClr val="162832"/>
+                </a:solidFill>
+                <a:latin typeface="Arial"/>
+                <a:ea typeface="Arial"/>
+                <a:cs typeface="Arial"/>
+              </a:rPr>
+              <a:t>17 near-miss rows remain sensitivity-only; RQ01-RQ10 reports guardrails.</a:t>
             </a:r>
           </a:p>
         </p:txBody>
@@ -5006,7 +5803,7 @@
                 <a:ea typeface="Arial"/>
                 <a:cs typeface="Arial"/>
               </a:rPr>
-              <a:t>Stable measured strain profiles can accompany symptom emergence.</a:t>
+              <a:t>Direct genomic distance can identify close and distant clinical transitions.</a:t>
             </a:r>
           </a:p>
           <a:p xmlns:a="http://schemas.openxmlformats.org/drawingml/2006/main">
@@ -5074,7 +5871,7 @@
                 <a:ea typeface="Arial"/>
                 <a:cs typeface="Arial"/>
               </a:rPr>
-              <a:t>18 clinical UTI episodes; 17 VF-ready UTI episodes; one transition missing genomic endpoint.</a:t>
+              <a:t>16 operational UTI episodes; observational design; sparse outcome.</a:t>
             </a:r>
           </a:p>
           <a:p xmlns:a="http://schemas.openxmlformats.org/drawingml/2006/main">
@@ -5091,7 +5888,7 @@
                 <a:ea typeface="Arial"/>
                 <a:cs typeface="Arial"/>
               </a:rPr>
-              <a:t>Repeated measures and missing endpoints restrict population-level inference.</a:t>
+              <a:t>All 9 focused transitions are linked, but repeated measures restrict population-level inference.</a:t>
             </a:r>
           </a:p>
         </p:txBody>
@@ -5191,7 +5988,7 @@
                 <a:ea typeface="Arial"/>
                 <a:cs typeface="Arial"/>
               </a:rPr>
-              <a:t>EVIDENCE | Preserve the transition-focused biological narrative.</a:t>
+              <a:t>EVIDENCE | Preserve the direct-pair and transition-focused narrative.</a:t>
             </a:r>
           </a:p>
           <a:p xmlns:a="http://schemas.openxmlformats.org/drawingml/2006/main">
@@ -5208,7 +6005,7 @@
                 <a:ea typeface="Arial"/>
                 <a:cs typeface="Arial"/>
               </a:rPr>
-              <a:t>NEXT ANALYSIS | Prioritise within-strain follow-up and clinically grounded host/context variables.</a:t>
+              <a:t>NEXT ANALYSIS | Prioritise close within-strain pairs and clinically grounded host/context variables.</a:t>
             </a:r>
           </a:p>
           <a:p xmlns:a="http://schemas.openxmlformats.org/drawingml/2006/main">
@@ -5225,7 +6022,7 @@
                 <a:ea typeface="Arial"/>
                 <a:cs typeface="Arial"/>
               </a:rPr>
-              <a:t>DESIGN | Analyse replacement separately from possible symptom emergence within strain.</a:t>
+              <a:t>DESIGN | Analyse distant replacement-consistent pairs separately.</a:t>
             </a:r>
           </a:p>
           <a:p xmlns:a="http://schemas.openxmlformats.org/drawingml/2006/main">
@@ -5242,7 +6039,7 @@
                 <a:ea typeface="Arial"/>
                 <a:cs typeface="Arial"/>
               </a:rPr>
-              <a:t>REPORTING | Keep global VF analysis exploratory; keep AMR as transition context only.</a:t>
+              <a:t>REPORTING | Keep VF and AMR results exploratory; use RQ01-RQ10 as the release index.</a:t>
             </a:r>
           </a:p>
           <a:p xmlns:a="http://schemas.openxmlformats.org/drawingml/2006/main">
@@ -5336,18 +6133,18 @@
       </p:sp>
       <p:pic>
         <p:nvPicPr>
-          <p:cNvPr id="3" name=""/>
+          <p:cNvPr id="12" name=""/>
           <p:cNvPicPr>
             <a:picLocks xmlns:a="http://schemas.openxmlformats.org/drawingml/2006/main" noChangeAspect="1"/>
           </p:cNvPicPr>
           <p:nvPr/>
         </p:nvPicPr>
         <p:blipFill>
-          <a:blip xmlns:r="http://schemas.openxmlformats.org/officeDocument/2006/relationships" xmlns:a="http://schemas.openxmlformats.org/drawingml/2006/main" r:embed="R8defff8009454076"/>
+          <a:blip xmlns:r="http://schemas.openxmlformats.org/officeDocument/2006/relationships" xmlns:a="http://schemas.openxmlformats.org/drawingml/2006/main" r:embed="Rbb66cf6271124b00"/>
           <a:stretch xmlns:a="http://schemas.openxmlformats.org/drawingml/2006/main"/>
         </p:blipFill>
         <p:spPr>
-          <a:xfrm xmlns:a="http://schemas.openxmlformats.org/drawingml/2006/main">
+          <a:xfrm xmlns:a="http://schemas.openxmlformats.org/drawingml/2006/main" flipH="0" flipV="0">
             <a:off x="647700" y="1524000"/>
             <a:ext cx="7848600" cy="4991100"/>
           </a:xfrm>
@@ -5356,6 +6153,536 @@
           </a:prstGeom>
         </p:spPr>
       </p:pic>
+      <p:sp>
+        <p:nvSpPr>
+          <p:cNvPr id="4" name="lc-native-connector-1">
+            <a:extLst xmlns:a="http://schemas.openxmlformats.org/drawingml/2006/main">
+              <a:ext uri="{FF2B5EF4-FFF2-40B4-BE49-F238E27FC236}">
+                <a16:creationId xmlns:a16="http://schemas.microsoft.com/office/drawing/2014/main" id="{58347019-C859-4625-B2DF-30A3DFCD3569}"/>
+              </a:ext>
+            </a:extLst>
+          </p:cNvPr>
+          <p:cNvSpPr>
+            <a:spLocks xmlns:a="http://schemas.openxmlformats.org/drawingml/2006/main" noGrp="1"/>
+          </p:cNvSpPr>
+          <p:nvPr/>
+        </p:nvSpPr>
+        <p:spPr>
+          <a:xfrm xmlns:a="http://schemas.openxmlformats.org/drawingml/2006/main">
+            <a:off x="3181350" y="2952750"/>
+            <a:ext cx="257175" cy="228600"/>
+          </a:xfrm>
+          <a:prstGeom xmlns:a="http://schemas.openxmlformats.org/drawingml/2006/main" prst="rightArrow">
+            <a:avLst/>
+          </a:prstGeom>
+          <a:solidFill xmlns:a="http://schemas.openxmlformats.org/drawingml/2006/main">
+            <a:srgbClr val="7B8B95"/>
+          </a:solidFill>
+          <a:ln xmlns:a="http://schemas.openxmlformats.org/drawingml/2006/main" w="0">
+            <a:noFill/>
+            <a:prstDash val="solid"/>
+          </a:ln>
+        </p:spPr>
+      </p:sp>
+      <p:sp>
+        <p:nvSpPr>
+          <p:cNvPr id="5" name="lc-native-connector-2">
+            <a:extLst xmlns:a="http://schemas.openxmlformats.org/drawingml/2006/main">
+              <a:ext uri="{FF2B5EF4-FFF2-40B4-BE49-F238E27FC236}">
+                <a16:creationId xmlns:a16="http://schemas.microsoft.com/office/drawing/2014/main" id="{17744A79-2139-4D2D-926A-EE09A891B528}"/>
+              </a:ext>
+            </a:extLst>
+          </p:cNvPr>
+          <p:cNvSpPr>
+            <a:spLocks xmlns:a="http://schemas.openxmlformats.org/drawingml/2006/main" noGrp="1"/>
+          </p:cNvSpPr>
+          <p:nvPr/>
+        </p:nvSpPr>
+        <p:spPr>
+          <a:xfrm xmlns:a="http://schemas.openxmlformats.org/drawingml/2006/main">
+            <a:off x="5715000" y="2952750"/>
+            <a:ext cx="247650" cy="228600"/>
+          </a:xfrm>
+          <a:prstGeom xmlns:a="http://schemas.openxmlformats.org/drawingml/2006/main" prst="rightArrow">
+            <a:avLst/>
+          </a:prstGeom>
+          <a:solidFill xmlns:a="http://schemas.openxmlformats.org/drawingml/2006/main">
+            <a:srgbClr val="7B8B95"/>
+          </a:solidFill>
+          <a:ln xmlns:a="http://schemas.openxmlformats.org/drawingml/2006/main" w="0">
+            <a:noFill/>
+            <a:prstDash val="solid"/>
+          </a:ln>
+        </p:spPr>
+      </p:sp>
+      <p:sp>
+        <p:nvSpPr>
+          <p:cNvPr id="6" name="lc-native-registry">
+            <a:extLst xmlns:a="http://schemas.openxmlformats.org/drawingml/2006/main">
+              <a:ext uri="{FF2B5EF4-FFF2-40B4-BE49-F238E27FC236}">
+                <a16:creationId xmlns:a16="http://schemas.microsoft.com/office/drawing/2014/main" id="{8549AD7B-1D1B-4154-8CF5-E5BBEDA82283}"/>
+              </a:ext>
+            </a:extLst>
+          </p:cNvPr>
+          <p:cNvSpPr>
+            <a:spLocks xmlns:a="http://schemas.openxmlformats.org/drawingml/2006/main" noGrp="1"/>
+          </p:cNvSpPr>
+          <p:nvPr/>
+        </p:nvSpPr>
+        <p:spPr>
+          <a:xfrm xmlns:a="http://schemas.openxmlformats.org/drawingml/2006/main">
+            <a:off x="1000125" y="2381250"/>
+            <a:ext cx="2095500" cy="1381125"/>
+          </a:xfrm>
+          <a:prstGeom xmlns:a="http://schemas.openxmlformats.org/drawingml/2006/main" prst="roundRect">
+            <a:avLst>
+              <a:gd name="adj" fmla="val 5517"/>
+            </a:avLst>
+          </a:prstGeom>
+          <a:solidFill xmlns:a="http://schemas.openxmlformats.org/drawingml/2006/main">
+            <a:srgbClr val="E8F2F8"/>
+          </a:solidFill>
+          <a:ln xmlns:a="http://schemas.openxmlformats.org/drawingml/2006/main" w="13335">
+            <a:solidFill>
+              <a:srgbClr val="2C7FB8"/>
+            </a:solidFill>
+            <a:prstDash val="solid"/>
+          </a:ln>
+        </p:spPr>
+        <p:txBody>
+          <a:bodyPr xmlns:a="http://schemas.openxmlformats.org/drawingml/2006/main"/>
+          <a:lstStyle xmlns:a="http://schemas.openxmlformats.org/drawingml/2006/main"/>
+          <a:p xmlns:a="http://schemas.openxmlformats.org/drawingml/2006/main">
+            <a:pPr>
+              <a:buNone/>
+              <a:defRPr sz="1200" b="0">
+                <a:solidFill>
+                  <a:srgbClr val="172B36"/>
+                </a:solidFill>
+                <a:latin typeface="Arial"/>
+                <a:ea typeface="Arial"/>
+                <a:cs typeface="Arial"/>
+              </a:defRPr>
+            </a:pPr>
+            <a:r>
+              <a:rPr sz="1200" b="0">
+                <a:solidFill>
+                  <a:srgbClr val="172B36"/>
+                </a:solidFill>
+                <a:latin typeface="Arial"/>
+                <a:ea typeface="Arial"/>
+                <a:cs typeface="Arial"/>
+              </a:rPr>
+              <a:t>1 | CLAIM REGISTRY</a:t>
+            </a:r>
+          </a:p>
+          <a:p xmlns:a="http://schemas.openxmlformats.org/drawingml/2006/main">
+            <a:pPr>
+              <a:buNone/>
+              <a:defRPr sz="1200" b="0">
+                <a:solidFill>
+                  <a:srgbClr val="172B36"/>
+                </a:solidFill>
+                <a:latin typeface="Arial"/>
+                <a:ea typeface="Arial"/>
+                <a:cs typeface="Arial"/>
+              </a:defRPr>
+            </a:pPr>
+            <a:r>
+              <a:rPr sz="1200" b="0">
+                <a:solidFill>
+                  <a:srgbClr val="172B36"/>
+                </a:solidFill>
+                <a:latin typeface="Arial"/>
+                <a:ea typeface="Arial"/>
+                <a:cs typeface="Arial"/>
+              </a:rPr>
+              <a:t>Validated counts</a:t>
+            </a:r>
+          </a:p>
+          <a:p xmlns:a="http://schemas.openxmlformats.org/drawingml/2006/main">
+            <a:pPr>
+              <a:buNone/>
+              <a:defRPr sz="1200" b="0">
+                <a:solidFill>
+                  <a:srgbClr val="172B36"/>
+                </a:solidFill>
+                <a:latin typeface="Arial"/>
+                <a:ea typeface="Arial"/>
+                <a:cs typeface="Arial"/>
+              </a:defRPr>
+            </a:pPr>
+            <a:r>
+              <a:rPr sz="1200" b="0">
+                <a:solidFill>
+                  <a:srgbClr val="172B36"/>
+                </a:solidFill>
+                <a:latin typeface="Arial"/>
+                <a:ea typeface="Arial"/>
+                <a:cs typeface="Arial"/>
+              </a:rPr>
+              <a:t>plot inventory</a:t>
+            </a:r>
+          </a:p>
+          <a:p xmlns:a="http://schemas.openxmlformats.org/drawingml/2006/main">
+            <a:pPr>
+              <a:buNone/>
+              <a:defRPr sz="1200" b="0">
+                <a:solidFill>
+                  <a:srgbClr val="172B36"/>
+                </a:solidFill>
+                <a:latin typeface="Arial"/>
+                <a:ea typeface="Arial"/>
+                <a:cs typeface="Arial"/>
+              </a:defRPr>
+            </a:pPr>
+            <a:r>
+              <a:rPr sz="1200" b="0">
+                <a:solidFill>
+                  <a:srgbClr val="172B36"/>
+                </a:solidFill>
+                <a:latin typeface="Arial"/>
+                <a:ea typeface="Arial"/>
+                <a:cs typeface="Arial"/>
+              </a:rPr>
+              <a:t>source hashes</a:t>
+            </a:r>
+          </a:p>
+        </p:txBody>
+      </p:sp>
+      <p:sp>
+        <p:nvSpPr>
+          <p:cNvPr id="7" name="lc-native-evidence">
+            <a:extLst xmlns:a="http://schemas.openxmlformats.org/drawingml/2006/main">
+              <a:ext uri="{FF2B5EF4-FFF2-40B4-BE49-F238E27FC236}">
+                <a16:creationId xmlns:a16="http://schemas.microsoft.com/office/drawing/2014/main" id="{77069166-C1FF-426C-B5A6-82BF94A96B5A}"/>
+              </a:ext>
+            </a:extLst>
+          </p:cNvPr>
+          <p:cNvSpPr>
+            <a:spLocks xmlns:a="http://schemas.openxmlformats.org/drawingml/2006/main" noGrp="1"/>
+          </p:cNvSpPr>
+          <p:nvPr/>
+        </p:nvSpPr>
+        <p:spPr>
+          <a:xfrm xmlns:a="http://schemas.openxmlformats.org/drawingml/2006/main">
+            <a:off x="3524250" y="2381250"/>
+            <a:ext cx="2095500" cy="1381125"/>
+          </a:xfrm>
+          <a:prstGeom xmlns:a="http://schemas.openxmlformats.org/drawingml/2006/main" prst="roundRect">
+            <a:avLst>
+              <a:gd name="adj" fmla="val 5517"/>
+            </a:avLst>
+          </a:prstGeom>
+          <a:solidFill xmlns:a="http://schemas.openxmlformats.org/drawingml/2006/main">
+            <a:srgbClr val="E8F4EE"/>
+          </a:solidFill>
+          <a:ln xmlns:a="http://schemas.openxmlformats.org/drawingml/2006/main" w="13335">
+            <a:solidFill>
+              <a:srgbClr val="2E8B62"/>
+            </a:solidFill>
+            <a:prstDash val="solid"/>
+          </a:ln>
+        </p:spPr>
+        <p:txBody>
+          <a:bodyPr xmlns:a="http://schemas.openxmlformats.org/drawingml/2006/main"/>
+          <a:lstStyle xmlns:a="http://schemas.openxmlformats.org/drawingml/2006/main"/>
+          <a:p xmlns:a="http://schemas.openxmlformats.org/drawingml/2006/main">
+            <a:pPr>
+              <a:buNone/>
+              <a:defRPr sz="1200" b="0">
+                <a:solidFill>
+                  <a:srgbClr val="172B36"/>
+                </a:solidFill>
+                <a:latin typeface="Arial"/>
+                <a:ea typeface="Arial"/>
+                <a:cs typeface="Arial"/>
+              </a:defRPr>
+            </a:pPr>
+            <a:r>
+              <a:rPr sz="1200" b="0">
+                <a:solidFill>
+                  <a:srgbClr val="172B36"/>
+                </a:solidFill>
+                <a:latin typeface="Arial"/>
+                <a:ea typeface="Arial"/>
+                <a:cs typeface="Arial"/>
+              </a:rPr>
+              <a:t>2 | EVIDENCE TABLES</a:t>
+            </a:r>
+          </a:p>
+          <a:p xmlns:a="http://schemas.openxmlformats.org/drawingml/2006/main">
+            <a:pPr>
+              <a:buNone/>
+              <a:defRPr sz="1200" b="0">
+                <a:solidFill>
+                  <a:srgbClr val="172B36"/>
+                </a:solidFill>
+                <a:latin typeface="Arial"/>
+                <a:ea typeface="Arial"/>
+                <a:cs typeface="Arial"/>
+              </a:defRPr>
+            </a:pPr>
+            <a:r>
+              <a:rPr sz="1200" b="0">
+                <a:solidFill>
+                  <a:srgbClr val="172B36"/>
+                </a:solidFill>
+                <a:latin typeface="Arial"/>
+                <a:ea typeface="Arial"/>
+                <a:cs typeface="Arial"/>
+              </a:rPr>
+              <a:t>893 direct pairs</a:t>
+            </a:r>
+          </a:p>
+          <a:p xmlns:a="http://schemas.openxmlformats.org/drawingml/2006/main">
+            <a:pPr>
+              <a:buNone/>
+              <a:defRPr sz="1200" b="0">
+                <a:solidFill>
+                  <a:srgbClr val="172B36"/>
+                </a:solidFill>
+                <a:latin typeface="Arial"/>
+                <a:ea typeface="Arial"/>
+                <a:cs typeface="Arial"/>
+              </a:defRPr>
+            </a:pPr>
+            <a:r>
+              <a:rPr sz="1200" b="0">
+                <a:solidFill>
+                  <a:srgbClr val="172B36"/>
+                </a:solidFill>
+                <a:latin typeface="Arial"/>
+                <a:ea typeface="Arial"/>
+                <a:cs typeface="Arial"/>
+              </a:rPr>
+              <a:t>371 adjacent pairs</a:t>
+            </a:r>
+          </a:p>
+          <a:p xmlns:a="http://schemas.openxmlformats.org/drawingml/2006/main">
+            <a:pPr>
+              <a:buNone/>
+              <a:defRPr sz="1200" b="0">
+                <a:solidFill>
+                  <a:srgbClr val="172B36"/>
+                </a:solidFill>
+                <a:latin typeface="Arial"/>
+                <a:ea typeface="Arial"/>
+                <a:cs typeface="Arial"/>
+              </a:defRPr>
+            </a:pPr>
+            <a:r>
+              <a:rPr sz="1200" b="0">
+                <a:solidFill>
+                  <a:srgbClr val="172B36"/>
+                </a:solidFill>
+                <a:latin typeface="Arial"/>
+                <a:ea typeface="Arial"/>
+                <a:cs typeface="Arial"/>
+              </a:rPr>
+              <a:t>9 linked cases</a:t>
+            </a:r>
+          </a:p>
+        </p:txBody>
+      </p:sp>
+      <p:sp>
+        <p:nvSpPr>
+          <p:cNvPr id="8" name="lc-native-release">
+            <a:extLst xmlns:a="http://schemas.openxmlformats.org/drawingml/2006/main">
+              <a:ext uri="{FF2B5EF4-FFF2-40B4-BE49-F238E27FC236}">
+                <a16:creationId xmlns:a16="http://schemas.microsoft.com/office/drawing/2014/main" id="{4F2CD2DB-8223-4857-82EB-A5B59B163824}"/>
+              </a:ext>
+            </a:extLst>
+          </p:cNvPr>
+          <p:cNvSpPr>
+            <a:spLocks xmlns:a="http://schemas.openxmlformats.org/drawingml/2006/main" noGrp="1"/>
+          </p:cNvSpPr>
+          <p:nvPr/>
+        </p:nvSpPr>
+        <p:spPr>
+          <a:xfrm xmlns:a="http://schemas.openxmlformats.org/drawingml/2006/main">
+            <a:off x="6048375" y="2381250"/>
+            <a:ext cx="2095500" cy="1381125"/>
+          </a:xfrm>
+          <a:prstGeom xmlns:a="http://schemas.openxmlformats.org/drawingml/2006/main" prst="roundRect">
+            <a:avLst>
+              <a:gd name="adj" fmla="val 5517"/>
+            </a:avLst>
+          </a:prstGeom>
+          <a:solidFill xmlns:a="http://schemas.openxmlformats.org/drawingml/2006/main">
+            <a:srgbClr val="FBEDE5"/>
+          </a:solidFill>
+          <a:ln xmlns:a="http://schemas.openxmlformats.org/drawingml/2006/main" w="13335">
+            <a:solidFill>
+              <a:srgbClr val="D95F0E"/>
+            </a:solidFill>
+            <a:prstDash val="solid"/>
+          </a:ln>
+        </p:spPr>
+        <p:txBody>
+          <a:bodyPr xmlns:a="http://schemas.openxmlformats.org/drawingml/2006/main"/>
+          <a:lstStyle xmlns:a="http://schemas.openxmlformats.org/drawingml/2006/main"/>
+          <a:p xmlns:a="http://schemas.openxmlformats.org/drawingml/2006/main">
+            <a:pPr>
+              <a:buNone/>
+              <a:defRPr sz="1200" b="0">
+                <a:solidFill>
+                  <a:srgbClr val="172B36"/>
+                </a:solidFill>
+                <a:latin typeface="Arial"/>
+                <a:ea typeface="Arial"/>
+                <a:cs typeface="Arial"/>
+              </a:defRPr>
+            </a:pPr>
+            <a:r>
+              <a:rPr sz="1200" b="0">
+                <a:solidFill>
+                  <a:srgbClr val="172B36"/>
+                </a:solidFill>
+                <a:latin typeface="Arial"/>
+                <a:ea typeface="Arial"/>
+                <a:cs typeface="Arial"/>
+              </a:rPr>
+              <a:t>3 | RELEASE OUTPUTS</a:t>
+            </a:r>
+          </a:p>
+          <a:p xmlns:a="http://schemas.openxmlformats.org/drawingml/2006/main">
+            <a:pPr>
+              <a:buNone/>
+              <a:defRPr sz="1200" b="0">
+                <a:solidFill>
+                  <a:srgbClr val="172B36"/>
+                </a:solidFill>
+                <a:latin typeface="Arial"/>
+                <a:ea typeface="Arial"/>
+                <a:cs typeface="Arial"/>
+              </a:defRPr>
+            </a:pPr>
+            <a:r>
+              <a:rPr sz="1200" b="0">
+                <a:solidFill>
+                  <a:srgbClr val="172B36"/>
+                </a:solidFill>
+                <a:latin typeface="Arial"/>
+                <a:ea typeface="Arial"/>
+                <a:cs typeface="Arial"/>
+              </a:rPr>
+              <a:t>RQ01-RQ10</a:t>
+            </a:r>
+          </a:p>
+          <a:p xmlns:a="http://schemas.openxmlformats.org/drawingml/2006/main">
+            <a:pPr>
+              <a:buNone/>
+              <a:defRPr sz="1200" b="0">
+                <a:solidFill>
+                  <a:srgbClr val="172B36"/>
+                </a:solidFill>
+                <a:latin typeface="Arial"/>
+                <a:ea typeface="Arial"/>
+                <a:cs typeface="Arial"/>
+              </a:defRPr>
+            </a:pPr>
+            <a:r>
+              <a:rPr sz="1200" b="0">
+                <a:solidFill>
+                  <a:srgbClr val="172B36"/>
+                </a:solidFill>
+                <a:latin typeface="Arial"/>
+                <a:ea typeface="Arial"/>
+                <a:cs typeface="Arial"/>
+              </a:rPr>
+              <a:t>current final plots</a:t>
+            </a:r>
+          </a:p>
+          <a:p xmlns:a="http://schemas.openxmlformats.org/drawingml/2006/main">
+            <a:pPr>
+              <a:buNone/>
+              <a:defRPr sz="1200" b="0">
+                <a:solidFill>
+                  <a:srgbClr val="172B36"/>
+                </a:solidFill>
+                <a:latin typeface="Arial"/>
+                <a:ea typeface="Arial"/>
+                <a:cs typeface="Arial"/>
+              </a:defRPr>
+            </a:pPr>
+            <a:r>
+              <a:rPr sz="1200" b="0">
+                <a:solidFill>
+                  <a:srgbClr val="172B36"/>
+                </a:solidFill>
+                <a:latin typeface="Arial"/>
+                <a:ea typeface="Arial"/>
+                <a:cs typeface="Arial"/>
+              </a:rPr>
+              <a:t>regenerated decks</a:t>
+            </a:r>
+          </a:p>
+        </p:txBody>
+      </p:sp>
+      <p:sp>
+        <p:nvSpPr>
+          <p:cNvPr id="9" name="lc-native-runner">
+            <a:extLst xmlns:a="http://schemas.openxmlformats.org/drawingml/2006/main">
+              <a:ext uri="{FF2B5EF4-FFF2-40B4-BE49-F238E27FC236}">
+                <a16:creationId xmlns:a16="http://schemas.microsoft.com/office/drawing/2014/main" id="{B17D9BC4-7EF0-4C9E-8CC2-32E75C0356F8}"/>
+              </a:ext>
+            </a:extLst>
+          </p:cNvPr>
+          <p:cNvSpPr>
+            <a:spLocks xmlns:a="http://schemas.openxmlformats.org/drawingml/2006/main" noGrp="1"/>
+          </p:cNvSpPr>
+          <p:nvPr/>
+        </p:nvSpPr>
+        <p:spPr>
+          <a:xfrm xmlns:a="http://schemas.openxmlformats.org/drawingml/2006/main">
+            <a:off x="1000125" y="4143375"/>
+            <a:ext cx="7143750" cy="666750"/>
+          </a:xfrm>
+          <a:prstGeom xmlns:a="http://schemas.openxmlformats.org/drawingml/2006/main" prst="roundRect">
+            <a:avLst>
+              <a:gd name="adj" fmla="val 10000"/>
+            </a:avLst>
+          </a:prstGeom>
+          <a:solidFill xmlns:a="http://schemas.openxmlformats.org/drawingml/2006/main">
+            <a:srgbClr val="F4F6F7"/>
+          </a:solidFill>
+          <a:ln xmlns:a="http://schemas.openxmlformats.org/drawingml/2006/main" w="9525">
+            <a:solidFill>
+              <a:srgbClr val="D3DCE1"/>
+            </a:solidFill>
+            <a:prstDash val="solid"/>
+          </a:ln>
+        </p:spPr>
+        <p:txBody>
+          <a:bodyPr xmlns:a="http://schemas.openxmlformats.org/drawingml/2006/main"/>
+          <a:lstStyle xmlns:a="http://schemas.openxmlformats.org/drawingml/2006/main"/>
+          <a:p xmlns:a="http://schemas.openxmlformats.org/drawingml/2006/main">
+            <a:pPr>
+              <a:buNone/>
+              <a:defRPr sz="1350" b="1">
+                <a:solidFill>
+                  <a:srgbClr val="172B36"/>
+                </a:solidFill>
+                <a:latin typeface="Arial"/>
+                <a:ea typeface="Arial"/>
+                <a:cs typeface="Arial"/>
+              </a:defRPr>
+            </a:pPr>
+            <a:r>
+              <a:rPr sz="1350" b="1">
+                <a:solidFill>
+                  <a:srgbClr val="172B36"/>
+                </a:solidFill>
+                <a:latin typeface="Arial"/>
+                <a:ea typeface="Arial"/>
+                <a:cs typeface="Arial"/>
+              </a:rPr>
+              <a:t>Single entry point: RUN_COMPLETE_ANALYSIS.sh</a:t>
+            </a:r>
+          </a:p>
+        </p:txBody>
+      </p:sp>
     </p:spTree>
     <p:extLst>
       <p:ext uri="{BB962C8B-B14F-4D97-AF65-F5344CB8AC3E}">
@@ -5419,18 +6746,18 @@
       </p:sp>
       <p:pic>
         <p:nvPicPr>
-          <p:cNvPr id="3" name=""/>
+          <p:cNvPr id="5" name=""/>
           <p:cNvPicPr>
             <a:picLocks xmlns:a="http://schemas.openxmlformats.org/drawingml/2006/main" noChangeAspect="1"/>
           </p:cNvPicPr>
           <p:nvPr/>
         </p:nvPicPr>
         <p:blipFill>
-          <a:blip xmlns:r="http://schemas.openxmlformats.org/officeDocument/2006/relationships" xmlns:a="http://schemas.openxmlformats.org/drawingml/2006/main" r:embed="Rd67f541e52544086"/>
+          <a:blip xmlns:r="http://schemas.openxmlformats.org/officeDocument/2006/relationships" xmlns:a="http://schemas.openxmlformats.org/drawingml/2006/main" r:embed="R80985c7280574ed0"/>
           <a:stretch xmlns:a="http://schemas.openxmlformats.org/drawingml/2006/main"/>
         </p:blipFill>
         <p:spPr>
-          <a:xfrm xmlns:a="http://schemas.openxmlformats.org/drawingml/2006/main">
+          <a:xfrm xmlns:a="http://schemas.openxmlformats.org/drawingml/2006/main" flipH="0" flipV="0">
             <a:off x="647700" y="1743456"/>
             <a:ext cx="7848600" cy="4552188"/>
           </a:xfrm>
@@ -5502,18 +6829,18 @@
       </p:sp>
       <p:pic>
         <p:nvPicPr>
-          <p:cNvPr id="3" name=""/>
+          <p:cNvPr id="5" name=""/>
           <p:cNvPicPr>
             <a:picLocks xmlns:a="http://schemas.openxmlformats.org/drawingml/2006/main" noChangeAspect="1"/>
           </p:cNvPicPr>
           <p:nvPr/>
         </p:nvPicPr>
         <p:blipFill>
-          <a:blip xmlns:r="http://schemas.openxmlformats.org/officeDocument/2006/relationships" xmlns:a="http://schemas.openxmlformats.org/drawingml/2006/main" r:embed="Rbcba299cdd9145f9"/>
+          <a:blip xmlns:r="http://schemas.openxmlformats.org/officeDocument/2006/relationships" xmlns:a="http://schemas.openxmlformats.org/drawingml/2006/main" r:embed="Rde42192578ec4fda"/>
           <a:stretch xmlns:a="http://schemas.openxmlformats.org/drawingml/2006/main"/>
         </p:blipFill>
         <p:spPr>
-          <a:xfrm xmlns:a="http://schemas.openxmlformats.org/drawingml/2006/main">
+          <a:xfrm xmlns:a="http://schemas.openxmlformats.org/drawingml/2006/main" flipH="0" flipV="0">
             <a:off x="1062633" y="1524000"/>
             <a:ext cx="7018734" cy="4991100"/>
           </a:xfrm>
@@ -5585,18 +6912,18 @@
       </p:sp>
       <p:pic>
         <p:nvPicPr>
-          <p:cNvPr id="3" name=""/>
+          <p:cNvPr id="5" name=""/>
           <p:cNvPicPr>
             <a:picLocks xmlns:a="http://schemas.openxmlformats.org/drawingml/2006/main" noChangeAspect="1"/>
           </p:cNvPicPr>
           <p:nvPr/>
         </p:nvPicPr>
         <p:blipFill>
-          <a:blip xmlns:r="http://schemas.openxmlformats.org/officeDocument/2006/relationships" xmlns:a="http://schemas.openxmlformats.org/drawingml/2006/main" r:embed="Rf159336354a44fc0"/>
+          <a:blip xmlns:r="http://schemas.openxmlformats.org/officeDocument/2006/relationships" xmlns:a="http://schemas.openxmlformats.org/drawingml/2006/main" r:embed="Rf4e4d32d8a204e51"/>
           <a:stretch xmlns:a="http://schemas.openxmlformats.org/drawingml/2006/main"/>
         </p:blipFill>
         <p:spPr>
-          <a:xfrm xmlns:a="http://schemas.openxmlformats.org/drawingml/2006/main">
+          <a:xfrm xmlns:a="http://schemas.openxmlformats.org/drawingml/2006/main" flipH="0" flipV="0">
             <a:off x="647700" y="1821942"/>
             <a:ext cx="7848600" cy="4395216"/>
           </a:xfrm>
@@ -5668,18 +6995,18 @@
       </p:sp>
       <p:pic>
         <p:nvPicPr>
-          <p:cNvPr id="3" name=""/>
+          <p:cNvPr id="5" name=""/>
           <p:cNvPicPr>
             <a:picLocks xmlns:a="http://schemas.openxmlformats.org/drawingml/2006/main" noChangeAspect="1"/>
           </p:cNvPicPr>
           <p:nvPr/>
         </p:nvPicPr>
         <p:blipFill>
-          <a:blip xmlns:r="http://schemas.openxmlformats.org/officeDocument/2006/relationships" xmlns:a="http://schemas.openxmlformats.org/drawingml/2006/main" r:embed="Rd403186a81924676"/>
+          <a:blip xmlns:r="http://schemas.openxmlformats.org/officeDocument/2006/relationships" xmlns:a="http://schemas.openxmlformats.org/drawingml/2006/main" r:embed="R1ff6d42cf4e04cf1"/>
           <a:stretch xmlns:a="http://schemas.openxmlformats.org/drawingml/2006/main"/>
         </p:blipFill>
         <p:spPr>
-          <a:xfrm xmlns:a="http://schemas.openxmlformats.org/drawingml/2006/main">
+          <a:xfrm xmlns:a="http://schemas.openxmlformats.org/drawingml/2006/main" flipH="0" flipV="0">
             <a:off x="647700" y="1743456"/>
             <a:ext cx="7848600" cy="4552188"/>
           </a:xfrm>
@@ -5751,18 +7078,18 @@
       </p:sp>
       <p:pic>
         <p:nvPicPr>
-          <p:cNvPr id="3" name=""/>
+          <p:cNvPr id="5" name=""/>
           <p:cNvPicPr>
             <a:picLocks xmlns:a="http://schemas.openxmlformats.org/drawingml/2006/main" noChangeAspect="1"/>
           </p:cNvPicPr>
           <p:nvPr/>
         </p:nvPicPr>
         <p:blipFill>
-          <a:blip xmlns:r="http://schemas.openxmlformats.org/officeDocument/2006/relationships" xmlns:a="http://schemas.openxmlformats.org/drawingml/2006/main" r:embed="Rdc43674f96964c55"/>
+          <a:blip xmlns:r="http://schemas.openxmlformats.org/officeDocument/2006/relationships" xmlns:a="http://schemas.openxmlformats.org/drawingml/2006/main" r:embed="R359df932e3f749f3"/>
           <a:stretch xmlns:a="http://schemas.openxmlformats.org/drawingml/2006/main"/>
         </p:blipFill>
         <p:spPr>
-          <a:xfrm xmlns:a="http://schemas.openxmlformats.org/drawingml/2006/main">
+          <a:xfrm xmlns:a="http://schemas.openxmlformats.org/drawingml/2006/main" flipH="0" flipV="0">
             <a:off x="647700" y="2188210"/>
             <a:ext cx="7848600" cy="3662680"/>
           </a:xfrm>
@@ -5883,7 +7210,7 @@
                 <a:ea typeface="Arial"/>
                 <a:cs typeface="Arial"/>
               </a:rPr>
-              <a:t>UTI | Culture-supported episode with compatible, catheter-aware symptoms.</a:t>
+              <a:t>UTI | Versioned operational phenotype: culture support plus compatible, catheter-aware symptoms.</a:t>
             </a:r>
           </a:p>
           <a:p xmlns:a="http://schemas.openxmlformats.org/drawingml/2006/main">
@@ -5934,7 +7261,7 @@
                 <a:ea typeface="Arial"/>
                 <a:cs typeface="Arial"/>
               </a:rPr>
-              <a:t>Primary analysis throughout: UTI versus Not_UTI.</a:t>
+              <a:t>Primary analysis throughout: operational UTI versus Not_UTI in selected Longcycler-linked episodes.</a:t>
             </a:r>
           </a:p>
         </p:txBody>
@@ -6002,18 +7329,18 @@
       </p:sp>
       <p:pic>
         <p:nvPicPr>
-          <p:cNvPr id="3" name=""/>
+          <p:cNvPr id="5" name=""/>
           <p:cNvPicPr>
             <a:picLocks xmlns:a="http://schemas.openxmlformats.org/drawingml/2006/main" noChangeAspect="1"/>
           </p:cNvPicPr>
           <p:nvPr/>
         </p:nvPicPr>
         <p:blipFill>
-          <a:blip xmlns:r="http://schemas.openxmlformats.org/officeDocument/2006/relationships" xmlns:a="http://schemas.openxmlformats.org/drawingml/2006/main" r:embed="R78f3d30ca5844f60"/>
+          <a:blip xmlns:r="http://schemas.openxmlformats.org/officeDocument/2006/relationships" xmlns:a="http://schemas.openxmlformats.org/drawingml/2006/main" r:embed="R90bcf2085b9b4cc2"/>
           <a:stretch xmlns:a="http://schemas.openxmlformats.org/drawingml/2006/main"/>
         </p:blipFill>
         <p:spPr>
-          <a:xfrm xmlns:a="http://schemas.openxmlformats.org/drawingml/2006/main">
+          <a:xfrm xmlns:a="http://schemas.openxmlformats.org/drawingml/2006/main" flipH="0" flipV="0">
             <a:off x="647700" y="1966839"/>
             <a:ext cx="7848600" cy="4105422"/>
           </a:xfrm>
@@ -6085,18 +7412,18 @@
       </p:sp>
       <p:pic>
         <p:nvPicPr>
-          <p:cNvPr id="3" name=""/>
+          <p:cNvPr id="5" name=""/>
           <p:cNvPicPr>
             <a:picLocks xmlns:a="http://schemas.openxmlformats.org/drawingml/2006/main" noChangeAspect="1"/>
           </p:cNvPicPr>
           <p:nvPr/>
         </p:nvPicPr>
         <p:blipFill>
-          <a:blip xmlns:r="http://schemas.openxmlformats.org/officeDocument/2006/relationships" xmlns:a="http://schemas.openxmlformats.org/drawingml/2006/main" r:embed="R16c90db2db4c4e7b"/>
+          <a:blip xmlns:r="http://schemas.openxmlformats.org/officeDocument/2006/relationships" xmlns:a="http://schemas.openxmlformats.org/drawingml/2006/main" r:embed="Rae87107161704ff6"/>
           <a:stretch xmlns:a="http://schemas.openxmlformats.org/drawingml/2006/main"/>
         </p:blipFill>
         <p:spPr>
-          <a:xfrm xmlns:a="http://schemas.openxmlformats.org/drawingml/2006/main">
+          <a:xfrm xmlns:a="http://schemas.openxmlformats.org/drawingml/2006/main" flipH="0" flipV="0">
             <a:off x="2492375" y="1524000"/>
             <a:ext cx="4159250" cy="4991100"/>
           </a:xfrm>
@@ -6217,7 +7544,7 @@
                 <a:ea typeface="Arial"/>
                 <a:cs typeface="Arial"/>
               </a:rPr>
-              <a:t>final_key_results_summary.md | headline results</a:t>
+              <a:t>longcycler_release_claim_registry.json | validated claims and plot inventory</a:t>
             </a:r>
           </a:p>
           <a:p xmlns:a="http://schemas.openxmlformats.org/drawingml/2006/main">
@@ -6234,7 +7561,7 @@
                 <a:ea typeface="Arial"/>
                 <a:cs typeface="Arial"/>
               </a:rPr>
-              <a:t>final_figure_captions.md + final_figure_manifest.csv | figures and limitations</a:t>
+              <a:t>analysis_cohort_longcycler.csv | 532 selected episodes</a:t>
             </a:r>
           </a:p>
           <a:p xmlns:a="http://schemas.openxmlformats.org/drawingml/2006/main">
@@ -6251,7 +7578,7 @@
                 <a:ea typeface="Arial"/>
                 <a:cs typeface="Arial"/>
               </a:rPr>
-              <a:t>not_uti_to_uti_casebook.md | transition case details</a:t>
+              <a:t>pairwise_metrics.csv | 893 direct pairs</a:t>
             </a:r>
           </a:p>
           <a:p xmlns:a="http://schemas.openxmlformats.org/drawingml/2006/main">
@@ -6268,7 +7595,7 @@
                 <a:ea typeface="Arial"/>
                 <a:cs typeface="Arial"/>
               </a:rPr>
-              <a:t>pipeline_architecture.md + 35_final_figure_pack.R | orientation and figure generation</a:t>
+              <a:t>longcycler_transitions.csv | 371 adjacent pairs from 139 residents</a:t>
             </a:r>
           </a:p>
           <a:p xmlns:a="http://schemas.openxmlformats.org/drawingml/2006/main">
@@ -6285,7 +7612,7 @@
                 <a:ea typeface="Arial"/>
                 <a:cs typeface="Arial"/>
               </a:rPr>
-              <a:t>DECK UPDATE | Superseded result frames replaced with current UTI / Not_UTI evidence in an intentional academic-report restyle.</a:t>
+              <a:t>not_uti_to_uti_casebook.csv | 9/9/0 cases/linked/missing</a:t>
             </a:r>
           </a:p>
           <a:p xmlns:a="http://schemas.openxmlformats.org/drawingml/2006/main">
@@ -6302,7 +7629,7 @@
                 <a:ea typeface="Arial"/>
                 <a:cs typeface="Arial"/>
               </a:rPr>
-              <a:t>GUARDRAILS | UTI versus Not_UTI only; no FDR-significant global VF claim; AMR is context only.</a:t>
+              <a:t>RUN_COMPLETE.txt | RQ01-RQ10 complete</a:t>
             </a:r>
           </a:p>
           <a:p xmlns:a="http://schemas.openxmlformats.org/drawingml/2006/main">
@@ -6319,7 +7646,7 @@
                 <a:ea typeface="Arial"/>
                 <a:cs typeface="Arial"/>
               </a:rPr>
-              <a:t>Denominators displayed in this deck are validated episode-level counts.</a:t>
+              <a:t>GUARDRAILS | Operational UTI phenotype; Longcycler-only analytics; VF and AMR are exploratory.</a:t>
             </a:r>
           </a:p>
         </p:txBody>
@@ -6419,7 +7746,7 @@
                 <a:ea typeface="Arial"/>
                 <a:cs typeface="Arial"/>
               </a:rPr>
-              <a:t>Repeated clinical episodes linked by participant and time.</a:t>
+              <a:t>The selected cohort contains 532 episodes from 161 residents.</a:t>
             </a:r>
           </a:p>
           <a:p xmlns:a="http://schemas.openxmlformats.org/drawingml/2006/main">
@@ -6436,7 +7763,7 @@
                 <a:ea typeface="Arial"/>
                 <a:cs typeface="Arial"/>
               </a:rPr>
-              <a:t>Clinical lane: culture, symptoms and catheter context establish primary status.</a:t>
+              <a:t>Clinical lane: culture, symptoms and catheter context establish the operational phenotype.</a:t>
             </a:r>
           </a:p>
           <a:p xmlns:a="http://schemas.openxmlformats.org/drawingml/2006/main">
@@ -6453,7 +7780,7 @@
                 <a:ea typeface="Arial"/>
                 <a:cs typeface="Arial"/>
               </a:rPr>
-              <a:t>Genomic lane: isolate sequencing produces VF, SNP/ST and accessory context.</a:t>
+              <a:t>Genomic lane: one QC-passing Longcycler assembly per episode supplies VF, SNP/ST and accessory context.</a:t>
             </a:r>
           </a:p>
           <a:p xmlns:a="http://schemas.openxmlformats.org/drawingml/2006/main">
@@ -6470,7 +7797,7 @@
                 <a:ea typeface="Arial"/>
                 <a:cs typeface="Arial"/>
               </a:rPr>
-              <a:t>Integration asks whether clinical transitions reflect persistence, replacement or uncertainty.</a:t>
+              <a:t>Direct pair evidence comprises 893 within-resident pairs and 371 adjacent pairs.</a:t>
             </a:r>
           </a:p>
         </p:txBody>
@@ -6575,25 +7902,25 @@
                 <a:ea typeface="Arial"/>
                 <a:cs typeface="Arial"/>
               </a:rPr>
-              <a:t>DESCRIPTIVE | Clinical: 583 episodes (18 UTI; 565 Not_UTI). VF/model-ready: 556 (17 UTI; 539 Not_UTI).</a:t>
+              <a:t>ANALYTICAL | Selected cohort: 532 episodes (16 operational UTI; 516 Not_UTI) from 161 residents.</a:t>
             </a:r>
           </a:p>
         </p:txBody>
       </p:sp>
       <p:pic>
         <p:nvPicPr>
-          <p:cNvPr id="6" name=""/>
+          <p:cNvPr id="9" name=""/>
           <p:cNvPicPr>
             <a:picLocks xmlns:a="http://schemas.openxmlformats.org/drawingml/2006/main" noChangeAspect="1"/>
           </p:cNvPicPr>
           <p:nvPr/>
         </p:nvPicPr>
         <p:blipFill>
-          <a:blip xmlns:r="http://schemas.openxmlformats.org/officeDocument/2006/relationships" xmlns:a="http://schemas.openxmlformats.org/drawingml/2006/main" r:embed="R737cd8e42674407f"/>
+          <a:blip xmlns:r="http://schemas.openxmlformats.org/officeDocument/2006/relationships" xmlns:a="http://schemas.openxmlformats.org/drawingml/2006/main" r:embed="R6b39c144c8254abb"/>
           <a:stretch xmlns:a="http://schemas.openxmlformats.org/drawingml/2006/main"/>
         </p:blipFill>
         <p:spPr>
-          <a:xfrm xmlns:a="http://schemas.openxmlformats.org/drawingml/2006/main">
+          <a:xfrm xmlns:a="http://schemas.openxmlformats.org/drawingml/2006/main" flipH="0" flipV="0">
             <a:off x="742950" y="2281809"/>
             <a:ext cx="7658100" cy="2961132"/>
           </a:xfrm>
@@ -6658,7 +7985,7 @@
                 <a:ea typeface="Arial"/>
                 <a:cs typeface="Arial"/>
               </a:rPr>
-              <a:t>Current UTI definition: culture support plus catheter-aware compatible symptoms</a:t>
+              <a:t>Operational UTI phenotype: culture support plus catheter-aware compatible symptoms</a:t>
             </a:r>
           </a:p>
         </p:txBody>
@@ -6702,25 +8029,25 @@
                 <a:ea typeface="Arial"/>
                 <a:cs typeface="Arial"/>
               </a:rPr>
-              <a:t>DESCRIPTIVE | Not_UTI is the comparator state, not a single biological phenotype.</a:t>
+              <a:t>DESCRIPTIVE | Versioned operational rule applied to 532 selected episodes; Not_UTI remains heterogeneous.</a:t>
             </a:r>
           </a:p>
         </p:txBody>
       </p:sp>
       <p:pic>
         <p:nvPicPr>
-          <p:cNvPr id="6" name=""/>
+          <p:cNvPr id="9" name=""/>
           <p:cNvPicPr>
             <a:picLocks xmlns:a="http://schemas.openxmlformats.org/drawingml/2006/main" noChangeAspect="1"/>
           </p:cNvPicPr>
           <p:nvPr/>
         </p:nvPicPr>
         <p:blipFill>
-          <a:blip xmlns:r="http://schemas.openxmlformats.org/officeDocument/2006/relationships" xmlns:a="http://schemas.openxmlformats.org/drawingml/2006/main" r:embed="Rcad38ed12de24fa0"/>
+          <a:blip xmlns:r="http://schemas.openxmlformats.org/officeDocument/2006/relationships" xmlns:a="http://schemas.openxmlformats.org/drawingml/2006/main" r:embed="R2ab35ab09729431a"/>
           <a:stretch xmlns:a="http://schemas.openxmlformats.org/drawingml/2006/main"/>
         </p:blipFill>
         <p:spPr>
-          <a:xfrm xmlns:a="http://schemas.openxmlformats.org/drawingml/2006/main">
+          <a:xfrm xmlns:a="http://schemas.openxmlformats.org/drawingml/2006/main" flipH="0" flipV="0">
             <a:off x="742950" y="1524000"/>
             <a:ext cx="7658100" cy="4476750"/>
           </a:xfrm>
@@ -6785,7 +8112,7 @@
                 <a:ea typeface="Arial"/>
                 <a:cs typeface="Arial"/>
               </a:rPr>
-              <a:t>Integrated workflow: clinical status and genomic evidence meet at transition analysis</a:t>
+              <a:t>Selected clinical status and direct genomic evidence meet at transition analysis</a:t>
             </a:r>
           </a:p>
         </p:txBody>
@@ -6829,25 +8156,25 @@
                 <a:ea typeface="Arial"/>
                 <a:cs typeface="Arial"/>
               </a:rPr>
-              <a:t>WORKFLOW | Primary status, VF/WGS outputs and longitudinal casebook are integrated after episode linkage.</a:t>
+              <a:t>WORKFLOW | 532 selected episodes -&gt; 893 direct pairs -&gt; 371 adjacent pairs -&gt; RQ01-RQ10.</a:t>
             </a:r>
           </a:p>
         </p:txBody>
       </p:sp>
       <p:pic>
         <p:nvPicPr>
-          <p:cNvPr id="6" name=""/>
+          <p:cNvPr id="18" name=""/>
           <p:cNvPicPr>
             <a:picLocks xmlns:a="http://schemas.openxmlformats.org/drawingml/2006/main" noChangeAspect="1"/>
           </p:cNvPicPr>
           <p:nvPr/>
         </p:nvPicPr>
         <p:blipFill>
-          <a:blip xmlns:r="http://schemas.openxmlformats.org/officeDocument/2006/relationships" xmlns:a="http://schemas.openxmlformats.org/drawingml/2006/main" r:embed="R6c8d805a0c1c47b4"/>
+          <a:blip xmlns:r="http://schemas.openxmlformats.org/officeDocument/2006/relationships" xmlns:a="http://schemas.openxmlformats.org/drawingml/2006/main" r:embed="R84fbe0e165044a1e"/>
           <a:stretch xmlns:a="http://schemas.openxmlformats.org/drawingml/2006/main"/>
         </p:blipFill>
         <p:spPr>
-          <a:xfrm xmlns:a="http://schemas.openxmlformats.org/drawingml/2006/main">
+          <a:xfrm xmlns:a="http://schemas.openxmlformats.org/drawingml/2006/main" flipH="0" flipV="0">
             <a:off x="742950" y="1524000"/>
             <a:ext cx="7658100" cy="4476750"/>
           </a:xfrm>
@@ -6856,6 +8183,702 @@
           </a:prstGeom>
         </p:spPr>
       </p:pic>
+      <p:sp>
+        <p:nvSpPr>
+          <p:cNvPr id="7" name="lc-native-connector-1">
+            <a:extLst xmlns:a="http://schemas.openxmlformats.org/drawingml/2006/main">
+              <a:ext uri="{FF2B5EF4-FFF2-40B4-BE49-F238E27FC236}">
+                <a16:creationId xmlns:a16="http://schemas.microsoft.com/office/drawing/2014/main" id="{77C8E62A-E4F0-4D86-BF61-FC6D574A2BE3}"/>
+              </a:ext>
+            </a:extLst>
+          </p:cNvPr>
+          <p:cNvSpPr>
+            <a:spLocks xmlns:a="http://schemas.openxmlformats.org/drawingml/2006/main" noGrp="1"/>
+          </p:cNvSpPr>
+          <p:nvPr/>
+        </p:nvSpPr>
+        <p:spPr>
+          <a:xfrm xmlns:a="http://schemas.openxmlformats.org/drawingml/2006/main">
+            <a:off x="2619375" y="2647950"/>
+            <a:ext cx="142875" cy="228600"/>
+          </a:xfrm>
+          <a:prstGeom xmlns:a="http://schemas.openxmlformats.org/drawingml/2006/main" prst="rightArrow">
+            <a:avLst/>
+          </a:prstGeom>
+          <a:solidFill xmlns:a="http://schemas.openxmlformats.org/drawingml/2006/main">
+            <a:srgbClr val="7B8B95"/>
+          </a:solidFill>
+          <a:ln xmlns:a="http://schemas.openxmlformats.org/drawingml/2006/main" w="0">
+            <a:noFill/>
+            <a:prstDash val="solid"/>
+          </a:ln>
+        </p:spPr>
+      </p:sp>
+      <p:sp>
+        <p:nvSpPr>
+          <p:cNvPr id="8" name="lc-native-connector-2">
+            <a:extLst xmlns:a="http://schemas.openxmlformats.org/drawingml/2006/main">
+              <a:ext uri="{FF2B5EF4-FFF2-40B4-BE49-F238E27FC236}">
+                <a16:creationId xmlns:a16="http://schemas.microsoft.com/office/drawing/2014/main" id="{7E81545B-3210-478D-9BD7-962A9137045F}"/>
+              </a:ext>
+            </a:extLst>
+          </p:cNvPr>
+          <p:cNvSpPr>
+            <a:spLocks xmlns:a="http://schemas.openxmlformats.org/drawingml/2006/main" noGrp="1"/>
+          </p:cNvSpPr>
+          <p:nvPr/>
+        </p:nvSpPr>
+        <p:spPr>
+          <a:xfrm xmlns:a="http://schemas.openxmlformats.org/drawingml/2006/main">
+            <a:off x="4495800" y="2647950"/>
+            <a:ext cx="142875" cy="228600"/>
+          </a:xfrm>
+          <a:prstGeom xmlns:a="http://schemas.openxmlformats.org/drawingml/2006/main" prst="rightArrow">
+            <a:avLst/>
+          </a:prstGeom>
+          <a:solidFill xmlns:a="http://schemas.openxmlformats.org/drawingml/2006/main">
+            <a:srgbClr val="7B8B95"/>
+          </a:solidFill>
+          <a:ln xmlns:a="http://schemas.openxmlformats.org/drawingml/2006/main" w="0">
+            <a:noFill/>
+            <a:prstDash val="solid"/>
+          </a:ln>
+        </p:spPr>
+      </p:sp>
+      <p:sp>
+        <p:nvSpPr>
+          <p:cNvPr id="9" name="lc-native-connector-3">
+            <a:extLst xmlns:a="http://schemas.openxmlformats.org/drawingml/2006/main">
+              <a:ext uri="{FF2B5EF4-FFF2-40B4-BE49-F238E27FC236}">
+                <a16:creationId xmlns:a16="http://schemas.microsoft.com/office/drawing/2014/main" id="{4713530C-92F6-4205-9DDE-821CE67BF6B2}"/>
+              </a:ext>
+            </a:extLst>
+          </p:cNvPr>
+          <p:cNvSpPr>
+            <a:spLocks xmlns:a="http://schemas.openxmlformats.org/drawingml/2006/main" noGrp="1"/>
+          </p:cNvSpPr>
+          <p:nvPr/>
+        </p:nvSpPr>
+        <p:spPr>
+          <a:xfrm xmlns:a="http://schemas.openxmlformats.org/drawingml/2006/main">
+            <a:off x="6372225" y="2647950"/>
+            <a:ext cx="142875" cy="228600"/>
+          </a:xfrm>
+          <a:prstGeom xmlns:a="http://schemas.openxmlformats.org/drawingml/2006/main" prst="rightArrow">
+            <a:avLst/>
+          </a:prstGeom>
+          <a:solidFill xmlns:a="http://schemas.openxmlformats.org/drawingml/2006/main">
+            <a:srgbClr val="7B8B95"/>
+          </a:solidFill>
+          <a:ln xmlns:a="http://schemas.openxmlformats.org/drawingml/2006/main" w="0">
+            <a:noFill/>
+            <a:prstDash val="solid"/>
+          </a:ln>
+        </p:spPr>
+      </p:sp>
+      <p:sp>
+        <p:nvSpPr>
+          <p:cNvPr id="10" name="lc-native-cohort">
+            <a:extLst xmlns:a="http://schemas.openxmlformats.org/drawingml/2006/main">
+              <a:ext uri="{FF2B5EF4-FFF2-40B4-BE49-F238E27FC236}">
+                <a16:creationId xmlns:a16="http://schemas.microsoft.com/office/drawing/2014/main" id="{D42106FC-07F1-4F5F-83B6-89DDE5B5ED22}"/>
+              </a:ext>
+            </a:extLst>
+          </p:cNvPr>
+          <p:cNvSpPr>
+            <a:spLocks xmlns:a="http://schemas.openxmlformats.org/drawingml/2006/main" noGrp="1"/>
+          </p:cNvSpPr>
+          <p:nvPr/>
+        </p:nvSpPr>
+        <p:spPr>
+          <a:xfrm xmlns:a="http://schemas.openxmlformats.org/drawingml/2006/main">
+            <a:off x="904875" y="2047875"/>
+            <a:ext cx="1695450" cy="1428750"/>
+          </a:xfrm>
+          <a:prstGeom xmlns:a="http://schemas.openxmlformats.org/drawingml/2006/main" prst="roundRect">
+            <a:avLst>
+              <a:gd name="adj" fmla="val 5333"/>
+            </a:avLst>
+          </a:prstGeom>
+          <a:solidFill xmlns:a="http://schemas.openxmlformats.org/drawingml/2006/main">
+            <a:srgbClr val="E8F2F8"/>
+          </a:solidFill>
+          <a:ln xmlns:a="http://schemas.openxmlformats.org/drawingml/2006/main" w="13335">
+            <a:solidFill>
+              <a:srgbClr val="2C7FB8"/>
+            </a:solidFill>
+            <a:prstDash val="solid"/>
+          </a:ln>
+        </p:spPr>
+        <p:txBody>
+          <a:bodyPr xmlns:a="http://schemas.openxmlformats.org/drawingml/2006/main"/>
+          <a:lstStyle xmlns:a="http://schemas.openxmlformats.org/drawingml/2006/main"/>
+          <a:p xmlns:a="http://schemas.openxmlformats.org/drawingml/2006/main">
+            <a:pPr>
+              <a:buNone/>
+              <a:defRPr sz="1200" b="0">
+                <a:solidFill>
+                  <a:srgbClr val="172B36"/>
+                </a:solidFill>
+                <a:latin typeface="Arial"/>
+                <a:ea typeface="Arial"/>
+                <a:cs typeface="Arial"/>
+              </a:defRPr>
+            </a:pPr>
+            <a:r>
+              <a:rPr sz="1200" b="0">
+                <a:solidFill>
+                  <a:srgbClr val="172B36"/>
+                </a:solidFill>
+                <a:latin typeface="Arial"/>
+                <a:ea typeface="Arial"/>
+                <a:cs typeface="Arial"/>
+              </a:rPr>
+              <a:t>SELECTED COHORT</a:t>
+            </a:r>
+          </a:p>
+          <a:p xmlns:a="http://schemas.openxmlformats.org/drawingml/2006/main">
+            <a:pPr>
+              <a:buNone/>
+              <a:defRPr sz="1200" b="0">
+                <a:solidFill>
+                  <a:srgbClr val="172B36"/>
+                </a:solidFill>
+                <a:latin typeface="Arial"/>
+                <a:ea typeface="Arial"/>
+                <a:cs typeface="Arial"/>
+              </a:defRPr>
+            </a:pPr>
+            <a:r>
+              <a:rPr sz="1200" b="0">
+                <a:solidFill>
+                  <a:srgbClr val="172B36"/>
+                </a:solidFill>
+                <a:latin typeface="Arial"/>
+                <a:ea typeface="Arial"/>
+                <a:cs typeface="Arial"/>
+              </a:rPr>
+              <a:t>532 episodes</a:t>
+            </a:r>
+          </a:p>
+          <a:p xmlns:a="http://schemas.openxmlformats.org/drawingml/2006/main">
+            <a:pPr>
+              <a:buNone/>
+              <a:defRPr sz="1200" b="0">
+                <a:solidFill>
+                  <a:srgbClr val="172B36"/>
+                </a:solidFill>
+                <a:latin typeface="Arial"/>
+                <a:ea typeface="Arial"/>
+                <a:cs typeface="Arial"/>
+              </a:defRPr>
+            </a:pPr>
+            <a:r>
+              <a:rPr sz="1200" b="0">
+                <a:solidFill>
+                  <a:srgbClr val="172B36"/>
+                </a:solidFill>
+                <a:latin typeface="Arial"/>
+                <a:ea typeface="Arial"/>
+                <a:cs typeface="Arial"/>
+              </a:rPr>
+              <a:t>161 residents</a:t>
+            </a:r>
+          </a:p>
+          <a:p xmlns:a="http://schemas.openxmlformats.org/drawingml/2006/main">
+            <a:pPr>
+              <a:buNone/>
+              <a:defRPr sz="1200" b="0">
+                <a:solidFill>
+                  <a:srgbClr val="172B36"/>
+                </a:solidFill>
+                <a:latin typeface="Arial"/>
+                <a:ea typeface="Arial"/>
+                <a:cs typeface="Arial"/>
+              </a:defRPr>
+            </a:pPr>
+            <a:r>
+              <a:rPr sz="1200" b="0">
+                <a:solidFill>
+                  <a:srgbClr val="172B36"/>
+                </a:solidFill>
+                <a:latin typeface="Arial"/>
+                <a:ea typeface="Arial"/>
+                <a:cs typeface="Arial"/>
+              </a:rPr>
+              <a:t>16/516 UTI/Not_UTI</a:t>
+            </a:r>
+          </a:p>
+        </p:txBody>
+      </p:sp>
+      <p:sp>
+        <p:nvSpPr>
+          <p:cNvPr id="11" name="lc-native-genomes">
+            <a:extLst xmlns:a="http://schemas.openxmlformats.org/drawingml/2006/main">
+              <a:ext uri="{FF2B5EF4-FFF2-40B4-BE49-F238E27FC236}">
+                <a16:creationId xmlns:a16="http://schemas.microsoft.com/office/drawing/2014/main" id="{820D142C-C283-4D8C-9723-DDA9D90A0D9C}"/>
+              </a:ext>
+            </a:extLst>
+          </p:cNvPr>
+          <p:cNvSpPr>
+            <a:spLocks xmlns:a="http://schemas.openxmlformats.org/drawingml/2006/main" noGrp="1"/>
+          </p:cNvSpPr>
+          <p:nvPr/>
+        </p:nvSpPr>
+        <p:spPr>
+          <a:xfrm xmlns:a="http://schemas.openxmlformats.org/drawingml/2006/main">
+            <a:off x="2781300" y="2047875"/>
+            <a:ext cx="1695450" cy="1428750"/>
+          </a:xfrm>
+          <a:prstGeom xmlns:a="http://schemas.openxmlformats.org/drawingml/2006/main" prst="roundRect">
+            <a:avLst>
+              <a:gd name="adj" fmla="val 5333"/>
+            </a:avLst>
+          </a:prstGeom>
+          <a:solidFill xmlns:a="http://schemas.openxmlformats.org/drawingml/2006/main">
+            <a:srgbClr val="E8F4EE"/>
+          </a:solidFill>
+          <a:ln xmlns:a="http://schemas.openxmlformats.org/drawingml/2006/main" w="13335">
+            <a:solidFill>
+              <a:srgbClr val="2E8B62"/>
+            </a:solidFill>
+            <a:prstDash val="solid"/>
+          </a:ln>
+        </p:spPr>
+        <p:txBody>
+          <a:bodyPr xmlns:a="http://schemas.openxmlformats.org/drawingml/2006/main"/>
+          <a:lstStyle xmlns:a="http://schemas.openxmlformats.org/drawingml/2006/main"/>
+          <a:p xmlns:a="http://schemas.openxmlformats.org/drawingml/2006/main">
+            <a:pPr>
+              <a:buNone/>
+              <a:defRPr sz="1200" b="0">
+                <a:solidFill>
+                  <a:srgbClr val="172B36"/>
+                </a:solidFill>
+                <a:latin typeface="Arial"/>
+                <a:ea typeface="Arial"/>
+                <a:cs typeface="Arial"/>
+              </a:defRPr>
+            </a:pPr>
+            <a:r>
+              <a:rPr sz="1200" b="0">
+                <a:solidFill>
+                  <a:srgbClr val="172B36"/>
+                </a:solidFill>
+                <a:latin typeface="Arial"/>
+                <a:ea typeface="Arial"/>
+                <a:cs typeface="Arial"/>
+              </a:rPr>
+              <a:t>SELECTED GENOMES</a:t>
+            </a:r>
+          </a:p>
+          <a:p xmlns:a="http://schemas.openxmlformats.org/drawingml/2006/main">
+            <a:pPr>
+              <a:buNone/>
+              <a:defRPr sz="1200" b="0">
+                <a:solidFill>
+                  <a:srgbClr val="172B36"/>
+                </a:solidFill>
+                <a:latin typeface="Arial"/>
+                <a:ea typeface="Arial"/>
+                <a:cs typeface="Arial"/>
+              </a:defRPr>
+            </a:pPr>
+            <a:r>
+              <a:rPr sz="1200" b="0">
+                <a:solidFill>
+                  <a:srgbClr val="172B36"/>
+                </a:solidFill>
+                <a:latin typeface="Arial"/>
+                <a:ea typeface="Arial"/>
+                <a:cs typeface="Arial"/>
+              </a:rPr>
+              <a:t>532 QC-passing</a:t>
+            </a:r>
+          </a:p>
+          <a:p xmlns:a="http://schemas.openxmlformats.org/drawingml/2006/main">
+            <a:pPr>
+              <a:buNone/>
+              <a:defRPr sz="1200" b="0">
+                <a:solidFill>
+                  <a:srgbClr val="172B36"/>
+                </a:solidFill>
+                <a:latin typeface="Arial"/>
+                <a:ea typeface="Arial"/>
+                <a:cs typeface="Arial"/>
+              </a:defRPr>
+            </a:pPr>
+            <a:r>
+              <a:rPr sz="1200" b="0">
+                <a:solidFill>
+                  <a:srgbClr val="172B36"/>
+                </a:solidFill>
+                <a:latin typeface="Arial"/>
+                <a:ea typeface="Arial"/>
+                <a:cs typeface="Arial"/>
+              </a:rPr>
+              <a:t>Longcycler assemblies</a:t>
+            </a:r>
+          </a:p>
+          <a:p xmlns:a="http://schemas.openxmlformats.org/drawingml/2006/main">
+            <a:pPr>
+              <a:buNone/>
+              <a:defRPr sz="1200" b="0">
+                <a:solidFill>
+                  <a:srgbClr val="172B36"/>
+                </a:solidFill>
+                <a:latin typeface="Arial"/>
+                <a:ea typeface="Arial"/>
+                <a:cs typeface="Arial"/>
+              </a:defRPr>
+            </a:pPr>
+            <a:r>
+              <a:rPr sz="1200" b="0">
+                <a:solidFill>
+                  <a:srgbClr val="172B36"/>
+                </a:solidFill>
+                <a:latin typeface="Arial"/>
+                <a:ea typeface="Arial"/>
+                <a:cs typeface="Arial"/>
+              </a:rPr>
+              <a:t>one per episode</a:t>
+            </a:r>
+          </a:p>
+        </p:txBody>
+      </p:sp>
+      <p:sp>
+        <p:nvSpPr>
+          <p:cNvPr id="12" name="lc-native-pairs">
+            <a:extLst xmlns:a="http://schemas.openxmlformats.org/drawingml/2006/main">
+              <a:ext uri="{FF2B5EF4-FFF2-40B4-BE49-F238E27FC236}">
+                <a16:creationId xmlns:a16="http://schemas.microsoft.com/office/drawing/2014/main" id="{89ECCF4C-B385-4332-A8A1-0253C02FF14B}"/>
+              </a:ext>
+            </a:extLst>
+          </p:cNvPr>
+          <p:cNvSpPr>
+            <a:spLocks xmlns:a="http://schemas.openxmlformats.org/drawingml/2006/main" noGrp="1"/>
+          </p:cNvSpPr>
+          <p:nvPr/>
+        </p:nvSpPr>
+        <p:spPr>
+          <a:xfrm xmlns:a="http://schemas.openxmlformats.org/drawingml/2006/main">
+            <a:off x="4657725" y="2047875"/>
+            <a:ext cx="1695450" cy="1428750"/>
+          </a:xfrm>
+          <a:prstGeom xmlns:a="http://schemas.openxmlformats.org/drawingml/2006/main" prst="roundRect">
+            <a:avLst>
+              <a:gd name="adj" fmla="val 5333"/>
+            </a:avLst>
+          </a:prstGeom>
+          <a:solidFill xmlns:a="http://schemas.openxmlformats.org/drawingml/2006/main">
+            <a:srgbClr val="EEF1F4"/>
+          </a:solidFill>
+          <a:ln xmlns:a="http://schemas.openxmlformats.org/drawingml/2006/main" w="13335">
+            <a:solidFill>
+              <a:srgbClr val="6B7C8F"/>
+            </a:solidFill>
+            <a:prstDash val="solid"/>
+          </a:ln>
+        </p:spPr>
+        <p:txBody>
+          <a:bodyPr xmlns:a="http://schemas.openxmlformats.org/drawingml/2006/main"/>
+          <a:lstStyle xmlns:a="http://schemas.openxmlformats.org/drawingml/2006/main"/>
+          <a:p xmlns:a="http://schemas.openxmlformats.org/drawingml/2006/main">
+            <a:pPr>
+              <a:buNone/>
+              <a:defRPr sz="1200" b="0">
+                <a:solidFill>
+                  <a:srgbClr val="172B36"/>
+                </a:solidFill>
+                <a:latin typeface="Arial"/>
+                <a:ea typeface="Arial"/>
+                <a:cs typeface="Arial"/>
+              </a:defRPr>
+            </a:pPr>
+            <a:r>
+              <a:rPr sz="1200" b="0">
+                <a:solidFill>
+                  <a:srgbClr val="172B36"/>
+                </a:solidFill>
+                <a:latin typeface="Arial"/>
+                <a:ea typeface="Arial"/>
+                <a:cs typeface="Arial"/>
+              </a:rPr>
+              <a:t>DIRECT EVIDENCE</a:t>
+            </a:r>
+          </a:p>
+          <a:p xmlns:a="http://schemas.openxmlformats.org/drawingml/2006/main">
+            <a:pPr>
+              <a:buNone/>
+              <a:defRPr sz="1200" b="0">
+                <a:solidFill>
+                  <a:srgbClr val="172B36"/>
+                </a:solidFill>
+                <a:latin typeface="Arial"/>
+                <a:ea typeface="Arial"/>
+                <a:cs typeface="Arial"/>
+              </a:defRPr>
+            </a:pPr>
+            <a:r>
+              <a:rPr sz="1200" b="0">
+                <a:solidFill>
+                  <a:srgbClr val="172B36"/>
+                </a:solidFill>
+                <a:latin typeface="Arial"/>
+                <a:ea typeface="Arial"/>
+                <a:cs typeface="Arial"/>
+              </a:rPr>
+              <a:t>893 resident pairs</a:t>
+            </a:r>
+          </a:p>
+          <a:p xmlns:a="http://schemas.openxmlformats.org/drawingml/2006/main">
+            <a:pPr>
+              <a:buNone/>
+              <a:defRPr sz="1200" b="0">
+                <a:solidFill>
+                  <a:srgbClr val="172B36"/>
+                </a:solidFill>
+                <a:latin typeface="Arial"/>
+                <a:ea typeface="Arial"/>
+                <a:cs typeface="Arial"/>
+              </a:defRPr>
+            </a:pPr>
+            <a:r>
+              <a:rPr sz="1200" b="0">
+                <a:solidFill>
+                  <a:srgbClr val="172B36"/>
+                </a:solidFill>
+                <a:latin typeface="Arial"/>
+                <a:ea typeface="Arial"/>
+                <a:cs typeface="Arial"/>
+              </a:rPr>
+              <a:t>371 adjacent</a:t>
+            </a:r>
+          </a:p>
+          <a:p xmlns:a="http://schemas.openxmlformats.org/drawingml/2006/main">
+            <a:pPr>
+              <a:buNone/>
+              <a:defRPr sz="1200" b="0">
+                <a:solidFill>
+                  <a:srgbClr val="172B36"/>
+                </a:solidFill>
+                <a:latin typeface="Arial"/>
+                <a:ea typeface="Arial"/>
+                <a:cs typeface="Arial"/>
+              </a:defRPr>
+            </a:pPr>
+            <a:r>
+              <a:rPr sz="1200" b="0">
+                <a:solidFill>
+                  <a:srgbClr val="172B36"/>
+                </a:solidFill>
+                <a:latin typeface="Arial"/>
+                <a:ea typeface="Arial"/>
+                <a:cs typeface="Arial"/>
+              </a:rPr>
+              <a:t>140 &lt;=25 SNPs</a:t>
+            </a:r>
+          </a:p>
+        </p:txBody>
+      </p:sp>
+      <p:sp>
+        <p:nvSpPr>
+          <p:cNvPr id="13" name="lc-native-cases">
+            <a:extLst xmlns:a="http://schemas.openxmlformats.org/drawingml/2006/main">
+              <a:ext uri="{FF2B5EF4-FFF2-40B4-BE49-F238E27FC236}">
+                <a16:creationId xmlns:a16="http://schemas.microsoft.com/office/drawing/2014/main" id="{2BD07311-DB17-476A-9CF0-04795895B770}"/>
+              </a:ext>
+            </a:extLst>
+          </p:cNvPr>
+          <p:cNvSpPr>
+            <a:spLocks xmlns:a="http://schemas.openxmlformats.org/drawingml/2006/main" noGrp="1"/>
+          </p:cNvSpPr>
+          <p:nvPr/>
+        </p:nvSpPr>
+        <p:spPr>
+          <a:xfrm xmlns:a="http://schemas.openxmlformats.org/drawingml/2006/main">
+            <a:off x="6534150" y="2047875"/>
+            <a:ext cx="1695450" cy="1428750"/>
+          </a:xfrm>
+          <a:prstGeom xmlns:a="http://schemas.openxmlformats.org/drawingml/2006/main" prst="roundRect">
+            <a:avLst>
+              <a:gd name="adj" fmla="val 5333"/>
+            </a:avLst>
+          </a:prstGeom>
+          <a:solidFill xmlns:a="http://schemas.openxmlformats.org/drawingml/2006/main">
+            <a:srgbClr val="FBEDE5"/>
+          </a:solidFill>
+          <a:ln xmlns:a="http://schemas.openxmlformats.org/drawingml/2006/main" w="13335">
+            <a:solidFill>
+              <a:srgbClr val="D95F0E"/>
+            </a:solidFill>
+            <a:prstDash val="solid"/>
+          </a:ln>
+        </p:spPr>
+        <p:txBody>
+          <a:bodyPr xmlns:a="http://schemas.openxmlformats.org/drawingml/2006/main"/>
+          <a:lstStyle xmlns:a="http://schemas.openxmlformats.org/drawingml/2006/main"/>
+          <a:p xmlns:a="http://schemas.openxmlformats.org/drawingml/2006/main">
+            <a:pPr>
+              <a:buNone/>
+              <a:defRPr sz="1200" b="0">
+                <a:solidFill>
+                  <a:srgbClr val="172B36"/>
+                </a:solidFill>
+                <a:latin typeface="Arial"/>
+                <a:ea typeface="Arial"/>
+                <a:cs typeface="Arial"/>
+              </a:defRPr>
+            </a:pPr>
+            <a:r>
+              <a:rPr sz="1200" b="0">
+                <a:solidFill>
+                  <a:srgbClr val="172B36"/>
+                </a:solidFill>
+                <a:latin typeface="Arial"/>
+                <a:ea typeface="Arial"/>
+                <a:cs typeface="Arial"/>
+              </a:rPr>
+              <a:t>FOCUSED CASEBOOK</a:t>
+            </a:r>
+          </a:p>
+          <a:p xmlns:a="http://schemas.openxmlformats.org/drawingml/2006/main">
+            <a:pPr>
+              <a:buNone/>
+              <a:defRPr sz="1200" b="0">
+                <a:solidFill>
+                  <a:srgbClr val="172B36"/>
+                </a:solidFill>
+                <a:latin typeface="Arial"/>
+                <a:ea typeface="Arial"/>
+                <a:cs typeface="Arial"/>
+              </a:defRPr>
+            </a:pPr>
+            <a:r>
+              <a:rPr sz="1200" b="0">
+                <a:solidFill>
+                  <a:srgbClr val="172B36"/>
+                </a:solidFill>
+                <a:latin typeface="Arial"/>
+                <a:ea typeface="Arial"/>
+                <a:cs typeface="Arial"/>
+              </a:rPr>
+              <a:t>9/9/0</a:t>
+            </a:r>
+          </a:p>
+          <a:p xmlns:a="http://schemas.openxmlformats.org/drawingml/2006/main">
+            <a:pPr>
+              <a:buNone/>
+              <a:defRPr sz="1200" b="0">
+                <a:solidFill>
+                  <a:srgbClr val="172B36"/>
+                </a:solidFill>
+                <a:latin typeface="Arial"/>
+                <a:ea typeface="Arial"/>
+                <a:cs typeface="Arial"/>
+              </a:defRPr>
+            </a:pPr>
+            <a:r>
+              <a:rPr sz="1200" b="0">
+                <a:solidFill>
+                  <a:srgbClr val="172B36"/>
+                </a:solidFill>
+                <a:latin typeface="Arial"/>
+                <a:ea typeface="Arial"/>
+                <a:cs typeface="Arial"/>
+              </a:rPr>
+              <a:t>cases/linked/missing</a:t>
+            </a:r>
+          </a:p>
+          <a:p xmlns:a="http://schemas.openxmlformats.org/drawingml/2006/main">
+            <a:pPr>
+              <a:buNone/>
+              <a:defRPr sz="1200" b="0">
+                <a:solidFill>
+                  <a:srgbClr val="172B36"/>
+                </a:solidFill>
+                <a:latin typeface="Arial"/>
+                <a:ea typeface="Arial"/>
+                <a:cs typeface="Arial"/>
+              </a:defRPr>
+            </a:pPr>
+            <a:r>
+              <a:rPr sz="1200" b="0">
+                <a:solidFill>
+                  <a:srgbClr val="172B36"/>
+                </a:solidFill>
+                <a:latin typeface="Arial"/>
+                <a:ea typeface="Arial"/>
+                <a:cs typeface="Arial"/>
+              </a:rPr>
+              <a:t>5/9 &lt;=25 SNPs</a:t>
+            </a:r>
+          </a:p>
+        </p:txBody>
+      </p:sp>
+      <p:sp>
+        <p:nvSpPr>
+          <p:cNvPr id="14" name="lc-native-release-banner">
+            <a:extLst xmlns:a="http://schemas.openxmlformats.org/drawingml/2006/main">
+              <a:ext uri="{FF2B5EF4-FFF2-40B4-BE49-F238E27FC236}">
+                <a16:creationId xmlns:a16="http://schemas.microsoft.com/office/drawing/2014/main" id="{D177B737-2D6B-4B20-A58A-CA67FCA366E0}"/>
+              </a:ext>
+            </a:extLst>
+          </p:cNvPr>
+          <p:cNvSpPr>
+            <a:spLocks xmlns:a="http://schemas.openxmlformats.org/drawingml/2006/main" noGrp="1"/>
+          </p:cNvSpPr>
+          <p:nvPr/>
+        </p:nvSpPr>
+        <p:spPr>
+          <a:xfrm xmlns:a="http://schemas.openxmlformats.org/drawingml/2006/main">
+            <a:off x="904875" y="3810000"/>
+            <a:ext cx="7324725" cy="762000"/>
+          </a:xfrm>
+          <a:prstGeom xmlns:a="http://schemas.openxmlformats.org/drawingml/2006/main" prst="roundRect">
+            <a:avLst>
+              <a:gd name="adj" fmla="val 8750"/>
+            </a:avLst>
+          </a:prstGeom>
+          <a:solidFill xmlns:a="http://schemas.openxmlformats.org/drawingml/2006/main">
+            <a:srgbClr val="F4F6F7"/>
+          </a:solidFill>
+          <a:ln xmlns:a="http://schemas.openxmlformats.org/drawingml/2006/main" w="9525">
+            <a:solidFill>
+              <a:srgbClr val="D3DCE1"/>
+            </a:solidFill>
+            <a:prstDash val="solid"/>
+          </a:ln>
+        </p:spPr>
+        <p:txBody>
+          <a:bodyPr xmlns:a="http://schemas.openxmlformats.org/drawingml/2006/main"/>
+          <a:lstStyle xmlns:a="http://schemas.openxmlformats.org/drawingml/2006/main"/>
+          <a:p xmlns:a="http://schemas.openxmlformats.org/drawingml/2006/main">
+            <a:pPr>
+              <a:buNone/>
+              <a:defRPr sz="1275" b="1">
+                <a:solidFill>
+                  <a:srgbClr val="172B36"/>
+                </a:solidFill>
+                <a:latin typeface="Arial"/>
+                <a:ea typeface="Arial"/>
+                <a:cs typeface="Arial"/>
+              </a:defRPr>
+            </a:pPr>
+            <a:r>
+              <a:rPr sz="1275" b="1">
+                <a:solidFill>
+                  <a:srgbClr val="172B36"/>
+                </a:solidFill>
+                <a:latin typeface="Arial"/>
+                <a:ea typeface="Arial"/>
+                <a:cs typeface="Arial"/>
+              </a:rPr>
+              <a:t>Release layer: operational phenotype -&gt; direct pairs -&gt; adjacent transitions -&gt; RQ01-RQ10</a:t>
+            </a:r>
+          </a:p>
+        </p:txBody>
+      </p:sp>
     </p:spTree>
     <p:extLst>
       <p:ext uri="{BB962C8B-B14F-4D97-AF65-F5344CB8AC3E}">
@@ -6912,7 +8935,7 @@
                 <a:ea typeface="Arial"/>
                 <a:cs typeface="Arial"/>
               </a:rPr>
-              <a:t>Worked transition: participant 20026 develops symptoms without measured profile change</a:t>
+              <a:t>9 operational Not_UTI-to-UTI transitions are all genomically linked</a:t>
             </a:r>
           </a:p>
         </p:txBody>
@@ -6956,25 +8979,25 @@
                 <a:ea typeface="Arial"/>
                 <a:cs typeface="Arial"/>
               </a:rPr>
-              <a:t>DESCRIPTIVE | Stable measured profile supports a host-state or regulatory hypothesis; it does not prove mechanism.</a:t>
+              <a:t>DESCRIPTIVE | 5 of 9 focused direct pairs are at or below 25 SNPs; no mechanism is proved.</a:t>
             </a:r>
           </a:p>
         </p:txBody>
       </p:sp>
       <p:pic>
         <p:nvPicPr>
-          <p:cNvPr id="6" name=""/>
+          <p:cNvPr id="9" name=""/>
           <p:cNvPicPr>
             <a:picLocks xmlns:a="http://schemas.openxmlformats.org/drawingml/2006/main" noChangeAspect="1"/>
           </p:cNvPicPr>
           <p:nvPr/>
         </p:nvPicPr>
         <p:blipFill>
-          <a:blip xmlns:r="http://schemas.openxmlformats.org/officeDocument/2006/relationships" xmlns:a="http://schemas.openxmlformats.org/drawingml/2006/main" r:embed="R28de47afedef4e60"/>
+          <a:blip xmlns:r="http://schemas.openxmlformats.org/officeDocument/2006/relationships" xmlns:a="http://schemas.openxmlformats.org/drawingml/2006/main" r:embed="R1c378e05aee54735"/>
           <a:stretch xmlns:a="http://schemas.openxmlformats.org/drawingml/2006/main"/>
         </p:blipFill>
         <p:spPr>
-          <a:xfrm xmlns:a="http://schemas.openxmlformats.org/drawingml/2006/main">
+          <a:xfrm xmlns:a="http://schemas.openxmlformats.org/drawingml/2006/main" flipH="0" flipV="0">
             <a:off x="742950" y="1524000"/>
             <a:ext cx="7658100" cy="4476750"/>
           </a:xfrm>
@@ -7083,25 +9106,25 @@
                 <a:ea typeface="Arial"/>
                 <a:cs typeface="Arial"/>
               </a:rPr>
-              <a:t>DESCRIPTIVE | 11 clinical transitions; 10 WGS/VF-linked; 4 stable-profile and 3 replacement-consistent.</a:t>
+              <a:t>DESCRIPTIVE | 9 operational transitions; 9/9 genomically linked; 0 missing endpoint; 5 &lt;=25 SNPs.</a:t>
             </a:r>
           </a:p>
         </p:txBody>
       </p:sp>
       <p:pic>
         <p:nvPicPr>
-          <p:cNvPr id="6" name=""/>
+          <p:cNvPr id="9" name=""/>
           <p:cNvPicPr>
             <a:picLocks xmlns:a="http://schemas.openxmlformats.org/drawingml/2006/main" noChangeAspect="1"/>
           </p:cNvPicPr>
           <p:nvPr/>
         </p:nvPicPr>
         <p:blipFill>
-          <a:blip xmlns:r="http://schemas.openxmlformats.org/officeDocument/2006/relationships" xmlns:a="http://schemas.openxmlformats.org/drawingml/2006/main" r:embed="R025ca07b13ff407d"/>
+          <a:blip xmlns:r="http://schemas.openxmlformats.org/officeDocument/2006/relationships" xmlns:a="http://schemas.openxmlformats.org/drawingml/2006/main" r:embed="R6a603cdb9cbb4c54"/>
           <a:stretch xmlns:a="http://schemas.openxmlformats.org/drawingml/2006/main"/>
         </p:blipFill>
         <p:spPr>
-          <a:xfrm xmlns:a="http://schemas.openxmlformats.org/drawingml/2006/main">
+          <a:xfrm xmlns:a="http://schemas.openxmlformats.org/drawingml/2006/main" flipH="0" flipV="0">
             <a:off x="742950" y="1799987"/>
             <a:ext cx="7658100" cy="3924776"/>
           </a:xfrm>
@@ -7166,7 +9189,7 @@
                 <a:ea typeface="Arial"/>
                 <a:cs typeface="Arial"/>
               </a:rPr>
-              <a:t>Central finding: the same measured strain profile can accompany changing clinical state</a:t>
+              <a:t>Direct paired evidence distinguishes close from distant clinical transitions</a:t>
             </a:r>
           </a:p>
         </p:txBody>
@@ -7210,25 +9233,25 @@
                 <a:ea typeface="Arial"/>
                 <a:cs typeface="Arial"/>
               </a:rPr>
-              <a:t>DESCRIPTIVE | Low SNP distance plus stable VF profile can accompany symptom emergence.</a:t>
+              <a:t>DESCRIPTIVE | 140/371 adjacent pairs are &lt;=25 SNPs; focused transitions: 5/9.</a:t>
             </a:r>
           </a:p>
         </p:txBody>
       </p:sp>
       <p:pic>
         <p:nvPicPr>
-          <p:cNvPr id="6" name=""/>
+          <p:cNvPr id="9" name=""/>
           <p:cNvPicPr>
             <a:picLocks xmlns:a="http://schemas.openxmlformats.org/drawingml/2006/main" noChangeAspect="1"/>
           </p:cNvPicPr>
           <p:nvPr/>
         </p:nvPicPr>
         <p:blipFill>
-          <a:blip xmlns:r="http://schemas.openxmlformats.org/officeDocument/2006/relationships" xmlns:a="http://schemas.openxmlformats.org/drawingml/2006/main" r:embed="R37416f245cc54352"/>
+          <a:blip xmlns:r="http://schemas.openxmlformats.org/officeDocument/2006/relationships" xmlns:a="http://schemas.openxmlformats.org/drawingml/2006/main" r:embed="R79099a28041f4462"/>
           <a:stretch xmlns:a="http://schemas.openxmlformats.org/drawingml/2006/main"/>
         </p:blipFill>
         <p:spPr>
-          <a:xfrm xmlns:a="http://schemas.openxmlformats.org/drawingml/2006/main">
+          <a:xfrm xmlns:a="http://schemas.openxmlformats.org/drawingml/2006/main" flipH="0" flipV="0">
             <a:off x="742950" y="1847850"/>
             <a:ext cx="7658100" cy="3829050"/>
           </a:xfrm>
